--- a/documents/Livret-SED-enfant-SedOcc.pptx
+++ b/documents/Livret-SED-enfant-SedOcc.pptx
@@ -5469,7 +5469,7 @@
         <p:spPr>
           <a:xfrm>
             <a:off x="592319" y="3006060"/>
-            <a:ext cx="5040000" cy="1345000"/>
+            <a:ext cx="5040000" cy="1620000"/>
           </a:xfrm>
           <a:prstGeom prst="rect">
             <a:avLst/>
@@ -5536,8 +5536,8 @@
         </p:blipFill>
         <p:spPr>
           <a:xfrm>
-            <a:off x="823993" y="4759600"/>
-            <a:ext cx="5760000" cy="4140000"/>
+            <a:off x="1152000" y="4968000"/>
+            <a:ext cx="5256000" cy="3780000"/>
           </a:xfrm>
           <a:prstGeom prst="roundRect">
             <a:avLst>

--- a/documents/Livret-SED-enfant-SedOcc.pptx
+++ b/documents/Livret-SED-enfant-SedOcc.pptx
@@ -5468,8 +5468,8 @@
         </p:nvSpPr>
         <p:spPr>
           <a:xfrm>
-            <a:off x="592319" y="3006060"/>
-            <a:ext cx="5040000" cy="1620000"/>
+            <a:off x="592319" y="3060000"/>
+            <a:ext cx="5220000" cy="1260000"/>
           </a:xfrm>
           <a:prstGeom prst="rect">
             <a:avLst/>
@@ -5485,7 +5485,7 @@
               <a:buNone/>
             </a:pPr>
             <a:r>
-              <a:rPr lang="fr-FR" sz="2400" dirty="0">
+              <a:rPr lang="fr-FR" sz="2000" dirty="0">
                 <a:solidFill>
                   <a:srgbClr val="333333"/>
                 </a:solidFill>
@@ -5496,7 +5496,7 @@
               <a:t>Dans la cour, on peut s'amuser ensemble à des </a:t>
             </a:r>
             <a:r>
-              <a:rPr lang="fr-FR" sz="2400" b="1" dirty="0">
+              <a:rPr lang="fr-FR" sz="2000" b="1" dirty="0">
                 <a:solidFill>
                   <a:srgbClr val="333333"/>
                 </a:solidFill>
@@ -5507,7 +5507,7 @@
               <a:t>jeux sans bousculade</a:t>
             </a:r>
             <a:r>
-              <a:rPr lang="fr-FR" sz="2400" dirty="0">
+              <a:rPr lang="fr-FR" sz="2000" dirty="0">
                 <a:solidFill>
                   <a:srgbClr val="333333"/>
                 </a:solidFill>
@@ -5536,8 +5536,8 @@
         </p:blipFill>
         <p:spPr>
           <a:xfrm>
-            <a:off x="1152000" y="4968000"/>
-            <a:ext cx="5256000" cy="3780000"/>
+            <a:off x="1026000" y="4500000"/>
+            <a:ext cx="5508000" cy="3960000"/>
           </a:xfrm>
           <a:prstGeom prst="roundRect">
             <a:avLst>
@@ -5861,7 +5861,7 @@
         </p:nvSpPr>
         <p:spPr>
           <a:xfrm>
-            <a:off x="786951" y="9050779"/>
+            <a:off x="786951" y="8640000"/>
             <a:ext cx="5867400" cy="461665"/>
           </a:xfrm>
           <a:prstGeom prst="rect">

--- a/documents/Livret-SED-enfant-SedOcc.pptx
+++ b/documents/Livret-SED-enfant-SedOcc.pptx
@@ -5536,8 +5536,8 @@
         </p:blipFill>
         <p:spPr>
           <a:xfrm>
-            <a:off x="1026000" y="4500000"/>
-            <a:ext cx="5508000" cy="3960000"/>
+            <a:off x="1183280" y="4600682"/>
+            <a:ext cx="5041425" cy="3624554"/>
           </a:xfrm>
           <a:prstGeom prst="roundRect">
             <a:avLst>
@@ -6008,8 +6008,8 @@
         </p:nvSpPr>
         <p:spPr>
           <a:xfrm>
-            <a:off x="914781" y="5771474"/>
-            <a:ext cx="5533644" cy="2620845"/>
+            <a:off x="861939" y="5637894"/>
+            <a:ext cx="4773219" cy="2620845"/>
           </a:xfrm>
           <a:prstGeom prst="rect">
             <a:avLst/>
@@ -6068,19 +6068,6 @@
               </a:rPr>
               <a:t>C'est important de se sentir entouré.</a:t>
             </a:r>
-          </a:p>
-          <a:p>
-            <a:pPr algn="l">
-              <a:spcBef>
-                <a:spcPts val="400"/>
-              </a:spcBef>
-            </a:pPr>
-            <a:endParaRPr lang="fr-FR" sz="2400" b="1" dirty="0">
-              <a:solidFill>
-                <a:srgbClr val="333333"/>
-              </a:solidFill>
-              <a:latin typeface="Poppins"/>
-            </a:endParaRPr>
           </a:p>
           <a:p>
             <a:pPr algn="l">

--- a/documents/Livret-SED-enfant-SedOcc.pptx
+++ b/documents/Livret-SED-enfant-SedOcc.pptx
@@ -212,7 +212,7 @@
           <a:p>
             <a:fld id="{A2B3F72A-3E22-47E7-995C-6D9D04600525}" type="datetimeFigureOut">
               <a:rPr lang="fr-FR" smtClean="0"/>
-              <a:t>29/06/2026</a:t>
+              <a:t>30/06/2026</a:t>
             </a:fld>
             <a:endParaRPr lang="fr-FR"/>
           </a:p>
@@ -1372,7 +1372,7 @@
           <a:p>
             <a:fld id="{1D8BD707-D9CF-40AE-B4C6-C98DA3205C09}" type="datetimeFigureOut">
               <a:rPr lang="en-US"/>
-              <a:t>6/29/26</a:t>
+              <a:t>6/30/26</a:t>
             </a:fld>
             <a:endParaRPr lang="en-US"/>
           </a:p>
@@ -1580,7 +1580,7 @@
           <a:p>
             <a:fld id="{1D8BD707-D9CF-40AE-B4C6-C98DA3205C09}" type="datetimeFigureOut">
               <a:rPr lang="en-US"/>
-              <a:t>6/29/26</a:t>
+              <a:t>6/30/26</a:t>
             </a:fld>
             <a:endParaRPr lang="en-US"/>
           </a:p>
@@ -1795,7 +1795,7 @@
           <a:p>
             <a:fld id="{1D8BD707-D9CF-40AE-B4C6-C98DA3205C09}" type="datetimeFigureOut">
               <a:rPr lang="en-US"/>
-              <a:t>6/29/26</a:t>
+              <a:t>6/30/26</a:t>
             </a:fld>
             <a:endParaRPr lang="en-US"/>
           </a:p>
@@ -1944,7 +1944,7 @@
           <a:p>
             <a:fld id="{1D8BD707-D9CF-40AE-B4C6-C98DA3205C09}" type="datetimeFigureOut">
               <a:rPr lang="en-US"/>
-              <a:t>6/29/26</a:t>
+              <a:t>6/30/26</a:t>
             </a:fld>
             <a:endParaRPr lang="en-US"/>
           </a:p>
@@ -2064,7 +2064,7 @@
           <a:p>
             <a:fld id="{1D8BD707-D9CF-40AE-B4C6-C98DA3205C09}" type="datetimeFigureOut">
               <a:rPr lang="en-US"/>
-              <a:t>6/29/26</a:t>
+              <a:t>6/30/26</a:t>
             </a:fld>
             <a:endParaRPr lang="en-US"/>
           </a:p>
@@ -2312,7 +2312,7 @@
           <a:p>
             <a:fld id="{1D8BD707-D9CF-40AE-B4C6-C98DA3205C09}" type="datetimeFigureOut">
               <a:rPr lang="en-US"/>
-              <a:t>6/29/26</a:t>
+              <a:t>6/30/26</a:t>
             </a:fld>
             <a:endParaRPr lang="en-US"/>
           </a:p>
@@ -2982,8 +2982,8 @@
         </p:blipFill>
         <p:spPr>
           <a:xfrm>
-            <a:off x="828000" y="1440000"/>
-            <a:ext cx="5904000" cy="2520000"/>
+            <a:off x="828000" y="1259999"/>
+            <a:ext cx="5904000" cy="3093720"/>
           </a:xfrm>
           <a:prstGeom prst="roundRect">
             <a:avLst>
@@ -3021,8 +3021,8 @@
         </p:blipFill>
         <p:spPr>
           <a:xfrm>
-            <a:off x="1188000" y="5220000"/>
-            <a:ext cx="3060000" cy="3420000"/>
+            <a:off x="962025" y="5648652"/>
+            <a:ext cx="3886200" cy="2456091"/>
           </a:xfrm>
           <a:prstGeom prst="roundRect">
             <a:avLst>
@@ -3106,7 +3106,7 @@
         <p:spPr>
           <a:xfrm>
             <a:off x="468000" y="4140000"/>
-            <a:ext cx="6624000" cy="900000"/>
+            <a:ext cx="6624000" cy="1200329"/>
           </a:xfrm>
           <a:prstGeom prst="rect">
             <a:avLst/>
@@ -3117,6 +3117,15 @@
             <a:spAutoFit/>
           </a:bodyPr>
           <a:lstStyle/>
+          <a:p>
+            <a:pPr algn="ctr"/>
+            <a:endParaRPr lang="fr-FR" sz="2400" dirty="0">
+              <a:solidFill>
+                <a:srgbClr val="333333"/>
+              </a:solidFill>
+              <a:latin typeface="Poppins"/>
+            </a:endParaRPr>
+          </a:p>
           <a:p>
             <a:pPr algn="ctr"/>
             <a:r>
@@ -3427,8 +3436,8 @@
         </p:blipFill>
         <p:spPr>
           <a:xfrm>
-            <a:off x="647405" y="1694321"/>
-            <a:ext cx="2563713" cy="4114800"/>
+            <a:off x="722311" y="1192289"/>
+            <a:ext cx="5953420" cy="3297493"/>
           </a:xfrm>
           <a:prstGeom prst="roundRect">
             <a:avLst>
@@ -3771,8 +3780,8 @@
         </p:nvSpPr>
         <p:spPr>
           <a:xfrm>
-            <a:off x="3426878" y="1812729"/>
-            <a:ext cx="3462250" cy="2308324"/>
+            <a:off x="519050" y="4782144"/>
+            <a:ext cx="4333938" cy="1938992"/>
           </a:xfrm>
           <a:prstGeom prst="rect">
             <a:avLst/>
@@ -3912,8 +3921,8 @@
         </p:blipFill>
         <p:spPr>
           <a:xfrm>
-            <a:off x="2160000" y="1260000"/>
-            <a:ext cx="3240000" cy="2520000"/>
+            <a:off x="1571625" y="1260000"/>
+            <a:ext cx="4267200" cy="2520000"/>
           </a:xfrm>
           <a:prstGeom prst="roundRect">
             <a:avLst>
@@ -4412,8 +4421,8 @@
         </p:blipFill>
         <p:spPr>
           <a:xfrm>
-            <a:off x="1260000" y="1260000"/>
-            <a:ext cx="5040000" cy="3960000"/>
+            <a:off x="1038226" y="1260001"/>
+            <a:ext cx="5261774" cy="3389750"/>
           </a:xfrm>
           <a:prstGeom prst="roundRect">
             <a:avLst>
@@ -4742,7 +4751,7 @@
         </p:nvSpPr>
         <p:spPr>
           <a:xfrm>
-            <a:off x="468000" y="5580000"/>
+            <a:off x="468000" y="5467639"/>
             <a:ext cx="4227825" cy="830997"/>
           </a:xfrm>
           <a:prstGeom prst="rect">
@@ -5468,8 +5477,8 @@
         </p:nvSpPr>
         <p:spPr>
           <a:xfrm>
-            <a:off x="592319" y="3060000"/>
-            <a:ext cx="5220000" cy="1260000"/>
+            <a:off x="592319" y="3006060"/>
+            <a:ext cx="5040000" cy="1345000"/>
           </a:xfrm>
           <a:prstGeom prst="rect">
             <a:avLst/>
@@ -5485,7 +5494,7 @@
               <a:buNone/>
             </a:pPr>
             <a:r>
-              <a:rPr lang="fr-FR" sz="2000" dirty="0">
+              <a:rPr lang="fr-FR" sz="2400" dirty="0">
                 <a:solidFill>
                   <a:srgbClr val="333333"/>
                 </a:solidFill>
@@ -5496,7 +5505,7 @@
               <a:t>Dans la cour, on peut s'amuser ensemble à des </a:t>
             </a:r>
             <a:r>
-              <a:rPr lang="fr-FR" sz="2000" b="1" dirty="0">
+              <a:rPr lang="fr-FR" sz="2400" b="1" dirty="0">
                 <a:solidFill>
                   <a:srgbClr val="333333"/>
                 </a:solidFill>
@@ -5507,7 +5516,7 @@
               <a:t>jeux sans bousculade</a:t>
             </a:r>
             <a:r>
-              <a:rPr lang="fr-FR" sz="2000" dirty="0">
+              <a:rPr lang="fr-FR" sz="2400" dirty="0">
                 <a:solidFill>
                   <a:srgbClr val="333333"/>
                 </a:solidFill>
@@ -5536,8 +5545,8 @@
         </p:blipFill>
         <p:spPr>
           <a:xfrm>
-            <a:off x="1183280" y="4600682"/>
-            <a:ext cx="5041425" cy="3624554"/>
+            <a:off x="786951" y="4982305"/>
+            <a:ext cx="5853112" cy="3604035"/>
           </a:xfrm>
           <a:prstGeom prst="roundRect">
             <a:avLst>
@@ -5861,7 +5870,7 @@
         </p:nvSpPr>
         <p:spPr>
           <a:xfrm>
-            <a:off x="786951" y="8640000"/>
+            <a:off x="786951" y="9050779"/>
             <a:ext cx="5867400" cy="461665"/>
           </a:xfrm>
           <a:prstGeom prst="rect">
@@ -6008,8 +6017,8 @@
         </p:nvSpPr>
         <p:spPr>
           <a:xfrm>
-            <a:off x="861939" y="5637894"/>
-            <a:ext cx="4773219" cy="2620845"/>
+            <a:off x="914781" y="5771474"/>
+            <a:ext cx="5533644" cy="2620845"/>
           </a:xfrm>
           <a:prstGeom prst="rect">
             <a:avLst/>
@@ -6068,6 +6077,19 @@
               </a:rPr>
               <a:t>C'est important de se sentir entouré.</a:t>
             </a:r>
+          </a:p>
+          <a:p>
+            <a:pPr algn="l">
+              <a:spcBef>
+                <a:spcPts val="400"/>
+              </a:spcBef>
+            </a:pPr>
+            <a:endParaRPr lang="fr-FR" sz="2400" b="1" dirty="0">
+              <a:solidFill>
+                <a:srgbClr val="333333"/>
+              </a:solidFill>
+              <a:latin typeface="Poppins"/>
+            </a:endParaRPr>
           </a:p>
           <a:p>
             <a:pPr algn="l">

--- a/documents/Livret-SED-enfant-SedOcc.pptx
+++ b/documents/Livret-SED-enfant-SedOcc.pptx
@@ -212,7 +212,7 @@
           <a:p>
             <a:fld id="{A2B3F72A-3E22-47E7-995C-6D9D04600525}" type="datetimeFigureOut">
               <a:rPr lang="fr-FR" smtClean="0"/>
-              <a:t>30/06/2026</a:t>
+              <a:t>09/07/2026</a:t>
             </a:fld>
             <a:endParaRPr lang="fr-FR"/>
           </a:p>
@@ -1372,7 +1372,7 @@
           <a:p>
             <a:fld id="{1D8BD707-D9CF-40AE-B4C6-C98DA3205C09}" type="datetimeFigureOut">
               <a:rPr lang="en-US"/>
-              <a:t>6/30/26</a:t>
+              <a:t>7/9/26</a:t>
             </a:fld>
             <a:endParaRPr lang="en-US"/>
           </a:p>
@@ -1580,7 +1580,7 @@
           <a:p>
             <a:fld id="{1D8BD707-D9CF-40AE-B4C6-C98DA3205C09}" type="datetimeFigureOut">
               <a:rPr lang="en-US"/>
-              <a:t>6/30/26</a:t>
+              <a:t>7/9/26</a:t>
             </a:fld>
             <a:endParaRPr lang="en-US"/>
           </a:p>
@@ -1795,7 +1795,7 @@
           <a:p>
             <a:fld id="{1D8BD707-D9CF-40AE-B4C6-C98DA3205C09}" type="datetimeFigureOut">
               <a:rPr lang="en-US"/>
-              <a:t>6/30/26</a:t>
+              <a:t>7/9/26</a:t>
             </a:fld>
             <a:endParaRPr lang="en-US"/>
           </a:p>
@@ -1944,7 +1944,7 @@
           <a:p>
             <a:fld id="{1D8BD707-D9CF-40AE-B4C6-C98DA3205C09}" type="datetimeFigureOut">
               <a:rPr lang="en-US"/>
-              <a:t>6/30/26</a:t>
+              <a:t>7/9/26</a:t>
             </a:fld>
             <a:endParaRPr lang="en-US"/>
           </a:p>
@@ -2064,7 +2064,7 @@
           <a:p>
             <a:fld id="{1D8BD707-D9CF-40AE-B4C6-C98DA3205C09}" type="datetimeFigureOut">
               <a:rPr lang="en-US"/>
-              <a:t>6/30/26</a:t>
+              <a:t>7/9/26</a:t>
             </a:fld>
             <a:endParaRPr lang="en-US"/>
           </a:p>
@@ -2312,7 +2312,7 @@
           <a:p>
             <a:fld id="{1D8BD707-D9CF-40AE-B4C6-C98DA3205C09}" type="datetimeFigureOut">
               <a:rPr lang="en-US"/>
-              <a:t>6/30/26</a:t>
+              <a:t>7/9/26</a:t>
             </a:fld>
             <a:endParaRPr lang="en-US"/>
           </a:p>
@@ -3021,8 +3021,8 @@
         </p:blipFill>
         <p:spPr>
           <a:xfrm>
-            <a:off x="962025" y="5648652"/>
-            <a:ext cx="3886200" cy="2456091"/>
+            <a:off x="962025" y="5804289"/>
+            <a:ext cx="3886200" cy="2144817"/>
           </a:xfrm>
           <a:prstGeom prst="roundRect">
             <a:avLst>
@@ -3436,8 +3436,8 @@
         </p:blipFill>
         <p:spPr>
           <a:xfrm>
-            <a:off x="722311" y="1192289"/>
-            <a:ext cx="5953420" cy="3297493"/>
+            <a:off x="722311" y="1250981"/>
+            <a:ext cx="5953420" cy="3180109"/>
           </a:xfrm>
           <a:prstGeom prst="roundRect">
             <a:avLst>
@@ -3499,14 +3499,8 @@
                 <a:ea typeface="Calibri" pitchFamily="34" charset="-122"/>
                 <a:cs typeface="Calibri" pitchFamily="34" charset="-120"/>
               </a:rPr>
-              <a:t>Ce n'est pas une maladie contagieuse, c'est une différence.</a:t>
+              <a:t>Ce n'est pas une maladie contagieuse : c'est une différence avec laquelle on naît, et qu'on garde toute sa vie.</a:t>
             </a:r>
-            <a:endParaRPr lang="fr-FR" sz="2400" dirty="0"/>
-          </a:p>
-          <a:p>
-            <a:pPr marL="0" indent="0" algn="l">
-              <a:buNone/>
-            </a:pPr>
             <a:endParaRPr lang="fr-FR" sz="2400" dirty="0"/>
           </a:p>
           <a:p>
@@ -3817,7 +3811,7 @@
                 <a:ea typeface="Calibri" panose="020F0502020204030204" pitchFamily="34" charset="0"/>
                 <a:cs typeface="Calibri" panose="020F0502020204030204" pitchFamily="34" charset="0"/>
               </a:rPr>
-              <a:t>Elle est moins solide ou trop élastique.</a:t>
+              <a:t>Elle est moins solide, ou parfois trop élastique.</a:t>
             </a:r>
             <a:endParaRPr lang="fr-FR" sz="2400" dirty="0">
               <a:latin typeface="Calibri" panose="020F0502020204030204" pitchFamily="34" charset="0"/>
@@ -4199,7 +4193,7 @@
         </p:blipFill>
         <p:spPr>
           <a:xfrm>
-            <a:off x="1122320" y="5982629"/>
+            <a:off x="1122878" y="6120000"/>
             <a:ext cx="1007999" cy="1007999"/>
           </a:xfrm>
           <a:prstGeom prst="rect">
@@ -4421,8 +4415,8 @@
         </p:blipFill>
         <p:spPr>
           <a:xfrm>
-            <a:off x="1038226" y="1260001"/>
-            <a:ext cx="5261774" cy="3389750"/>
+            <a:off x="1343025" y="1547204"/>
+            <a:ext cx="4800601" cy="2883911"/>
           </a:xfrm>
           <a:prstGeom prst="roundRect">
             <a:avLst>
@@ -4612,7 +4606,7 @@
         </p:nvSpPr>
         <p:spPr>
           <a:xfrm>
-            <a:off x="5184546" y="5718537"/>
+            <a:off x="5160988" y="5599726"/>
             <a:ext cx="1295999" cy="1295999"/>
           </a:xfrm>
           <a:prstGeom prst="ellipse">
@@ -4662,7 +4656,7 @@
         </p:blipFill>
         <p:spPr>
           <a:xfrm>
-            <a:off x="5383670" y="5949750"/>
+            <a:off x="5374662" y="5796000"/>
             <a:ext cx="1007999" cy="1007999"/>
           </a:xfrm>
           <a:prstGeom prst="rect">
@@ -4751,7 +4745,7 @@
         </p:nvSpPr>
         <p:spPr>
           <a:xfrm>
-            <a:off x="468000" y="5467639"/>
+            <a:off x="712361" y="5148950"/>
             <a:ext cx="4227825" cy="830997"/>
           </a:xfrm>
           <a:prstGeom prst="rect">
@@ -4943,7 +4937,7 @@
       </p:pic>
       <p:pic>
         <p:nvPicPr>
-          <p:cNvPr id="100" name="Picture 99" descr="image.jpeg"/>
+          <p:cNvPr id="101" name="Picture 100" descr="image.jpeg"/>
           <p:cNvPicPr>
             <a:picLocks noChangeAspect="1"/>
           </p:cNvPicPr>
@@ -4957,8 +4951,8 @@
         </p:blipFill>
         <p:spPr>
           <a:xfrm>
-            <a:off x="720000" y="4209750"/>
-            <a:ext cx="1896000" cy="1872000"/>
+            <a:off x="775973" y="4214827"/>
+            <a:ext cx="2624452" cy="1874574"/>
           </a:xfrm>
           <a:prstGeom prst="roundRect">
             <a:avLst>
@@ -4976,7 +4970,7 @@
       </p:pic>
       <p:pic>
         <p:nvPicPr>
-          <p:cNvPr id="101" name="Picture 100" descr="image.jpeg"/>
+          <p:cNvPr id="102" name="Picture 101" descr="image.jpeg"/>
           <p:cNvPicPr>
             <a:picLocks noChangeAspect="1"/>
           </p:cNvPicPr>
@@ -4990,8 +4984,8 @@
         </p:blipFill>
         <p:spPr>
           <a:xfrm>
-            <a:off x="2822475" y="4220850"/>
-            <a:ext cx="1896000" cy="1872000"/>
+            <a:off x="4238625" y="7163385"/>
+            <a:ext cx="2595825" cy="1914632"/>
           </a:xfrm>
           <a:prstGeom prst="roundRect">
             <a:avLst>
@@ -5009,7 +5003,7 @@
       </p:pic>
       <p:pic>
         <p:nvPicPr>
-          <p:cNvPr id="102" name="Picture 101" descr="image.jpeg"/>
+          <p:cNvPr id="103" name="Picture 102" descr="image.png"/>
           <p:cNvPicPr>
             <a:picLocks noChangeAspect="1"/>
           </p:cNvPicPr>
@@ -5023,8 +5017,8 @@
         </p:blipFill>
         <p:spPr>
           <a:xfrm>
-            <a:off x="4938450" y="4219453"/>
-            <a:ext cx="1896000" cy="1872000"/>
+            <a:off x="2409825" y="5768995"/>
+            <a:ext cx="2550676" cy="1755747"/>
           </a:xfrm>
           <a:prstGeom prst="roundRect">
             <a:avLst>
@@ -5042,7 +5036,7 @@
       </p:pic>
       <p:pic>
         <p:nvPicPr>
-          <p:cNvPr id="103" name="Picture 102" descr="image.png"/>
+          <p:cNvPr id="104" name="Picture 103" descr="image.jpg"/>
           <p:cNvPicPr>
             <a:picLocks noChangeAspect="1"/>
           </p:cNvPicPr>
@@ -5056,8 +5050,8 @@
         </p:blipFill>
         <p:spPr>
           <a:xfrm>
-            <a:off x="720000" y="7004000"/>
-            <a:ext cx="1896000" cy="1872000"/>
+            <a:off x="916190" y="7199865"/>
+            <a:ext cx="2560435" cy="1872000"/>
           </a:xfrm>
           <a:prstGeom prst="roundRect">
             <a:avLst>
@@ -5075,7 +5069,7 @@
       </p:pic>
       <p:pic>
         <p:nvPicPr>
-          <p:cNvPr id="104" name="Picture 103" descr="image.jpg"/>
+          <p:cNvPr id="105" name="Picture 104" descr="image.jpg"/>
           <p:cNvPicPr>
             <a:picLocks noChangeAspect="1"/>
           </p:cNvPicPr>
@@ -5089,41 +5083,8 @@
         </p:blipFill>
         <p:spPr>
           <a:xfrm>
-            <a:off x="2832000" y="7055750"/>
-            <a:ext cx="1896000" cy="1872000"/>
-          </a:xfrm>
-          <a:prstGeom prst="roundRect">
-            <a:avLst>
-              <a:gd name="adj" fmla="val 3000"/>
-            </a:avLst>
-          </a:prstGeom>
-          <a:effectLst>
-            <a:outerShdw blurRad="76200" dist="38100" dir="5400000" algn="t" rotWithShape="0">
-              <a:srgbClr val="8B1A2B">
-                <a:alpha val="22000"/>
-              </a:srgbClr>
-            </a:outerShdw>
-          </a:effectLst>
-        </p:spPr>
-      </p:pic>
-      <p:pic>
-        <p:nvPicPr>
-          <p:cNvPr id="105" name="Picture 104" descr="image.jpg"/>
-          <p:cNvPicPr>
-            <a:picLocks noChangeAspect="1"/>
-          </p:cNvPicPr>
-          <p:nvPr/>
-        </p:nvPicPr>
-        <p:blipFill>
-          <a:blip r:embed="rId10"/>
-          <a:stretch>
-            <a:fillRect/>
-          </a:stretch>
-        </p:blipFill>
-        <p:spPr>
-          <a:xfrm>
-            <a:off x="4944000" y="7092000"/>
-            <a:ext cx="1896000" cy="1872000"/>
+            <a:off x="4162425" y="4222027"/>
+            <a:ext cx="2672025" cy="1872000"/>
           </a:xfrm>
           <a:prstGeom prst="roundRect">
             <a:avLst>
@@ -5295,7 +5256,7 @@
           <p:nvPr/>
         </p:nvPicPr>
         <p:blipFill>
-          <a:blip r:embed="rId11"/>
+          <a:blip r:embed="rId10"/>
           <a:stretch>
             <a:fillRect/>
           </a:stretch>
@@ -5545,8 +5506,8 @@
         </p:blipFill>
         <p:spPr>
           <a:xfrm>
-            <a:off x="786951" y="4982305"/>
-            <a:ext cx="5853112" cy="3604035"/>
+            <a:off x="786951" y="5096550"/>
+            <a:ext cx="5853112" cy="3211241"/>
           </a:xfrm>
           <a:prstGeom prst="roundRect">
             <a:avLst>

--- a/documents/Livret-SED-enfant-SedOcc.pptx
+++ b/documents/Livret-SED-enfant-SedOcc.pptx
@@ -212,7 +212,7 @@
           <a:p>
             <a:fld id="{A2B3F72A-3E22-47E7-995C-6D9D04600525}" type="datetimeFigureOut">
               <a:rPr lang="fr-FR" smtClean="0"/>
-              <a:t>09/07/2026</a:t>
+              <a:t>13/07/2026</a:t>
             </a:fld>
             <a:endParaRPr lang="fr-FR"/>
           </a:p>
@@ -1372,7 +1372,7 @@
           <a:p>
             <a:fld id="{1D8BD707-D9CF-40AE-B4C6-C98DA3205C09}" type="datetimeFigureOut">
               <a:rPr lang="en-US"/>
-              <a:t>7/9/26</a:t>
+              <a:t>7/13/26</a:t>
             </a:fld>
             <a:endParaRPr lang="en-US"/>
           </a:p>
@@ -1580,7 +1580,7 @@
           <a:p>
             <a:fld id="{1D8BD707-D9CF-40AE-B4C6-C98DA3205C09}" type="datetimeFigureOut">
               <a:rPr lang="en-US"/>
-              <a:t>7/9/26</a:t>
+              <a:t>7/13/26</a:t>
             </a:fld>
             <a:endParaRPr lang="en-US"/>
           </a:p>
@@ -1795,7 +1795,7 @@
           <a:p>
             <a:fld id="{1D8BD707-D9CF-40AE-B4C6-C98DA3205C09}" type="datetimeFigureOut">
               <a:rPr lang="en-US"/>
-              <a:t>7/9/26</a:t>
+              <a:t>7/13/26</a:t>
             </a:fld>
             <a:endParaRPr lang="en-US"/>
           </a:p>
@@ -1944,7 +1944,7 @@
           <a:p>
             <a:fld id="{1D8BD707-D9CF-40AE-B4C6-C98DA3205C09}" type="datetimeFigureOut">
               <a:rPr lang="en-US"/>
-              <a:t>7/9/26</a:t>
+              <a:t>7/13/26</a:t>
             </a:fld>
             <a:endParaRPr lang="en-US"/>
           </a:p>
@@ -2064,7 +2064,7 @@
           <a:p>
             <a:fld id="{1D8BD707-D9CF-40AE-B4C6-C98DA3205C09}" type="datetimeFigureOut">
               <a:rPr lang="en-US"/>
-              <a:t>7/9/26</a:t>
+              <a:t>7/13/26</a:t>
             </a:fld>
             <a:endParaRPr lang="en-US"/>
           </a:p>
@@ -2312,7 +2312,7 @@
           <a:p>
             <a:fld id="{1D8BD707-D9CF-40AE-B4C6-C98DA3205C09}" type="datetimeFigureOut">
               <a:rPr lang="en-US"/>
-              <a:t>7/9/26</a:t>
+              <a:t>7/13/26</a:t>
             </a:fld>
             <a:endParaRPr lang="en-US"/>
           </a:p>
@@ -2730,7 +2730,7 @@
         </p:blipFill>
         <p:spPr>
           <a:xfrm>
-            <a:off x="1531044" y="4299140"/>
+            <a:off x="1804555" y="4660000"/>
             <a:ext cx="4500000" cy="4500000"/>
           </a:xfrm>
           <a:prstGeom prst="roundRect">
@@ -2982,47 +2982,8 @@
         </p:blipFill>
         <p:spPr>
           <a:xfrm>
-            <a:off x="828000" y="1259999"/>
-            <a:ext cx="5904000" cy="3093720"/>
-          </a:xfrm>
-          <a:prstGeom prst="roundRect">
-            <a:avLst>
-              <a:gd name="adj" fmla="val 3000"/>
-            </a:avLst>
-          </a:prstGeom>
-          <a:effectLst>
-            <a:outerShdw blurRad="76200" dist="38100" dir="5400000" algn="t" rotWithShape="0">
-              <a:srgbClr val="8B1A2B">
-                <a:alpha val="22000"/>
-              </a:srgbClr>
-            </a:outerShdw>
-          </a:effectLst>
-        </p:spPr>
-      </p:pic>
-      <p:pic>
-        <p:nvPicPr>
-          <p:cNvPr id="12" name="Picture 3" descr="image.jpg">
-            <a:extLst>
-              <a:ext uri="{FF2B5EF4-FFF2-40B4-BE49-F238E27FC236}">
-                <a16:creationId xmlns:a16="http://schemas.microsoft.com/office/drawing/2014/main" id="{0A4FCFEE-0379-6C4B-A89F-ABA9E58E8E8A}"/>
-              </a:ext>
-            </a:extLst>
-          </p:cNvPr>
-          <p:cNvPicPr>
-            <a:picLocks noChangeAspect="1"/>
-          </p:cNvPicPr>
-          <p:nvPr/>
-        </p:nvPicPr>
-        <p:blipFill>
-          <a:blip r:embed="rId6"/>
-          <a:stretch>
-            <a:fillRect/>
-          </a:stretch>
-        </p:blipFill>
-        <p:spPr>
-          <a:xfrm>
-            <a:off x="962025" y="5804289"/>
-            <a:ext cx="3886200" cy="2144817"/>
+            <a:off x="954670" y="6023282"/>
+            <a:ext cx="3839162" cy="2052809"/>
           </a:xfrm>
           <a:prstGeom prst="roundRect">
             <a:avLst>
@@ -3052,7 +3013,7 @@
         </p:nvSpPr>
         <p:spPr>
           <a:xfrm>
-            <a:off x="468000" y="8820000"/>
+            <a:off x="468000" y="8584940"/>
             <a:ext cx="6624000" cy="900000"/>
           </a:xfrm>
           <a:prstGeom prst="rect">
@@ -3105,7 +3066,7 @@
         </p:nvSpPr>
         <p:spPr>
           <a:xfrm>
-            <a:off x="468000" y="4140000"/>
+            <a:off x="468000" y="4262317"/>
             <a:ext cx="6624000" cy="1200329"/>
           </a:xfrm>
           <a:prstGeom prst="rect">
@@ -3322,6 +3283,36 @@
           <p:nvPr/>
         </p:nvPicPr>
         <p:blipFill>
+          <a:blip r:embed="rId6"/>
+          <a:stretch>
+            <a:fillRect/>
+          </a:stretch>
+        </p:blipFill>
+        <p:spPr>
+          <a:xfrm>
+            <a:off x="5443381" y="6978092"/>
+            <a:ext cx="1007999" cy="1007999"/>
+          </a:xfrm>
+          <a:prstGeom prst="rect">
+            <a:avLst/>
+          </a:prstGeom>
+        </p:spPr>
+      </p:pic>
+      <p:pic>
+        <p:nvPicPr>
+          <p:cNvPr id="14" name="Image 0" descr="unpacked/ppt/media/image_A81BC803.jpg">
+            <a:extLst>
+              <a:ext uri="{FF2B5EF4-FFF2-40B4-BE49-F238E27FC236}">
+                <a16:creationId xmlns:a16="http://schemas.microsoft.com/office/drawing/2014/main" id="{A2A54B0F-A3BF-524B-BF9C-3D15C7F0E626}"/>
+              </a:ext>
+            </a:extLst>
+          </p:cNvPr>
+          <p:cNvPicPr>
+            <a:picLocks noChangeAspect="1"/>
+          </p:cNvPicPr>
+          <p:nvPr/>
+        </p:nvPicPr>
+        <p:blipFill>
           <a:blip r:embed="rId7"/>
           <a:stretch>
             <a:fillRect/>
@@ -3329,12 +3320,21 @@
         </p:blipFill>
         <p:spPr>
           <a:xfrm>
-            <a:off x="5443381" y="6978092"/>
-            <a:ext cx="1007999" cy="1007999"/>
-          </a:xfrm>
-          <a:prstGeom prst="rect">
-            <a:avLst/>
-          </a:prstGeom>
+            <a:off x="954670" y="1331863"/>
+            <a:ext cx="5496710" cy="2936150"/>
+          </a:xfrm>
+          <a:prstGeom prst="roundRect">
+            <a:avLst>
+              <a:gd name="adj" fmla="val 3000"/>
+            </a:avLst>
+          </a:prstGeom>
+          <a:effectLst>
+            <a:outerShdw blurRad="76200" dist="38100" dir="5400000" algn="t" rotWithShape="0">
+              <a:srgbClr val="8B1A2B">
+                <a:alpha val="22000"/>
+              </a:srgbClr>
+            </a:outerShdw>
+          </a:effectLst>
         </p:spPr>
       </p:pic>
     </p:spTree>
@@ -3420,39 +3420,6 @@
           </a:p>
         </p:txBody>
       </p:sp>
-      <p:pic>
-        <p:nvPicPr>
-          <p:cNvPr id="3" name="Image 0" descr="unpacked/ppt/media/image_A81BC803.jpg"/>
-          <p:cNvPicPr>
-            <a:picLocks noChangeAspect="1"/>
-          </p:cNvPicPr>
-          <p:nvPr/>
-        </p:nvPicPr>
-        <p:blipFill>
-          <a:blip r:embed="rId4"/>
-          <a:stretch>
-            <a:fillRect/>
-          </a:stretch>
-        </p:blipFill>
-        <p:spPr>
-          <a:xfrm>
-            <a:off x="722311" y="1250981"/>
-            <a:ext cx="5953420" cy="3180109"/>
-          </a:xfrm>
-          <a:prstGeom prst="roundRect">
-            <a:avLst>
-              <a:gd name="adj" fmla="val 3000"/>
-            </a:avLst>
-          </a:prstGeom>
-          <a:effectLst>
-            <a:outerShdw blurRad="76200" dist="38100" dir="5400000" algn="t" rotWithShape="0">
-              <a:srgbClr val="8B1A2B">
-                <a:alpha val="22000"/>
-              </a:srgbClr>
-            </a:outerShdw>
-          </a:effectLst>
-        </p:spPr>
-      </p:pic>
       <p:sp>
         <p:nvSpPr>
           <p:cNvPr id="4" name="Text 1"/>
@@ -3461,7 +3428,7 @@
         </p:nvSpPr>
         <p:spPr>
           <a:xfrm>
-            <a:off x="457200" y="6600789"/>
+            <a:off x="457200" y="6832546"/>
             <a:ext cx="6647688" cy="2563453"/>
           </a:xfrm>
           <a:prstGeom prst="rect">
@@ -3678,7 +3645,7 @@
           <p:nvPr/>
         </p:nvPicPr>
         <p:blipFill>
-          <a:blip r:embed="rId5"/>
+          <a:blip r:embed="rId4"/>
           <a:stretch>
             <a:fillRect/>
           </a:stretch>
@@ -3746,7 +3713,7 @@
           <p:nvPr/>
         </p:nvPicPr>
         <p:blipFill rotWithShape="1">
-          <a:blip r:embed="rId6"/>
+          <a:blip r:embed="rId5"/>
           <a:srcRect l="9802" t="10888" r="15836" b="19876"/>
           <a:stretch/>
         </p:blipFill>
@@ -3821,6 +3788,45 @@
           </a:p>
         </p:txBody>
       </p:sp>
+      <p:pic>
+        <p:nvPicPr>
+          <p:cNvPr id="13" name="Picture 3" descr="image.jpg">
+            <a:extLst>
+              <a:ext uri="{FF2B5EF4-FFF2-40B4-BE49-F238E27FC236}">
+                <a16:creationId xmlns:a16="http://schemas.microsoft.com/office/drawing/2014/main" id="{ADA3D401-E2F8-EA42-8EC4-6D30C0D4606B}"/>
+              </a:ext>
+            </a:extLst>
+          </p:cNvPr>
+          <p:cNvPicPr>
+            <a:picLocks noChangeAspect="1"/>
+          </p:cNvPicPr>
+          <p:nvPr/>
+        </p:nvPicPr>
+        <p:blipFill>
+          <a:blip r:embed="rId6"/>
+          <a:stretch>
+            <a:fillRect/>
+          </a:stretch>
+        </p:blipFill>
+        <p:spPr>
+          <a:xfrm>
+            <a:off x="966788" y="1344332"/>
+            <a:ext cx="5487214" cy="3028426"/>
+          </a:xfrm>
+          <a:prstGeom prst="roundRect">
+            <a:avLst>
+              <a:gd name="adj" fmla="val 3000"/>
+            </a:avLst>
+          </a:prstGeom>
+          <a:effectLst>
+            <a:outerShdw blurRad="76200" dist="38100" dir="5400000" algn="t" rotWithShape="0">
+              <a:srgbClr val="8B1A2B">
+                <a:alpha val="22000"/>
+              </a:srgbClr>
+            </a:outerShdw>
+          </a:effectLst>
+        </p:spPr>
+      </p:pic>
     </p:spTree>
   </p:cSld>
   <p:clrMapOvr>
@@ -4415,8 +4421,8 @@
         </p:blipFill>
         <p:spPr>
           <a:xfrm>
-            <a:off x="1343025" y="1547204"/>
-            <a:ext cx="4800601" cy="2883911"/>
+            <a:off x="943550" y="1527950"/>
+            <a:ext cx="5672899" cy="3252672"/>
           </a:xfrm>
           <a:prstGeom prst="roundRect">
             <a:avLst>
@@ -4745,7 +4751,7 @@
         </p:nvSpPr>
         <p:spPr>
           <a:xfrm>
-            <a:off x="712361" y="5148950"/>
+            <a:off x="778704" y="5451229"/>
             <a:ext cx="4227825" cy="830997"/>
           </a:xfrm>
           <a:prstGeom prst="rect">
@@ -5953,8 +5959,8 @@
         </p:blipFill>
         <p:spPr>
           <a:xfrm>
-            <a:off x="914781" y="1188720"/>
-            <a:ext cx="5733288" cy="4114800"/>
+            <a:off x="914781" y="1490708"/>
+            <a:ext cx="5733288" cy="3657796"/>
           </a:xfrm>
           <a:prstGeom prst="roundRect">
             <a:avLst>

--- a/documents/Livret-SED-enfant-SedOcc.pptx
+++ b/documents/Livret-SED-enfant-SedOcc.pptx
@@ -16,6 +16,11 @@
     <p:sldId id="260" r:id="rId7"/>
     <p:sldId id="261" r:id="rId8"/>
     <p:sldId id="262" r:id="rId9"/>
+    <p:sldId id="266" r:id="rId16"/>
+    <p:sldId id="267" r:id="rId17"/>
+    <p:sldId id="268" r:id="rId18"/>
+    <p:sldId id="269" r:id="rId19"/>
+    <p:sldId id="265" r:id="rId15"/>
   </p:sldIdLst>
   <p:sldSz cx="7562850" cy="10688638"/>
   <p:notesSz cx="10688638" cy="7562850"/>
@@ -2822,6 +2827,2496 @@
 </p:sld>
 </file>
 
+<file path=ppt/slides/slide10.xml><?xml version="1.0" encoding="utf-8"?>
+<p:sld xmlns:a="http://schemas.openxmlformats.org/drawingml/2006/main" xmlns:r="http://schemas.openxmlformats.org/officeDocument/2006/relationships" xmlns:p="http://schemas.openxmlformats.org/presentationml/2006/main">
+  <p:cSld name="Slide 2">
+    <p:bg>
+      <p:bgPr>
+        <a:blipFill dpi="0" rotWithShape="1">
+          <a:blip r:embed="rId3">
+            <a:lum/>
+          </a:blip>
+          <a:srcRect/>
+          <a:stretch>
+            <a:fillRect/>
+          </a:stretch>
+        </a:blipFill>
+        <a:effectLst/>
+      </p:bgPr>
+    </p:bg>
+    <p:spTree>
+      <p:nvGrpSpPr>
+        <p:cNvPr id="1" name=""/>
+        <p:cNvGrpSpPr/>
+        <p:nvPr/>
+      </p:nvGrpSpPr>
+      <p:grpSpPr>
+        <a:xfrm>
+          <a:off x="0" y="0"/>
+          <a:ext cx="0" cy="0"/>
+          <a:chOff x="0" y="0"/>
+          <a:chExt cx="0" cy="0"/>
+        </a:xfrm>
+      </p:grpSpPr>
+      <p:sp>
+        <p:nvSpPr>
+          <p:cNvPr id="2" name="Text 0"/>
+          <p:cNvSpPr/>
+          <p:nvPr/>
+        </p:nvSpPr>
+        <p:spPr>
+          <a:xfrm>
+            <a:off x="457200" y="365760"/>
+            <a:ext cx="6647688" cy="640080"/>
+          </a:xfrm>
+          <a:prstGeom prst="rect">
+            <a:avLst/>
+          </a:prstGeom>
+          <a:noFill/>
+          <a:ln/>
+        </p:spPr>
+        <p:txBody>
+          <a:bodyPr wrap="square" lIns="0" tIns="0" rIns="0" bIns="0" rtlCol="0" anchor="ctr"/>
+          <a:lstStyle/>
+          <a:p>
+            <a:pPr marL="0" indent="0" algn="ctr">
+              <a:buNone/>
+            </a:pPr>
+            <a:r>
+              <a:rPr lang="fr-FR" sz="2800" b="1" dirty="0">
+                <a:solidFill>
+                  <a:srgbClr val="8B1A2B"/>
+                </a:solidFill>
+                <a:latin typeface="Poppins" pitchFamily="34" charset="0"/>
+                <a:ea typeface="Calibri" pitchFamily="34" charset="-122"/>
+                <a:cs typeface="Calibri" pitchFamily="34" charset="-120"/>
+              </a:rPr>
+              <a:t>Mon niveau de super-énergie !</a:t>
+            </a:r>
+            <a:endParaRPr lang="fr-FR" sz="2800" dirty="0"/>
+          </a:p>
+        </p:txBody>
+      </p:sp>
+      <p:sp>
+        <p:nvSpPr>
+          <p:cNvPr id="99" name="Footer"/>
+          <p:cNvSpPr/>
+          <p:nvPr/>
+        </p:nvSpPr>
+        <p:spPr>
+          <a:xfrm>
+            <a:off x="500000" y="10300000"/>
+            <a:ext cx="6562850" cy="300000"/>
+          </a:xfrm>
+          <a:prstGeom prst="rect">
+            <a:avLst/>
+          </a:prstGeom>
+          <a:noFill/>
+          <a:ln/>
+        </p:spPr>
+        <p:txBody>
+          <a:bodyPr wrap="square" lIns="0" tIns="0" rIns="0" bIns="0" rtlCol="0" anchor="ctr"/>
+          <a:lstStyle/>
+          <a:p>
+            <a:pPr marL="0" indent="0" algn="ctr">
+              <a:buNone/>
+            </a:pPr>
+            <a:r>
+              <a:rPr lang="fr-FR" sz="1000" i="1">
+                <a:solidFill>
+                  <a:srgbClr val="666666"/>
+                </a:solidFill>
+                <a:latin typeface="Poppins" pitchFamily="34" charset="0"/>
+                <a:ea typeface="Calibri" pitchFamily="34" charset="0"/>
+                <a:cs typeface="Calibri" pitchFamily="34" charset="0"/>
+              </a:rPr>
+              <a:t>Fait par l’association Sed’Occ France 04/2026</a:t>
+            </a:r>
+          </a:p>
+        </p:txBody>
+      </p:sp>
+      <p:pic>
+        <p:nvPicPr>
+          <p:cNvPr id="9" name="Image 8">
+            <a:extLst>
+              <a:ext uri="{FF2B5EF4-FFF2-40B4-BE49-F238E27FC236}">
+                <a16:creationId xmlns:a16="http://schemas.microsoft.com/office/drawing/2014/main" id="{1272B92B-21E4-464F-9F8E-4A62B1E16185}"/>
+              </a:ext>
+            </a:extLst>
+          </p:cNvPr>
+          <p:cNvPicPr>
+            <a:picLocks noChangeAspect="1"/>
+          </p:cNvPicPr>
+          <p:nvPr/>
+        </p:nvPicPr>
+        <p:blipFill rotWithShape="1">
+          <a:blip r:embed="rId5"/>
+          <a:srcRect l="9802" t="10888" r="15836" b="19876"/>
+          <a:stretch/>
+        </p:blipFill>
+        <p:spPr>
+          <a:xfrm>
+            <a:off x="6300000" y="9540000"/>
+            <a:ext cx="1080000" cy="1007999"/>
+          </a:xfrm>
+          <a:prstGeom prst="rect">
+            <a:avLst/>
+          </a:prstGeom>
+        </p:spPr>
+      </p:pic>
+      <p:sp>
+        <p:nvSpPr>
+          <p:cNvPr id="50" name="Text 50"/>
+          <p:cNvSpPr/>
+          <p:nvPr/>
+        </p:nvSpPr>
+        <p:spPr>
+          <a:xfrm>
+            <a:off x="457200" y="1080000"/>
+            <a:ext cx="6647688" cy="1700000"/>
+          </a:xfrm>
+          <a:prstGeom prst="rect">
+            <a:avLst/>
+          </a:prstGeom>
+          <a:noFill/>
+          <a:ln/>
+        </p:spPr>
+        <p:txBody>
+          <a:bodyPr wrap="square" lIns="0" tIns="0" rIns="0" bIns="0" rtlCol="0" anchor="t"/>
+          <a:lstStyle/>
+          <a:p>
+            <a:pPr marL="0" indent="0" algn="ctr">
+              <a:buNone/>
+            </a:pPr>
+            <a:r>
+              <a:rPr lang="fr-FR" sz="1800" b="0" dirty="0">
+                <a:solidFill>
+                  <a:srgbClr val="333333"/>
+                </a:solidFill>
+                <a:latin typeface="Poppins"/>
+              </a:rPr>
+              <a:t>Comme on l'a vu, à cause de la colle lâche, le corps fait plus d'efforts et la grande batterie peut se vider plus vite. C'est normal !</a:t>
+            </a:r>
+          </a:p>
+          <a:p>
+            <a:pPr marL="0" indent="0" algn="ctr">
+              <a:buNone/>
+            </a:pPr>
+            <a:r>
+              <a:rPr lang="fr-FR" sz="1800" b="0" dirty="0">
+                <a:solidFill>
+                  <a:srgbClr val="333333"/>
+                </a:solidFill>
+                <a:latin typeface="Poppins"/>
+              </a:rPr>
+              <a:t>Parfois, quand la batterie est à plat ou que les alarmes sonnent, tu as le droit de te sentir triste ou en colère. L'important, c'est d'apprendre à écouter ton corps.</a:t>
+            </a:r>
+          </a:p>
+          <a:p>
+            <a:pPr marL="0" indent="0" algn="ctr">
+              <a:buNone/>
+            </a:pPr>
+            <a:r>
+              <a:rPr lang="fr-FR" sz="1800" b="1" dirty="0">
+                <a:solidFill>
+                  <a:srgbClr val="8B1A2B"/>
+                </a:solidFill>
+                <a:latin typeface="Poppins"/>
+              </a:rPr>
+              <a:t>Montre à tes parents ou à tes copains où en est ta batterie aujourd'hui :</a:t>
+            </a:r>
+          </a:p>
+        </p:txBody>
+      </p:sp>
+      <p:sp>
+        <p:nvSpPr>
+          <p:cNvPr id="61" name="Card 61"/>
+          <p:cNvSpPr/>
+          <p:nvPr/>
+        </p:nvSpPr>
+        <p:spPr>
+          <a:xfrm>
+            <a:off x="457200" y="3350000"/>
+            <a:ext cx="2050000" cy="4400000"/>
+          </a:xfrm>
+          <a:prstGeom prst="roundRect">
+            <a:avLst>
+              <a:gd name="adj" fmla="val 6000"/>
+            </a:avLst>
+          </a:prstGeom>
+          <a:solidFill>
+            <a:srgbClr val="FFFFFF"/>
+          </a:solidFill>
+          <a:ln w="12700">
+            <a:solidFill>
+              <a:srgbClr val="8B1A2B">
+                <a:alpha val="15000"/>
+              </a:srgbClr>
+            </a:solidFill>
+          </a:ln>
+          <a:effectLst>
+            <a:outerShdw blurRad="60000" dist="20000" dir="5400000" algn="t" rotWithShape="0">
+              <a:srgbClr val="8B1A2B">
+                <a:alpha val="18000"/>
+              </a:srgbClr>
+            </a:outerShdw>
+          </a:effectLst>
+        </p:spPr>
+        <p:txBody>
+          <a:bodyPr/>
+          <a:lstStyle/>
+          <a:p>
+            <a:endParaRPr lang="fr-FR"/>
+          </a:p>
+        </p:txBody>
+      </p:sp>
+      <p:sp>
+        <p:nvSpPr>
+          <p:cNvPr id="62" name="BattBody 62"/>
+          <p:cNvSpPr/>
+          <p:nvPr/>
+        </p:nvSpPr>
+        <p:spPr>
+          <a:xfrm>
+            <a:off x="1122200" y="3610000"/>
+            <a:ext cx="720000" cy="380000"/>
+          </a:xfrm>
+          <a:prstGeom prst="roundRect">
+            <a:avLst>
+              <a:gd name="adj" fmla="val 15000"/>
+            </a:avLst>
+          </a:prstGeom>
+          <a:noFill/>
+          <a:ln w="28575">
+            <a:solidFill>
+              <a:srgbClr val="8B1A2B"/>
+            </a:solidFill>
+          </a:ln>
+        </p:spPr>
+        <p:txBody>
+          <a:bodyPr/>
+          <a:lstStyle/>
+          <a:p>
+            <a:endParaRPr lang="fr-FR"/>
+          </a:p>
+        </p:txBody>
+      </p:sp>
+      <p:sp>
+        <p:nvSpPr>
+          <p:cNvPr id="63" name="BattNub 63"/>
+          <p:cNvSpPr/>
+          <p:nvPr/>
+        </p:nvSpPr>
+        <p:spPr>
+          <a:xfrm>
+            <a:off x="1842200" y="3740000"/>
+            <a:ext cx="45000" cy="120000"/>
+          </a:xfrm>
+          <a:prstGeom prst="rect">
+            <a:avLst/>
+          </a:prstGeom>
+          <a:solidFill>
+            <a:srgbClr val="8B1A2B"/>
+          </a:solidFill>
+          <a:ln>
+            <a:noFill/>
+          </a:ln>
+        </p:spPr>
+        <p:txBody>
+          <a:bodyPr/>
+          <a:lstStyle/>
+          <a:p>
+            <a:endParaRPr lang="fr-FR"/>
+          </a:p>
+        </p:txBody>
+      </p:sp>
+      <p:sp>
+        <p:nvSpPr>
+          <p:cNvPr id="64" name="BattFill 64"/>
+          <p:cNvSpPr/>
+          <p:nvPr/>
+        </p:nvSpPr>
+        <p:spPr>
+          <a:xfrm>
+            <a:off x="1142200" y="3630000"/>
+            <a:ext cx="680000" cy="340000"/>
+          </a:xfrm>
+          <a:prstGeom prst="roundRect">
+            <a:avLst>
+              <a:gd name="adj" fmla="val 15000"/>
+            </a:avLst>
+          </a:prstGeom>
+          <a:solidFill>
+            <a:srgbClr val="5CA86B"/>
+          </a:solidFill>
+          <a:ln>
+            <a:noFill/>
+          </a:ln>
+        </p:spPr>
+        <p:txBody>
+          <a:bodyPr/>
+          <a:lstStyle/>
+          <a:p>
+            <a:endParaRPr lang="fr-FR"/>
+          </a:p>
+        </p:txBody>
+      </p:sp>
+      <p:sp>
+        <p:nvSpPr>
+          <p:cNvPr id="65" name="Text 65"/>
+          <p:cNvSpPr/>
+          <p:nvPr/>
+        </p:nvSpPr>
+        <p:spPr>
+          <a:xfrm>
+            <a:off x="507200" y="4110000"/>
+            <a:ext cx="1950000" cy="700000"/>
+          </a:xfrm>
+          <a:prstGeom prst="rect">
+            <a:avLst/>
+          </a:prstGeom>
+          <a:noFill/>
+          <a:ln/>
+        </p:spPr>
+        <p:txBody>
+          <a:bodyPr wrap="square" lIns="0" tIns="0" rIns="0" bIns="0" rtlCol="0" anchor="t"/>
+          <a:lstStyle/>
+          <a:p>
+            <a:pPr marL="0" indent="0" algn="ctr">
+              <a:buNone/>
+            </a:pPr>
+            <a:r>
+              <a:rPr lang="fr-FR" sz="1500" b="1" dirty="0">
+                <a:solidFill>
+                  <a:srgbClr val="8B1A2B"/>
+                </a:solidFill>
+                <a:latin typeface="Poppins"/>
+              </a:rPr>
+              <a:t>Pile Verte</a:t>
+            </a:r>
+          </a:p>
+          <a:p>
+            <a:pPr marL="0" indent="0" algn="ctr">
+              <a:buNone/>
+            </a:pPr>
+            <a:r>
+              <a:rPr lang="fr-FR" sz="1500" b="1" dirty="0">
+                <a:solidFill>
+                  <a:srgbClr val="8B1A2B"/>
+                </a:solidFill>
+                <a:latin typeface="Poppins"/>
+              </a:rPr>
+              <a:t>(Pleine)</a:t>
+            </a:r>
+          </a:p>
+        </p:txBody>
+      </p:sp>
+      <p:sp>
+        <p:nvSpPr>
+          <p:cNvPr id="66" name="Text 66"/>
+          <p:cNvSpPr/>
+          <p:nvPr/>
+        </p:nvSpPr>
+        <p:spPr>
+          <a:xfrm>
+            <a:off x="537200" y="4890000"/>
+            <a:ext cx="1890000" cy="2860000"/>
+          </a:xfrm>
+          <a:prstGeom prst="rect">
+            <a:avLst/>
+          </a:prstGeom>
+          <a:noFill/>
+          <a:ln/>
+        </p:spPr>
+        <p:txBody>
+          <a:bodyPr wrap="square" lIns="0" tIns="0" rIns="0" bIns="0" rtlCol="0" anchor="t"/>
+          <a:lstStyle/>
+          <a:p>
+            <a:pPr marL="0" indent="0" algn="ctr">
+              <a:buNone/>
+            </a:pPr>
+            <a:r>
+              <a:rPr lang="fr-FR" sz="1150" b="0" dirty="0">
+                <a:solidFill>
+                  <a:srgbClr val="333333"/>
+                </a:solidFill>
+                <a:latin typeface="Poppins"/>
+              </a:rPr>
+              <a:t>Je suis en pleine forme ! Je peux jouer, mais je fais attention à ma colle magique.</a:t>
+            </a:r>
+          </a:p>
+        </p:txBody>
+      </p:sp>
+      <p:sp>
+        <p:nvSpPr>
+          <p:cNvPr id="67" name="Card 67"/>
+          <p:cNvSpPr/>
+          <p:nvPr/>
+        </p:nvSpPr>
+        <p:spPr>
+          <a:xfrm>
+            <a:off x="2756044" y="3350000"/>
+            <a:ext cx="2050000" cy="4400000"/>
+          </a:xfrm>
+          <a:prstGeom prst="roundRect">
+            <a:avLst>
+              <a:gd name="adj" fmla="val 6000"/>
+            </a:avLst>
+          </a:prstGeom>
+          <a:solidFill>
+            <a:srgbClr val="FFFFFF"/>
+          </a:solidFill>
+          <a:ln w="12700">
+            <a:solidFill>
+              <a:srgbClr val="8B1A2B">
+                <a:alpha val="15000"/>
+              </a:srgbClr>
+            </a:solidFill>
+          </a:ln>
+          <a:effectLst>
+            <a:outerShdw blurRad="60000" dist="20000" dir="5400000" algn="t" rotWithShape="0">
+              <a:srgbClr val="8B1A2B">
+                <a:alpha val="18000"/>
+              </a:srgbClr>
+            </a:outerShdw>
+          </a:effectLst>
+        </p:spPr>
+        <p:txBody>
+          <a:bodyPr/>
+          <a:lstStyle/>
+          <a:p>
+            <a:endParaRPr lang="fr-FR"/>
+          </a:p>
+        </p:txBody>
+      </p:sp>
+      <p:sp>
+        <p:nvSpPr>
+          <p:cNvPr id="68" name="BattBody 68"/>
+          <p:cNvSpPr/>
+          <p:nvPr/>
+        </p:nvSpPr>
+        <p:spPr>
+          <a:xfrm>
+            <a:off x="3421044" y="3610000"/>
+            <a:ext cx="720000" cy="380000"/>
+          </a:xfrm>
+          <a:prstGeom prst="roundRect">
+            <a:avLst>
+              <a:gd name="adj" fmla="val 15000"/>
+            </a:avLst>
+          </a:prstGeom>
+          <a:noFill/>
+          <a:ln w="28575">
+            <a:solidFill>
+              <a:srgbClr val="8B1A2B"/>
+            </a:solidFill>
+          </a:ln>
+        </p:spPr>
+        <p:txBody>
+          <a:bodyPr/>
+          <a:lstStyle/>
+          <a:p>
+            <a:endParaRPr lang="fr-FR"/>
+          </a:p>
+        </p:txBody>
+      </p:sp>
+      <p:sp>
+        <p:nvSpPr>
+          <p:cNvPr id="69" name="BattNub 69"/>
+          <p:cNvSpPr/>
+          <p:nvPr/>
+        </p:nvSpPr>
+        <p:spPr>
+          <a:xfrm>
+            <a:off x="4141044" y="3740000"/>
+            <a:ext cx="45000" cy="120000"/>
+          </a:xfrm>
+          <a:prstGeom prst="rect">
+            <a:avLst/>
+          </a:prstGeom>
+          <a:solidFill>
+            <a:srgbClr val="8B1A2B"/>
+          </a:solidFill>
+          <a:ln>
+            <a:noFill/>
+          </a:ln>
+        </p:spPr>
+        <p:txBody>
+          <a:bodyPr/>
+          <a:lstStyle/>
+          <a:p>
+            <a:endParaRPr lang="fr-FR"/>
+          </a:p>
+        </p:txBody>
+      </p:sp>
+      <p:sp>
+        <p:nvSpPr>
+          <p:cNvPr id="70" name="BattFill 70"/>
+          <p:cNvSpPr/>
+          <p:nvPr/>
+        </p:nvSpPr>
+        <p:spPr>
+          <a:xfrm>
+            <a:off x="3441044" y="3630000"/>
+            <a:ext cx="408000" cy="340000"/>
+          </a:xfrm>
+          <a:prstGeom prst="roundRect">
+            <a:avLst>
+              <a:gd name="adj" fmla="val 15000"/>
+            </a:avLst>
+          </a:prstGeom>
+          <a:solidFill>
+            <a:srgbClr val="E8963D"/>
+          </a:solidFill>
+          <a:ln>
+            <a:noFill/>
+          </a:ln>
+        </p:spPr>
+        <p:txBody>
+          <a:bodyPr/>
+          <a:lstStyle/>
+          <a:p>
+            <a:endParaRPr lang="fr-FR"/>
+          </a:p>
+        </p:txBody>
+      </p:sp>
+      <p:sp>
+        <p:nvSpPr>
+          <p:cNvPr id="71" name="Text 71"/>
+          <p:cNvSpPr/>
+          <p:nvPr/>
+        </p:nvSpPr>
+        <p:spPr>
+          <a:xfrm>
+            <a:off x="2806044" y="4110000"/>
+            <a:ext cx="1950000" cy="700000"/>
+          </a:xfrm>
+          <a:prstGeom prst="rect">
+            <a:avLst/>
+          </a:prstGeom>
+          <a:noFill/>
+          <a:ln/>
+        </p:spPr>
+        <p:txBody>
+          <a:bodyPr wrap="square" lIns="0" tIns="0" rIns="0" bIns="0" rtlCol="0" anchor="t"/>
+          <a:lstStyle/>
+          <a:p>
+            <a:pPr marL="0" indent="0" algn="ctr">
+              <a:buNone/>
+            </a:pPr>
+            <a:r>
+              <a:rPr lang="fr-FR" sz="1500" b="1" dirty="0">
+                <a:solidFill>
+                  <a:srgbClr val="8B1A2B"/>
+                </a:solidFill>
+                <a:latin typeface="Poppins"/>
+              </a:rPr>
+              <a:t>Pile Orange</a:t>
+            </a:r>
+          </a:p>
+          <a:p>
+            <a:pPr marL="0" indent="0" algn="ctr">
+              <a:buNone/>
+            </a:pPr>
+            <a:r>
+              <a:rPr lang="fr-FR" sz="1500" b="1" dirty="0">
+                <a:solidFill>
+                  <a:srgbClr val="8B1A2B"/>
+                </a:solidFill>
+                <a:latin typeface="Poppins"/>
+              </a:rPr>
+              <a:t>(Moyenne)</a:t>
+            </a:r>
+          </a:p>
+        </p:txBody>
+      </p:sp>
+      <p:sp>
+        <p:nvSpPr>
+          <p:cNvPr id="72" name="Text 72"/>
+          <p:cNvSpPr/>
+          <p:nvPr/>
+        </p:nvSpPr>
+        <p:spPr>
+          <a:xfrm>
+            <a:off x="2836044" y="4890000"/>
+            <a:ext cx="1890000" cy="2860000"/>
+          </a:xfrm>
+          <a:prstGeom prst="rect">
+            <a:avLst/>
+          </a:prstGeom>
+          <a:noFill/>
+          <a:ln/>
+        </p:spPr>
+        <p:txBody>
+          <a:bodyPr wrap="square" lIns="0" tIns="0" rIns="0" bIns="0" rtlCol="0" anchor="t"/>
+          <a:lstStyle/>
+          <a:p>
+            <a:pPr marL="0" indent="0" algn="ctr">
+              <a:buNone/>
+            </a:pPr>
+            <a:r>
+              <a:rPr lang="fr-FR" sz="1150" b="0" dirty="0">
+                <a:solidFill>
+                  <a:srgbClr val="333333"/>
+                </a:solidFill>
+                <a:latin typeface="Poppins"/>
+              </a:rPr>
+              <a:t>Ma batterie baisse un peu... J'ai besoin de faire une pause ou de choisir un jeu calme, comme le dessin.</a:t>
+            </a:r>
+          </a:p>
+        </p:txBody>
+      </p:sp>
+      <p:sp>
+        <p:nvSpPr>
+          <p:cNvPr id="73" name="Card 73"/>
+          <p:cNvSpPr/>
+          <p:nvPr/>
+        </p:nvSpPr>
+        <p:spPr>
+          <a:xfrm>
+            <a:off x="5054888" y="3350000"/>
+            <a:ext cx="2050000" cy="4400000"/>
+          </a:xfrm>
+          <a:prstGeom prst="roundRect">
+            <a:avLst>
+              <a:gd name="adj" fmla="val 6000"/>
+            </a:avLst>
+          </a:prstGeom>
+          <a:solidFill>
+            <a:srgbClr val="FFFFFF"/>
+          </a:solidFill>
+          <a:ln w="12700">
+            <a:solidFill>
+              <a:srgbClr val="8B1A2B">
+                <a:alpha val="15000"/>
+              </a:srgbClr>
+            </a:solidFill>
+          </a:ln>
+          <a:effectLst>
+            <a:outerShdw blurRad="60000" dist="20000" dir="5400000" algn="t" rotWithShape="0">
+              <a:srgbClr val="8B1A2B">
+                <a:alpha val="18000"/>
+              </a:srgbClr>
+            </a:outerShdw>
+          </a:effectLst>
+        </p:spPr>
+        <p:txBody>
+          <a:bodyPr/>
+          <a:lstStyle/>
+          <a:p>
+            <a:endParaRPr lang="fr-FR"/>
+          </a:p>
+        </p:txBody>
+      </p:sp>
+      <p:sp>
+        <p:nvSpPr>
+          <p:cNvPr id="74" name="BattBody 74"/>
+          <p:cNvSpPr/>
+          <p:nvPr/>
+        </p:nvSpPr>
+        <p:spPr>
+          <a:xfrm>
+            <a:off x="5719888" y="3610000"/>
+            <a:ext cx="720000" cy="380000"/>
+          </a:xfrm>
+          <a:prstGeom prst="roundRect">
+            <a:avLst>
+              <a:gd name="adj" fmla="val 15000"/>
+            </a:avLst>
+          </a:prstGeom>
+          <a:noFill/>
+          <a:ln w="28575">
+            <a:solidFill>
+              <a:srgbClr val="8B1A2B"/>
+            </a:solidFill>
+          </a:ln>
+        </p:spPr>
+        <p:txBody>
+          <a:bodyPr/>
+          <a:lstStyle/>
+          <a:p>
+            <a:endParaRPr lang="fr-FR"/>
+          </a:p>
+        </p:txBody>
+      </p:sp>
+      <p:sp>
+        <p:nvSpPr>
+          <p:cNvPr id="75" name="BattNub 75"/>
+          <p:cNvSpPr/>
+          <p:nvPr/>
+        </p:nvSpPr>
+        <p:spPr>
+          <a:xfrm>
+            <a:off x="6439888" y="3740000"/>
+            <a:ext cx="45000" cy="120000"/>
+          </a:xfrm>
+          <a:prstGeom prst="rect">
+            <a:avLst/>
+          </a:prstGeom>
+          <a:solidFill>
+            <a:srgbClr val="8B1A2B"/>
+          </a:solidFill>
+          <a:ln>
+            <a:noFill/>
+          </a:ln>
+        </p:spPr>
+        <p:txBody>
+          <a:bodyPr/>
+          <a:lstStyle/>
+          <a:p>
+            <a:endParaRPr lang="fr-FR"/>
+          </a:p>
+        </p:txBody>
+      </p:sp>
+      <p:sp>
+        <p:nvSpPr>
+          <p:cNvPr id="76" name="BattFill 76"/>
+          <p:cNvSpPr/>
+          <p:nvPr/>
+        </p:nvSpPr>
+        <p:spPr>
+          <a:xfrm>
+            <a:off x="5739888" y="3630000"/>
+            <a:ext cx="170000" cy="340000"/>
+          </a:xfrm>
+          <a:prstGeom prst="roundRect">
+            <a:avLst>
+              <a:gd name="adj" fmla="val 15000"/>
+            </a:avLst>
+          </a:prstGeom>
+          <a:solidFill>
+            <a:srgbClr val="C94F4F"/>
+          </a:solidFill>
+          <a:ln>
+            <a:noFill/>
+          </a:ln>
+        </p:spPr>
+        <p:txBody>
+          <a:bodyPr/>
+          <a:lstStyle/>
+          <a:p>
+            <a:endParaRPr lang="fr-FR"/>
+          </a:p>
+        </p:txBody>
+      </p:sp>
+      <p:sp>
+        <p:nvSpPr>
+          <p:cNvPr id="77" name="Text 77"/>
+          <p:cNvSpPr/>
+          <p:nvPr/>
+        </p:nvSpPr>
+        <p:spPr>
+          <a:xfrm>
+            <a:off x="5104888" y="4110000"/>
+            <a:ext cx="1950000" cy="700000"/>
+          </a:xfrm>
+          <a:prstGeom prst="rect">
+            <a:avLst/>
+          </a:prstGeom>
+          <a:noFill/>
+          <a:ln/>
+        </p:spPr>
+        <p:txBody>
+          <a:bodyPr wrap="square" lIns="0" tIns="0" rIns="0" bIns="0" rtlCol="0" anchor="t"/>
+          <a:lstStyle/>
+          <a:p>
+            <a:pPr marL="0" indent="0" algn="ctr">
+              <a:buNone/>
+            </a:pPr>
+            <a:r>
+              <a:rPr lang="fr-FR" sz="1500" b="1" dirty="0">
+                <a:solidFill>
+                  <a:srgbClr val="8B1A2B"/>
+                </a:solidFill>
+                <a:latin typeface="Poppins"/>
+              </a:rPr>
+              <a:t>Pile Rouge</a:t>
+            </a:r>
+          </a:p>
+          <a:p>
+            <a:pPr marL="0" indent="0" algn="ctr">
+              <a:buNone/>
+            </a:pPr>
+            <a:r>
+              <a:rPr lang="fr-FR" sz="1500" b="1" dirty="0">
+                <a:solidFill>
+                  <a:srgbClr val="8B1A2B"/>
+                </a:solidFill>
+                <a:latin typeface="Poppins"/>
+              </a:rPr>
+              <a:t>(Vide)</a:t>
+            </a:r>
+          </a:p>
+        </p:txBody>
+      </p:sp>
+      <p:sp>
+        <p:nvSpPr>
+          <p:cNvPr id="78" name="Text 78"/>
+          <p:cNvSpPr/>
+          <p:nvPr/>
+        </p:nvSpPr>
+        <p:spPr>
+          <a:xfrm>
+            <a:off x="5134888" y="4890000"/>
+            <a:ext cx="1890000" cy="2860000"/>
+          </a:xfrm>
+          <a:prstGeom prst="rect">
+            <a:avLst/>
+          </a:prstGeom>
+          <a:noFill/>
+          <a:ln/>
+        </p:spPr>
+        <p:txBody>
+          <a:bodyPr wrap="square" lIns="0" tIns="0" rIns="0" bIns="0" rtlCol="0" anchor="t"/>
+          <a:lstStyle/>
+          <a:p>
+            <a:pPr marL="0" indent="0" algn="ctr">
+              <a:buNone/>
+            </a:pPr>
+            <a:r>
+              <a:rPr lang="fr-FR" sz="1150" b="0" dirty="0">
+                <a:solidFill>
+                  <a:srgbClr val="333333"/>
+                </a:solidFill>
+                <a:latin typeface="Poppins"/>
+              </a:rPr>
+              <a:t>Batterie à plat ! Mes alarmes sonnent, j'ai besoin de me reposer pour recharger mon énergie.</a:t>
+            </a:r>
+          </a:p>
+        </p:txBody>
+      </p:sp>
+    </p:spTree>
+  </p:cSld>
+  <p:clrMapOvr>
+    <a:masterClrMapping/>
+  </p:clrMapOvr>
+</p:sld>
+</file>
+
+<file path=ppt/slides/slide11.xml><?xml version="1.0" encoding="utf-8"?>
+<p:sld xmlns:a="http://schemas.openxmlformats.org/drawingml/2006/main" xmlns:r="http://schemas.openxmlformats.org/officeDocument/2006/relationships" xmlns:p="http://schemas.openxmlformats.org/presentationml/2006/main">
+  <p:cSld name="Slide 2">
+    <p:bg>
+      <p:bgPr>
+        <a:blipFill dpi="0" rotWithShape="1">
+          <a:blip r:embed="rId3">
+            <a:lum/>
+          </a:blip>
+          <a:srcRect/>
+          <a:stretch>
+            <a:fillRect/>
+          </a:stretch>
+        </a:blipFill>
+        <a:effectLst/>
+      </p:bgPr>
+    </p:bg>
+    <p:spTree>
+      <p:nvGrpSpPr>
+        <p:cNvPr id="1" name=""/>
+        <p:cNvGrpSpPr/>
+        <p:nvPr/>
+      </p:nvGrpSpPr>
+      <p:grpSpPr>
+        <a:xfrm>
+          <a:off x="0" y="0"/>
+          <a:ext cx="0" cy="0"/>
+          <a:chOff x="0" y="0"/>
+          <a:chExt cx="0" cy="0"/>
+        </a:xfrm>
+      </p:grpSpPr>
+      <p:sp>
+        <p:nvSpPr>
+          <p:cNvPr id="2" name="Text 0"/>
+          <p:cNvSpPr/>
+          <p:nvPr/>
+        </p:nvSpPr>
+        <p:spPr>
+          <a:xfrm>
+            <a:off x="457200" y="365760"/>
+            <a:ext cx="6647688" cy="640080"/>
+          </a:xfrm>
+          <a:prstGeom prst="rect">
+            <a:avLst/>
+          </a:prstGeom>
+          <a:noFill/>
+          <a:ln/>
+        </p:spPr>
+        <p:txBody>
+          <a:bodyPr wrap="square" lIns="0" tIns="0" rIns="0" bIns="0" rtlCol="0" anchor="ctr"/>
+          <a:lstStyle/>
+          <a:p>
+            <a:pPr marL="0" indent="0" algn="ctr">
+              <a:buNone/>
+            </a:pPr>
+            <a:r>
+              <a:rPr lang="fr-FR" sz="2800" b="1" dirty="0">
+                <a:solidFill>
+                  <a:srgbClr val="8B1A2B"/>
+                </a:solidFill>
+                <a:latin typeface="Poppins" pitchFamily="34" charset="0"/>
+                <a:ea typeface="Calibri" pitchFamily="34" charset="-122"/>
+                <a:cs typeface="Calibri" pitchFamily="34" charset="-120"/>
+              </a:rPr>
+              <a:t>Mes équipements de Super-Héros !</a:t>
+            </a:r>
+            <a:endParaRPr lang="fr-FR" sz="2800" dirty="0"/>
+          </a:p>
+        </p:txBody>
+      </p:sp>
+      <p:sp>
+        <p:nvSpPr>
+          <p:cNvPr id="99" name="Footer"/>
+          <p:cNvSpPr/>
+          <p:nvPr/>
+        </p:nvSpPr>
+        <p:spPr>
+          <a:xfrm>
+            <a:off x="500000" y="10300000"/>
+            <a:ext cx="6562850" cy="300000"/>
+          </a:xfrm>
+          <a:prstGeom prst="rect">
+            <a:avLst/>
+          </a:prstGeom>
+          <a:noFill/>
+          <a:ln/>
+        </p:spPr>
+        <p:txBody>
+          <a:bodyPr wrap="square" lIns="0" tIns="0" rIns="0" bIns="0" rtlCol="0" anchor="ctr"/>
+          <a:lstStyle/>
+          <a:p>
+            <a:pPr marL="0" indent="0" algn="ctr">
+              <a:buNone/>
+            </a:pPr>
+            <a:r>
+              <a:rPr lang="fr-FR" sz="1000" i="1">
+                <a:solidFill>
+                  <a:srgbClr val="666666"/>
+                </a:solidFill>
+                <a:latin typeface="Poppins" pitchFamily="34" charset="0"/>
+                <a:ea typeface="Calibri" pitchFamily="34" charset="0"/>
+                <a:cs typeface="Calibri" pitchFamily="34" charset="0"/>
+              </a:rPr>
+              <a:t>Fait par l’association Sed’Occ France 04/2026</a:t>
+            </a:r>
+          </a:p>
+        </p:txBody>
+      </p:sp>
+      <p:pic>
+        <p:nvPicPr>
+          <p:cNvPr id="9" name="Image 8">
+            <a:extLst>
+              <a:ext uri="{FF2B5EF4-FFF2-40B4-BE49-F238E27FC236}">
+                <a16:creationId xmlns:a16="http://schemas.microsoft.com/office/drawing/2014/main" id="{1272B92B-21E4-464F-9F8E-4A62B1E16185}"/>
+              </a:ext>
+            </a:extLst>
+          </p:cNvPr>
+          <p:cNvPicPr>
+            <a:picLocks noChangeAspect="1"/>
+          </p:cNvPicPr>
+          <p:nvPr/>
+        </p:nvPicPr>
+        <p:blipFill rotWithShape="1">
+          <a:blip r:embed="rId5"/>
+          <a:srcRect l="9802" t="10888" r="15836" b="19876"/>
+          <a:stretch/>
+        </p:blipFill>
+        <p:spPr>
+          <a:xfrm>
+            <a:off x="6300000" y="9540000"/>
+            <a:ext cx="1080000" cy="1007999"/>
+          </a:xfrm>
+          <a:prstGeom prst="rect">
+            <a:avLst/>
+          </a:prstGeom>
+        </p:spPr>
+      </p:pic>
+      <p:sp>
+        <p:nvSpPr>
+          <p:cNvPr id="50" name="Text 50"/>
+          <p:cNvSpPr/>
+          <p:nvPr/>
+        </p:nvSpPr>
+        <p:spPr>
+          <a:xfrm>
+            <a:off x="457200" y="1080000"/>
+            <a:ext cx="6647688" cy="750000"/>
+          </a:xfrm>
+          <a:prstGeom prst="rect">
+            <a:avLst/>
+          </a:prstGeom>
+          <a:noFill/>
+          <a:ln/>
+        </p:spPr>
+        <p:txBody>
+          <a:bodyPr wrap="square" lIns="0" tIns="0" rIns="0" bIns="0" rtlCol="0" anchor="t"/>
+          <a:lstStyle/>
+          <a:p>
+            <a:pPr marL="0" indent="0" algn="ctr">
+              <a:buNone/>
+            </a:pPr>
+            <a:r>
+              <a:rPr lang="fr-FR" sz="2000" b="0" dirty="0">
+                <a:solidFill>
+                  <a:srgbClr val="333333"/>
+                </a:solidFill>
+                <a:latin typeface="Poppins"/>
+              </a:rPr>
+              <a:t>Pour aider notre colle spéciale, nous avons des supers outils. Ce sont des aides précieuses pour notre corps !</a:t>
+            </a:r>
+          </a:p>
+        </p:txBody>
+      </p:sp>
+      <p:pic>
+        <p:nvPicPr>
+          <p:cNvPr id="71" name="Equip 71"/>
+          <p:cNvPicPr>
+            <a:picLocks noChangeAspect="1"/>
+          </p:cNvPicPr>
+          <p:nvPr/>
+        </p:nvPicPr>
+        <p:blipFill>
+          <a:blip r:embed="rId7"/>
+          <a:stretch>
+            <a:fillRect/>
+          </a:stretch>
+        </p:blipFill>
+        <p:spPr>
+          <a:xfrm>
+            <a:off x="457200" y="2400000"/>
+            <a:ext cx="1050000" cy="1050000"/>
+          </a:xfrm>
+          <a:prstGeom prst="ellipse">
+            <a:avLst/>
+          </a:prstGeom>
+          <a:ln w="19050">
+            <a:solidFill>
+              <a:srgbClr val="8B1A2B">
+                <a:alpha val="30000"/>
+              </a:srgbClr>
+            </a:solidFill>
+          </a:ln>
+          <a:effectLst>
+            <a:outerShdw blurRad="50000" dist="20000" dir="5400000" algn="t" rotWithShape="0">
+              <a:srgbClr val="8B1A2B">
+                <a:alpha val="20000"/>
+              </a:srgbClr>
+            </a:outerShdw>
+          </a:effectLst>
+        </p:spPr>
+      </p:pic>
+      <p:sp>
+        <p:nvSpPr>
+          <p:cNvPr id="72" name="Text 72"/>
+          <p:cNvSpPr/>
+          <p:nvPr/>
+        </p:nvSpPr>
+        <p:spPr>
+          <a:xfrm>
+            <a:off x="1787200" y="2050000"/>
+            <a:ext cx="5317688" cy="1750000"/>
+          </a:xfrm>
+          <a:prstGeom prst="rect">
+            <a:avLst/>
+          </a:prstGeom>
+          <a:noFill/>
+          <a:ln/>
+        </p:spPr>
+        <p:txBody>
+          <a:bodyPr wrap="square" lIns="0" tIns="0" rIns="0" bIns="0" rtlCol="0" anchor="t"/>
+          <a:lstStyle/>
+          <a:p>
+            <a:pPr marL="0" indent="0" algn="l">
+              <a:buNone/>
+            </a:pPr>
+            <a:r>
+              <a:rPr lang="fr-FR" sz="1900" b="1" dirty="0">
+                <a:solidFill>
+                  <a:srgbClr val="8B1A2B"/>
+                </a:solidFill>
+                <a:latin typeface="Poppins"/>
+              </a:rPr>
+              <a:t>Les Boucliers Magiques </a:t>
+            </a:r>
+            <a:r>
+              <a:rPr lang="fr-FR" sz="1900" b="0" dirty="0">
+                <a:solidFill>
+                  <a:srgbClr val="8B1A2B"/>
+                </a:solidFill>
+                <a:latin typeface="Poppins"/>
+              </a:rPr>
+              <a:t>(les attelles)</a:t>
+            </a:r>
+          </a:p>
+        </p:txBody>
+      </p:sp>
+      <p:sp>
+        <p:nvSpPr>
+          <p:cNvPr id="73" name="Text 73"/>
+          <p:cNvSpPr/>
+          <p:nvPr/>
+        </p:nvSpPr>
+        <p:spPr>
+          <a:xfrm>
+            <a:off x="1787200" y="2600000"/>
+            <a:ext cx="5317688" cy="1200000"/>
+          </a:xfrm>
+          <a:prstGeom prst="rect">
+            <a:avLst/>
+          </a:prstGeom>
+          <a:noFill/>
+          <a:ln/>
+        </p:spPr>
+        <p:txBody>
+          <a:bodyPr wrap="square" lIns="0" tIns="0" rIns="0" bIns="0" rtlCol="0" anchor="t"/>
+          <a:lstStyle/>
+          <a:p>
+            <a:pPr marL="0" indent="0" algn="l">
+              <a:buNone/>
+            </a:pPr>
+            <a:r>
+              <a:rPr lang="fr-FR" sz="1500" b="0" dirty="0">
+                <a:solidFill>
+                  <a:srgbClr val="333333"/>
+                </a:solidFill>
+                <a:latin typeface="Poppins"/>
+              </a:rPr>
+              <a:t>Ils protègent les articulations pour qu'elles restent bien en place et ne fassent pas de bêtises.</a:t>
+            </a:r>
+          </a:p>
+        </p:txBody>
+      </p:sp>
+      <p:pic>
+        <p:nvPicPr>
+          <p:cNvPr id="74" name="Equip 74"/>
+          <p:cNvPicPr>
+            <a:picLocks noChangeAspect="1"/>
+          </p:cNvPicPr>
+          <p:nvPr/>
+        </p:nvPicPr>
+        <p:blipFill>
+          <a:blip r:embed="rId8"/>
+          <a:stretch>
+            <a:fillRect/>
+          </a:stretch>
+        </p:blipFill>
+        <p:spPr>
+          <a:xfrm>
+            <a:off x="457200" y="4370000"/>
+            <a:ext cx="1050000" cy="1050000"/>
+          </a:xfrm>
+          <a:prstGeom prst="ellipse">
+            <a:avLst/>
+          </a:prstGeom>
+          <a:ln w="19050">
+            <a:solidFill>
+              <a:srgbClr val="8B1A2B">
+                <a:alpha val="30000"/>
+              </a:srgbClr>
+            </a:solidFill>
+          </a:ln>
+          <a:effectLst>
+            <a:outerShdw blurRad="50000" dist="20000" dir="5400000" algn="t" rotWithShape="0">
+              <a:srgbClr val="8B1A2B">
+                <a:alpha val="20000"/>
+              </a:srgbClr>
+            </a:outerShdw>
+          </a:effectLst>
+        </p:spPr>
+      </p:pic>
+      <p:sp>
+        <p:nvSpPr>
+          <p:cNvPr id="75" name="Text 75"/>
+          <p:cNvSpPr/>
+          <p:nvPr/>
+        </p:nvSpPr>
+        <p:spPr>
+          <a:xfrm>
+            <a:off x="1787200" y="4020000"/>
+            <a:ext cx="5317688" cy="1750000"/>
+          </a:xfrm>
+          <a:prstGeom prst="rect">
+            <a:avLst/>
+          </a:prstGeom>
+          <a:noFill/>
+          <a:ln/>
+        </p:spPr>
+        <p:txBody>
+          <a:bodyPr wrap="square" lIns="0" tIns="0" rIns="0" bIns="0" rtlCol="0" anchor="t"/>
+          <a:lstStyle/>
+          <a:p>
+            <a:pPr marL="0" indent="0" algn="l">
+              <a:buNone/>
+            </a:pPr>
+            <a:r>
+              <a:rPr lang="fr-FR" sz="1900" b="1" dirty="0">
+                <a:solidFill>
+                  <a:srgbClr val="8B1A2B"/>
+                </a:solidFill>
+                <a:latin typeface="Poppins"/>
+              </a:rPr>
+              <a:t>L'Armure Secrète </a:t>
+            </a:r>
+            <a:r>
+              <a:rPr lang="fr-FR" sz="1900" b="0" dirty="0">
+                <a:solidFill>
+                  <a:srgbClr val="8B1A2B"/>
+                </a:solidFill>
+                <a:latin typeface="Poppins"/>
+              </a:rPr>
+              <a:t>(les vêtements de compression)</a:t>
+            </a:r>
+          </a:p>
+        </p:txBody>
+      </p:sp>
+      <p:sp>
+        <p:nvSpPr>
+          <p:cNvPr id="76" name="Text 76"/>
+          <p:cNvSpPr/>
+          <p:nvPr/>
+        </p:nvSpPr>
+        <p:spPr>
+          <a:xfrm>
+            <a:off x="1787200" y="4570000"/>
+            <a:ext cx="5317688" cy="1200000"/>
+          </a:xfrm>
+          <a:prstGeom prst="rect">
+            <a:avLst/>
+          </a:prstGeom>
+          <a:noFill/>
+          <a:ln/>
+        </p:spPr>
+        <p:txBody>
+          <a:bodyPr wrap="square" lIns="0" tIns="0" rIns="0" bIns="0" rtlCol="0" anchor="t"/>
+          <a:lstStyle/>
+          <a:p>
+            <a:pPr marL="0" indent="0" algn="l">
+              <a:buNone/>
+            </a:pPr>
+            <a:r>
+              <a:rPr lang="fr-FR" sz="1500" b="0" dirty="0">
+                <a:solidFill>
+                  <a:srgbClr val="333333"/>
+                </a:solidFill>
+                <a:latin typeface="Poppins"/>
+              </a:rPr>
+              <a:t>Elle serre un petit peu, comme un gros câlin, pour aider le corps à se tenir bien droit et à moins se fatiguer.</a:t>
+            </a:r>
+          </a:p>
+        </p:txBody>
+      </p:sp>
+      <p:pic>
+        <p:nvPicPr>
+          <p:cNvPr id="77" name="Equip 77"/>
+          <p:cNvPicPr>
+            <a:picLocks noChangeAspect="1"/>
+          </p:cNvPicPr>
+          <p:nvPr/>
+        </p:nvPicPr>
+        <p:blipFill>
+          <a:blip r:embed="rId9"/>
+          <a:stretch>
+            <a:fillRect/>
+          </a:stretch>
+        </p:blipFill>
+        <p:spPr>
+          <a:xfrm>
+            <a:off x="457200" y="6340000"/>
+            <a:ext cx="1050000" cy="1050000"/>
+          </a:xfrm>
+          <a:prstGeom prst="ellipse">
+            <a:avLst/>
+          </a:prstGeom>
+          <a:ln w="19050">
+            <a:solidFill>
+              <a:srgbClr val="8B1A2B">
+                <a:alpha val="30000"/>
+              </a:srgbClr>
+            </a:solidFill>
+          </a:ln>
+          <a:effectLst>
+            <a:outerShdw blurRad="50000" dist="20000" dir="5400000" algn="t" rotWithShape="0">
+              <a:srgbClr val="8B1A2B">
+                <a:alpha val="20000"/>
+              </a:srgbClr>
+            </a:outerShdw>
+          </a:effectLst>
+        </p:spPr>
+      </p:pic>
+      <p:sp>
+        <p:nvSpPr>
+          <p:cNvPr id="78" name="Text 78"/>
+          <p:cNvSpPr/>
+          <p:nvPr/>
+        </p:nvSpPr>
+        <p:spPr>
+          <a:xfrm>
+            <a:off x="1787200" y="5990000"/>
+            <a:ext cx="5317688" cy="1750000"/>
+          </a:xfrm>
+          <a:prstGeom prst="rect">
+            <a:avLst/>
+          </a:prstGeom>
+          <a:noFill/>
+          <a:ln/>
+        </p:spPr>
+        <p:txBody>
+          <a:bodyPr wrap="square" lIns="0" tIns="0" rIns="0" bIns="0" rtlCol="0" anchor="t"/>
+          <a:lstStyle/>
+          <a:p>
+            <a:pPr marL="0" indent="0" algn="l">
+              <a:buNone/>
+            </a:pPr>
+            <a:r>
+              <a:rPr lang="fr-FR" sz="1900" b="1" dirty="0">
+                <a:solidFill>
+                  <a:srgbClr val="8B1A2B"/>
+                </a:solidFill>
+                <a:latin typeface="Poppins"/>
+              </a:rPr>
+              <a:t>Les Super-Propulseurs </a:t>
+            </a:r>
+            <a:r>
+              <a:rPr lang="fr-FR" sz="1900" b="0" dirty="0">
+                <a:solidFill>
+                  <a:srgbClr val="8B1A2B"/>
+                </a:solidFill>
+                <a:latin typeface="Poppins"/>
+              </a:rPr>
+              <a:t>(les béquilles ou le fauteuil)</a:t>
+            </a:r>
+          </a:p>
+        </p:txBody>
+      </p:sp>
+      <p:sp>
+        <p:nvSpPr>
+          <p:cNvPr id="79" name="Text 79"/>
+          <p:cNvSpPr/>
+          <p:nvPr/>
+        </p:nvSpPr>
+        <p:spPr>
+          <a:xfrm>
+            <a:off x="1787200" y="6540000"/>
+            <a:ext cx="5317688" cy="1200000"/>
+          </a:xfrm>
+          <a:prstGeom prst="rect">
+            <a:avLst/>
+          </a:prstGeom>
+          <a:noFill/>
+          <a:ln/>
+        </p:spPr>
+        <p:txBody>
+          <a:bodyPr wrap="square" lIns="0" tIns="0" rIns="0" bIns="0" rtlCol="0" anchor="t"/>
+          <a:lstStyle/>
+          <a:p>
+            <a:pPr marL="0" indent="0" algn="l">
+              <a:buNone/>
+            </a:pPr>
+            <a:r>
+              <a:rPr lang="fr-FR" sz="1500" b="0" dirty="0">
+                <a:solidFill>
+                  <a:srgbClr val="333333"/>
+                </a:solidFill>
+                <a:latin typeface="Poppins"/>
+              </a:rPr>
+              <a:t>Quand les jambes n'ont plus de batterie, ils nous aident à avancer et à nous reposer en même temps !</a:t>
+            </a:r>
+          </a:p>
+        </p:txBody>
+      </p:sp>
+    </p:spTree>
+  </p:cSld>
+  <p:clrMapOvr>
+    <a:masterClrMapping/>
+  </p:clrMapOvr>
+</p:sld>
+</file>
+
+<file path=ppt/slides/slide12.xml><?xml version="1.0" encoding="utf-8"?>
+<p:sld xmlns:a="http://schemas.openxmlformats.org/drawingml/2006/main" xmlns:r="http://schemas.openxmlformats.org/officeDocument/2006/relationships" xmlns:p="http://schemas.openxmlformats.org/presentationml/2006/main">
+  <p:cSld name="Slide 2">
+    <p:bg>
+      <p:bgPr>
+        <a:blipFill dpi="0" rotWithShape="1">
+          <a:blip r:embed="rId3">
+            <a:lum/>
+          </a:blip>
+          <a:srcRect/>
+          <a:stretch>
+            <a:fillRect/>
+          </a:stretch>
+        </a:blipFill>
+        <a:effectLst/>
+      </p:bgPr>
+    </p:bg>
+    <p:spTree>
+      <p:nvGrpSpPr>
+        <p:cNvPr id="1" name=""/>
+        <p:cNvGrpSpPr/>
+        <p:nvPr/>
+      </p:nvGrpSpPr>
+      <p:grpSpPr>
+        <a:xfrm>
+          <a:off x="0" y="0"/>
+          <a:ext cx="0" cy="0"/>
+          <a:chOff x="0" y="0"/>
+          <a:chExt cx="0" cy="0"/>
+        </a:xfrm>
+      </p:grpSpPr>
+      <p:sp>
+        <p:nvSpPr>
+          <p:cNvPr id="2" name="Text 0"/>
+          <p:cNvSpPr/>
+          <p:nvPr/>
+        </p:nvSpPr>
+        <p:spPr>
+          <a:xfrm>
+            <a:off x="457200" y="365760"/>
+            <a:ext cx="6647688" cy="640080"/>
+          </a:xfrm>
+          <a:prstGeom prst="rect">
+            <a:avLst/>
+          </a:prstGeom>
+          <a:noFill/>
+          <a:ln/>
+        </p:spPr>
+        <p:txBody>
+          <a:bodyPr wrap="square" lIns="0" tIns="0" rIns="0" bIns="0" rtlCol="0" anchor="ctr"/>
+          <a:lstStyle/>
+          <a:p>
+            <a:pPr marL="0" indent="0" algn="ctr">
+              <a:buNone/>
+            </a:pPr>
+            <a:r>
+              <a:rPr lang="fr-FR" sz="2800" b="1" dirty="0">
+                <a:solidFill>
+                  <a:srgbClr val="8B1A2B"/>
+                </a:solidFill>
+                <a:latin typeface="Poppins" pitchFamily="34" charset="0"/>
+                <a:ea typeface="Calibri" pitchFamily="34" charset="-122"/>
+                <a:cs typeface="Calibri" pitchFamily="34" charset="-120"/>
+              </a:rPr>
+              <a:t>Le Pacte des Supers Copains !</a:t>
+            </a:r>
+            <a:endParaRPr lang="fr-FR" sz="2800" dirty="0"/>
+          </a:p>
+        </p:txBody>
+      </p:sp>
+      <p:sp>
+        <p:nvSpPr>
+          <p:cNvPr id="99" name="Footer"/>
+          <p:cNvSpPr/>
+          <p:nvPr/>
+        </p:nvSpPr>
+        <p:spPr>
+          <a:xfrm>
+            <a:off x="500000" y="10300000"/>
+            <a:ext cx="6562850" cy="300000"/>
+          </a:xfrm>
+          <a:prstGeom prst="rect">
+            <a:avLst/>
+          </a:prstGeom>
+          <a:noFill/>
+          <a:ln/>
+        </p:spPr>
+        <p:txBody>
+          <a:bodyPr wrap="square" lIns="0" tIns="0" rIns="0" bIns="0" rtlCol="0" anchor="ctr"/>
+          <a:lstStyle/>
+          <a:p>
+            <a:pPr marL="0" indent="0" algn="ctr">
+              <a:buNone/>
+            </a:pPr>
+            <a:r>
+              <a:rPr lang="fr-FR" sz="1000" i="1">
+                <a:solidFill>
+                  <a:srgbClr val="666666"/>
+                </a:solidFill>
+                <a:latin typeface="Poppins" pitchFamily="34" charset="0"/>
+                <a:ea typeface="Calibri" pitchFamily="34" charset="0"/>
+                <a:cs typeface="Calibri" pitchFamily="34" charset="0"/>
+              </a:rPr>
+              <a:t>Fait par l’association Sed’Occ France 04/2026</a:t>
+            </a:r>
+          </a:p>
+        </p:txBody>
+      </p:sp>
+      <p:pic>
+        <p:nvPicPr>
+          <p:cNvPr id="9" name="Image 8">
+            <a:extLst>
+              <a:ext uri="{FF2B5EF4-FFF2-40B4-BE49-F238E27FC236}">
+                <a16:creationId xmlns:a16="http://schemas.microsoft.com/office/drawing/2014/main" id="{1272B92B-21E4-464F-9F8E-4A62B1E16185}"/>
+              </a:ext>
+            </a:extLst>
+          </p:cNvPr>
+          <p:cNvPicPr>
+            <a:picLocks noChangeAspect="1"/>
+          </p:cNvPicPr>
+          <p:nvPr/>
+        </p:nvPicPr>
+        <p:blipFill rotWithShape="1">
+          <a:blip r:embed="rId5"/>
+          <a:srcRect l="9802" t="10888" r="15836" b="19876"/>
+          <a:stretch/>
+        </p:blipFill>
+        <p:spPr>
+          <a:xfrm>
+            <a:off x="6300000" y="9540000"/>
+            <a:ext cx="1080000" cy="1007999"/>
+          </a:xfrm>
+          <a:prstGeom prst="rect">
+            <a:avLst/>
+          </a:prstGeom>
+        </p:spPr>
+      </p:pic>
+      <p:sp>
+        <p:nvSpPr>
+          <p:cNvPr id="50" name="Text 50"/>
+          <p:cNvSpPr/>
+          <p:nvPr/>
+        </p:nvSpPr>
+        <p:spPr>
+          <a:xfrm>
+            <a:off x="457200" y="1080000"/>
+            <a:ext cx="6647688" cy="1300000"/>
+          </a:xfrm>
+          <a:prstGeom prst="rect">
+            <a:avLst/>
+          </a:prstGeom>
+          <a:noFill/>
+          <a:ln/>
+        </p:spPr>
+        <p:txBody>
+          <a:bodyPr wrap="square" lIns="0" tIns="0" rIns="0" bIns="0" rtlCol="0" anchor="t"/>
+          <a:lstStyle/>
+          <a:p>
+            <a:pPr marL="0" indent="0" algn="ctr">
+              <a:buNone/>
+            </a:pPr>
+            <a:r>
+              <a:rPr lang="fr-FR" sz="1800" b="0" dirty="0">
+                <a:solidFill>
+                  <a:srgbClr val="333333"/>
+                </a:solidFill>
+                <a:latin typeface="Poppins"/>
+              </a:rPr>
+              <a:t>Ton copain avec le SED a une colle spéciale qui le rend plus fragile. Ce n'est pas de sa faute, et il a besoin de ta gentillesse ! Pas besoin de se pousser pour bien rigoler !</a:t>
+            </a:r>
+          </a:p>
+        </p:txBody>
+      </p:sp>
+      <p:sp>
+        <p:nvSpPr>
+          <p:cNvPr id="51" name="DiplomaBox"/>
+          <p:cNvSpPr/>
+          <p:nvPr/>
+        </p:nvSpPr>
+        <p:spPr>
+          <a:xfrm>
+            <a:off x="650000" y="2550000"/>
+            <a:ext cx="6262850" cy="7250000"/>
+          </a:xfrm>
+          <a:prstGeom prst="roundRect">
+            <a:avLst>
+              <a:gd name="adj" fmla="val 3500"/>
+            </a:avLst>
+          </a:prstGeom>
+          <a:solidFill>
+            <a:srgbClr val="FFFFFF"/>
+          </a:solidFill>
+          <a:ln w="34925" cmpd="dbl">
+            <a:solidFill>
+              <a:srgbClr val="8B1A2B"/>
+            </a:solidFill>
+          </a:ln>
+        </p:spPr>
+        <p:txBody>
+          <a:bodyPr/>
+          <a:lstStyle/>
+          <a:p>
+            <a:endParaRPr lang="fr-FR"/>
+          </a:p>
+        </p:txBody>
+      </p:sp>
+      <p:pic>
+        <p:nvPicPr>
+          <p:cNvPr id="52" name="Badge"/>
+          <p:cNvPicPr>
+            <a:picLocks noChangeAspect="1"/>
+          </p:cNvPicPr>
+          <p:nvPr/>
+        </p:nvPicPr>
+        <p:blipFill>
+          <a:blip r:embed="rId4"/>
+          <a:stretch>
+            <a:fillRect/>
+          </a:stretch>
+        </p:blipFill>
+        <p:spPr>
+          <a:xfrm>
+            <a:off x="3331425" y="2850000"/>
+            <a:ext cx="900000" cy="900000"/>
+          </a:xfrm>
+          <a:prstGeom prst="rect">
+            <a:avLst/>
+          </a:prstGeom>
+        </p:spPr>
+      </p:pic>
+      <p:sp>
+        <p:nvSpPr>
+          <p:cNvPr id="53" name="Text 53"/>
+          <p:cNvSpPr/>
+          <p:nvPr/>
+        </p:nvSpPr>
+        <p:spPr>
+          <a:xfrm>
+            <a:off x="950000" y="3970000"/>
+            <a:ext cx="5662850" cy="500000"/>
+          </a:xfrm>
+          <a:prstGeom prst="rect">
+            <a:avLst/>
+          </a:prstGeom>
+          <a:noFill/>
+          <a:ln/>
+        </p:spPr>
+        <p:txBody>
+          <a:bodyPr wrap="square" lIns="0" tIns="0" rIns="0" bIns="0" rtlCol="0" anchor="t"/>
+          <a:lstStyle/>
+          <a:p>
+            <a:pPr marL="0" indent="0" algn="ctr">
+              <a:buNone/>
+            </a:pPr>
+            <a:r>
+              <a:rPr lang="fr-FR" sz="1800" b="1" dirty="0">
+                <a:solidFill>
+                  <a:srgbClr val="8B1A2B"/>
+                </a:solidFill>
+                <a:latin typeface="Poppins"/>
+              </a:rPr>
+              <a:t>En signant ce diplôme de Super Copain, je m'engage à :</a:t>
+            </a:r>
+          </a:p>
+        </p:txBody>
+      </p:sp>
+      <p:sp>
+        <p:nvSpPr>
+          <p:cNvPr id="54" name="Bullets 54"/>
+          <p:cNvSpPr/>
+          <p:nvPr/>
+        </p:nvSpPr>
+        <p:spPr>
+          <a:xfrm>
+            <a:off x="1200000" y="4570000"/>
+            <a:ext cx="5162850" cy="3200000"/>
+          </a:xfrm>
+          <a:prstGeom prst="rect">
+            <a:avLst/>
+          </a:prstGeom>
+          <a:noFill/>
+          <a:ln/>
+        </p:spPr>
+        <p:txBody>
+          <a:bodyPr wrap="square" lIns="0" tIns="0" rIns="0" bIns="0" rtlCol="0" anchor="t"/>
+          <a:lstStyle/>
+          <a:p>
+            <a:pPr marL="342900" indent="-342900">
+              <a:buFont typeface="Arial"/>
+              <a:buChar char="•"/>
+            </a:pPr>
+            <a:r>
+              <a:rPr lang="fr-FR" sz="1700" dirty="0">
+                <a:solidFill>
+                  <a:srgbClr val="333333"/>
+                </a:solidFill>
+                <a:latin typeface="Poppins"/>
+              </a:rPr>
+              <a:t>Écouter mon copain s'il me dit que sa batterie est à plat.</a:t>
+            </a:r>
+          </a:p>
+          <a:p>
+            <a:pPr marL="342900" indent="-342900">
+              <a:buFont typeface="Arial"/>
+              <a:buChar char="•"/>
+            </a:pPr>
+            <a:r>
+              <a:rPr lang="fr-FR" sz="1700" dirty="0">
+                <a:solidFill>
+                  <a:srgbClr val="333333"/>
+                </a:solidFill>
+                <a:latin typeface="Poppins"/>
+              </a:rPr>
+              <a:t>Choisir des jeux sans bousculade ensemble avec lui (comme la marelle, les jeux de société, inventer des histoires...).</a:t>
+            </a:r>
+          </a:p>
+          <a:p>
+            <a:pPr marL="342900" indent="-342900">
+              <a:buFont typeface="Arial"/>
+              <a:buChar char="•"/>
+            </a:pPr>
+            <a:r>
+              <a:rPr lang="fr-FR" sz="1700" dirty="0">
+                <a:solidFill>
+                  <a:srgbClr val="333333"/>
+                </a:solidFill>
+                <a:latin typeface="Poppins"/>
+              </a:rPr>
+              <a:t>Me rappeler que même si sa colle est différente, ensemble, on est plus forts !</a:t>
+            </a:r>
+          </a:p>
+        </p:txBody>
+      </p:sp>
+      <p:sp>
+        <p:nvSpPr>
+          <p:cNvPr id="55" name="Text 55"/>
+          <p:cNvSpPr/>
+          <p:nvPr/>
+        </p:nvSpPr>
+        <p:spPr>
+          <a:xfrm>
+            <a:off x="950000" y="8700000"/>
+            <a:ext cx="5662850" cy="700000"/>
+          </a:xfrm>
+          <a:prstGeom prst="rect">
+            <a:avLst/>
+          </a:prstGeom>
+          <a:noFill/>
+          <a:ln/>
+        </p:spPr>
+        <p:txBody>
+          <a:bodyPr wrap="square" lIns="0" tIns="0" rIns="0" bIns="0" rtlCol="0" anchor="t"/>
+          <a:lstStyle/>
+          <a:p>
+            <a:pPr marL="0" indent="0" algn="ctr">
+              <a:buNone/>
+            </a:pPr>
+            <a:r>
+              <a:rPr lang="fr-FR" sz="1700" b="1" dirty="0">
+                <a:solidFill>
+                  <a:srgbClr val="8B1A2B"/>
+                </a:solidFill>
+                <a:latin typeface="Poppins"/>
+              </a:rPr>
+              <a:t>Signature du super copain : _________________________</a:t>
+            </a:r>
+          </a:p>
+        </p:txBody>
+      </p:sp>
+    </p:spTree>
+  </p:cSld>
+  <p:clrMapOvr>
+    <a:masterClrMapping/>
+  </p:clrMapOvr>
+</p:sld>
+</file>
+
+<file path=ppt/slides/slide13.xml><?xml version="1.0" encoding="utf-8"?>
+<p:sld xmlns:a="http://schemas.openxmlformats.org/drawingml/2006/main" xmlns:r="http://schemas.openxmlformats.org/officeDocument/2006/relationships" xmlns:p="http://schemas.openxmlformats.org/presentationml/2006/main">
+  <p:cSld name="Slide 2">
+    <p:bg>
+      <p:bgPr>
+        <a:blipFill dpi="0" rotWithShape="1">
+          <a:blip r:embed="rId3">
+            <a:lum/>
+          </a:blip>
+          <a:srcRect/>
+          <a:stretch>
+            <a:fillRect/>
+          </a:stretch>
+        </a:blipFill>
+        <a:effectLst/>
+      </p:bgPr>
+    </p:bg>
+    <p:spTree>
+      <p:nvGrpSpPr>
+        <p:cNvPr id="1" name=""/>
+        <p:cNvGrpSpPr/>
+        <p:nvPr/>
+      </p:nvGrpSpPr>
+      <p:grpSpPr>
+        <a:xfrm>
+          <a:off x="0" y="0"/>
+          <a:ext cx="0" cy="0"/>
+          <a:chOff x="0" y="0"/>
+          <a:chExt cx="0" cy="0"/>
+        </a:xfrm>
+      </p:grpSpPr>
+      <p:sp>
+        <p:nvSpPr>
+          <p:cNvPr id="2" name="Text 0"/>
+          <p:cNvSpPr/>
+          <p:nvPr/>
+        </p:nvSpPr>
+        <p:spPr>
+          <a:xfrm>
+            <a:off x="457200" y="365760"/>
+            <a:ext cx="6647688" cy="640080"/>
+          </a:xfrm>
+          <a:prstGeom prst="rect">
+            <a:avLst/>
+          </a:prstGeom>
+          <a:noFill/>
+          <a:ln/>
+        </p:spPr>
+        <p:txBody>
+          <a:bodyPr wrap="square" lIns="0" tIns="0" rIns="0" bIns="0" rtlCol="0" anchor="ctr"/>
+          <a:lstStyle/>
+          <a:p>
+            <a:pPr marL="0" indent="0" algn="ctr">
+              <a:buNone/>
+            </a:pPr>
+            <a:r>
+              <a:rPr lang="fr-FR" sz="2800" b="1" dirty="0">
+                <a:solidFill>
+                  <a:srgbClr val="8B1A2B"/>
+                </a:solidFill>
+                <a:latin typeface="Poppins" pitchFamily="34" charset="0"/>
+                <a:ea typeface="Calibri" pitchFamily="34" charset="-122"/>
+                <a:cs typeface="Calibri" pitchFamily="34" charset="-120"/>
+              </a:rPr>
+              <a:t>À toi de créer ton propre Super-Héros !</a:t>
+            </a:r>
+            <a:endParaRPr lang="fr-FR" sz="2800" dirty="0"/>
+          </a:p>
+        </p:txBody>
+      </p:sp>
+      <p:sp>
+        <p:nvSpPr>
+          <p:cNvPr id="99" name="Footer"/>
+          <p:cNvSpPr/>
+          <p:nvPr/>
+        </p:nvSpPr>
+        <p:spPr>
+          <a:xfrm>
+            <a:off x="500000" y="10300000"/>
+            <a:ext cx="6562850" cy="300000"/>
+          </a:xfrm>
+          <a:prstGeom prst="rect">
+            <a:avLst/>
+          </a:prstGeom>
+          <a:noFill/>
+          <a:ln/>
+        </p:spPr>
+        <p:txBody>
+          <a:bodyPr wrap="square" lIns="0" tIns="0" rIns="0" bIns="0" rtlCol="0" anchor="ctr"/>
+          <a:lstStyle/>
+          <a:p>
+            <a:pPr marL="0" indent="0" algn="ctr">
+              <a:buNone/>
+            </a:pPr>
+            <a:r>
+              <a:rPr lang="fr-FR" sz="1000" i="1">
+                <a:solidFill>
+                  <a:srgbClr val="666666"/>
+                </a:solidFill>
+                <a:latin typeface="Poppins" pitchFamily="34" charset="0"/>
+                <a:ea typeface="Calibri" pitchFamily="34" charset="0"/>
+                <a:cs typeface="Calibri" pitchFamily="34" charset="0"/>
+              </a:rPr>
+              <a:t>Fait par l’association Sed’Occ France 04/2026</a:t>
+            </a:r>
+          </a:p>
+        </p:txBody>
+      </p:sp>
+      <p:pic>
+        <p:nvPicPr>
+          <p:cNvPr id="9" name="Image 8">
+            <a:extLst>
+              <a:ext uri="{FF2B5EF4-FFF2-40B4-BE49-F238E27FC236}">
+                <a16:creationId xmlns:a16="http://schemas.microsoft.com/office/drawing/2014/main" id="{1272B92B-21E4-464F-9F8E-4A62B1E16185}"/>
+              </a:ext>
+            </a:extLst>
+          </p:cNvPr>
+          <p:cNvPicPr>
+            <a:picLocks noChangeAspect="1"/>
+          </p:cNvPicPr>
+          <p:nvPr/>
+        </p:nvPicPr>
+        <p:blipFill rotWithShape="1">
+          <a:blip r:embed="rId5"/>
+          <a:srcRect l="9802" t="10888" r="15836" b="19876"/>
+          <a:stretch/>
+        </p:blipFill>
+        <p:spPr>
+          <a:xfrm>
+            <a:off x="6300000" y="9540000"/>
+            <a:ext cx="1080000" cy="1007999"/>
+          </a:xfrm>
+          <a:prstGeom prst="rect">
+            <a:avLst/>
+          </a:prstGeom>
+        </p:spPr>
+      </p:pic>
+      <p:sp>
+        <p:nvSpPr>
+          <p:cNvPr id="50" name="Text 50"/>
+          <p:cNvSpPr/>
+          <p:nvPr/>
+        </p:nvSpPr>
+        <p:spPr>
+          <a:xfrm>
+            <a:off x="457200" y="1080000"/>
+            <a:ext cx="6647688" cy="1650000"/>
+          </a:xfrm>
+          <a:prstGeom prst="rect">
+            <a:avLst/>
+          </a:prstGeom>
+          <a:noFill/>
+          <a:ln/>
+        </p:spPr>
+        <p:txBody>
+          <a:bodyPr wrap="square" lIns="0" tIns="0" rIns="0" bIns="0" rtlCol="0" anchor="t"/>
+          <a:lstStyle/>
+          <a:p>
+            <a:pPr marL="0" indent="0" algn="ctr">
+              <a:buNone/>
+            </a:pPr>
+            <a:r>
+              <a:rPr lang="fr-FR" sz="1700" b="0" dirty="0">
+                <a:solidFill>
+                  <a:srgbClr val="333333"/>
+                </a:solidFill>
+                <a:latin typeface="Poppins"/>
+              </a:rPr>
+              <a:t>Tu as découvert le secret de la colle magique et tu as appris à écouter ta grande batterie. Tu sais quoi ? Gérer tout ça tous les jours fait de toi un vrai super-héros !</a:t>
+            </a:r>
+          </a:p>
+        </p:txBody>
+      </p:sp>
+      <p:sp>
+        <p:nvSpPr>
+          <p:cNvPr id="51" name="Text 51"/>
+          <p:cNvSpPr/>
+          <p:nvPr/>
+        </p:nvSpPr>
+        <p:spPr>
+          <a:xfrm>
+            <a:off x="457200" y="2750000"/>
+            <a:ext cx="6647688" cy="1100000"/>
+          </a:xfrm>
+          <a:prstGeom prst="rect">
+            <a:avLst/>
+          </a:prstGeom>
+          <a:noFill/>
+          <a:ln/>
+        </p:spPr>
+        <p:txBody>
+          <a:bodyPr wrap="square" lIns="0" tIns="0" rIns="0" bIns="0" rtlCol="0" anchor="t"/>
+          <a:lstStyle/>
+          <a:p>
+            <a:pPr marL="0" indent="0" algn="ctr">
+              <a:buNone/>
+            </a:pPr>
+            <a:r>
+              <a:rPr lang="fr-FR" sz="1600" b="0" dirty="0">
+                <a:solidFill>
+                  <a:srgbClr val="333333"/>
+                </a:solidFill>
+                <a:latin typeface="Poppins"/>
+              </a:rPr>
+              <a:t>À quoi ressemble ton costume ? Dessine-toi en super-héros ou colorie la silhouette ci-dessous. N'oublie pas de choisir tes couleurs préférées et de rajouter tes supers outils pour t'aider !</a:t>
+            </a:r>
+          </a:p>
+        </p:txBody>
+      </p:sp>
+      <p:sp>
+        <p:nvSpPr>
+          <p:cNvPr id="60" name="DrawBox"/>
+          <p:cNvSpPr/>
+          <p:nvPr/>
+        </p:nvSpPr>
+        <p:spPr>
+          <a:xfrm>
+            <a:off x="1781425" y="4050000"/>
+            <a:ext cx="4000000" cy="5450000"/>
+          </a:xfrm>
+          <a:prstGeom prst="roundRect">
+            <a:avLst>
+              <a:gd name="adj" fmla="val 4000"/>
+            </a:avLst>
+          </a:prstGeom>
+          <a:solidFill>
+            <a:srgbClr val="FFFFFF"/>
+          </a:solidFill>
+          <a:ln w="28575">
+            <a:solidFill>
+              <a:srgbClr val="E8963D"/>
+            </a:solidFill>
+            <a:prstDash val="dash"/>
+          </a:ln>
+        </p:spPr>
+        <p:txBody>
+          <a:bodyPr/>
+          <a:lstStyle/>
+          <a:p>
+            <a:endParaRPr lang="fr-FR"/>
+          </a:p>
+        </p:txBody>
+      </p:sp>
+      <p:sp>
+        <p:nvSpPr>
+          <p:cNvPr id="61" name="Sil61"/>
+          <p:cNvSpPr/>
+          <p:nvPr/>
+        </p:nvSpPr>
+        <p:spPr>
+          <a:xfrm>
+            <a:off x="2959717" y="5624940"/>
+            <a:ext cx="1643256" cy="2011572"/>
+          </a:xfrm>
+          <a:prstGeom prst="triangle">
+            <a:avLst/>
+          </a:prstGeom>
+          <a:noFill/>
+          <a:ln w="28575">
+            <a:solidFill>
+              <a:srgbClr val="8B1A2B"/>
+            </a:solidFill>
+          </a:ln>
+        </p:spPr>
+        <p:txBody>
+          <a:bodyPr/>
+          <a:lstStyle/>
+          <a:p>
+            <a:endParaRPr lang="fr-FR"/>
+          </a:p>
+        </p:txBody>
+      </p:sp>
+      <p:sp>
+        <p:nvSpPr>
+          <p:cNvPr id="62" name="Sil62"/>
+          <p:cNvSpPr/>
+          <p:nvPr/>
+        </p:nvSpPr>
+        <p:spPr>
+          <a:xfrm>
+            <a:off x="3271369" y="4619154"/>
+            <a:ext cx="1019952" cy="1019952"/>
+          </a:xfrm>
+          <a:prstGeom prst="ellipse">
+            <a:avLst/>
+          </a:prstGeom>
+          <a:noFill/>
+          <a:ln w="28575">
+            <a:solidFill>
+              <a:srgbClr val="8B1A2B"/>
+            </a:solidFill>
+          </a:ln>
+        </p:spPr>
+        <p:txBody>
+          <a:bodyPr/>
+          <a:lstStyle/>
+          <a:p>
+            <a:endParaRPr lang="fr-FR"/>
+          </a:p>
+        </p:txBody>
+      </p:sp>
+      <p:sp>
+        <p:nvSpPr>
+          <p:cNvPr id="63" name="Sil63"/>
+          <p:cNvSpPr/>
+          <p:nvPr/>
+        </p:nvSpPr>
+        <p:spPr>
+          <a:xfrm>
+            <a:off x="3356365" y="5029968"/>
+            <a:ext cx="849960" cy="184158"/>
+          </a:xfrm>
+          <a:prstGeom prst="roundRect">
+            <a:avLst>
+              <a:gd name="adj" fmla="val 25000"/>
+            </a:avLst>
+          </a:prstGeom>
+          <a:noFill/>
+          <a:ln w="28575">
+            <a:solidFill>
+              <a:srgbClr val="8B1A2B"/>
+            </a:solidFill>
+          </a:ln>
+        </p:spPr>
+        <p:txBody>
+          <a:bodyPr/>
+          <a:lstStyle/>
+          <a:p>
+            <a:endParaRPr lang="fr-FR"/>
+          </a:p>
+        </p:txBody>
+      </p:sp>
+      <p:sp>
+        <p:nvSpPr>
+          <p:cNvPr id="64" name="Sil64"/>
+          <p:cNvSpPr/>
+          <p:nvPr/>
+        </p:nvSpPr>
+        <p:spPr>
+          <a:xfrm>
+            <a:off x="3328033" y="5653272"/>
+            <a:ext cx="906624" cy="1204110"/>
+          </a:xfrm>
+          <a:prstGeom prst="roundRect">
+            <a:avLst>
+              <a:gd name="adj" fmla="val 25000"/>
+            </a:avLst>
+          </a:prstGeom>
+          <a:noFill/>
+          <a:ln w="28575">
+            <a:solidFill>
+              <a:srgbClr val="8B1A2B"/>
+            </a:solidFill>
+          </a:ln>
+        </p:spPr>
+        <p:txBody>
+          <a:bodyPr/>
+          <a:lstStyle/>
+          <a:p>
+            <a:endParaRPr lang="fr-FR"/>
+          </a:p>
+        </p:txBody>
+      </p:sp>
+      <p:sp>
+        <p:nvSpPr>
+          <p:cNvPr id="65" name="Sil65"/>
+          <p:cNvSpPr/>
+          <p:nvPr/>
+        </p:nvSpPr>
+        <p:spPr>
+          <a:xfrm>
+            <a:off x="3583021" y="5922426"/>
+            <a:ext cx="396648" cy="396648"/>
+          </a:xfrm>
+          <a:prstGeom prst="star5">
+            <a:avLst/>
+          </a:prstGeom>
+          <a:noFill/>
+          <a:ln w="28575">
+            <a:solidFill>
+              <a:srgbClr val="8B1A2B"/>
+            </a:solidFill>
+          </a:ln>
+        </p:spPr>
+        <p:txBody>
+          <a:bodyPr/>
+          <a:lstStyle/>
+          <a:p>
+            <a:endParaRPr lang="fr-FR"/>
+          </a:p>
+        </p:txBody>
+      </p:sp>
+      <p:sp>
+        <p:nvSpPr>
+          <p:cNvPr id="66" name="Sil66"/>
+          <p:cNvSpPr/>
+          <p:nvPr/>
+        </p:nvSpPr>
+        <p:spPr>
+          <a:xfrm>
+            <a:off x="3682183" y="6588228"/>
+            <a:ext cx="198324" cy="198324"/>
+          </a:xfrm>
+          <a:prstGeom prst="ellipse">
+            <a:avLst/>
+          </a:prstGeom>
+          <a:noFill/>
+          <a:ln w="28575">
+            <a:solidFill>
+              <a:srgbClr val="8B1A2B"/>
+            </a:solidFill>
+          </a:ln>
+        </p:spPr>
+        <p:txBody>
+          <a:bodyPr/>
+          <a:lstStyle/>
+          <a:p>
+            <a:endParaRPr lang="fr-FR"/>
+          </a:p>
+        </p:txBody>
+      </p:sp>
+      <p:sp>
+        <p:nvSpPr>
+          <p:cNvPr id="67" name="Sil67"/>
+          <p:cNvSpPr/>
+          <p:nvPr/>
+        </p:nvSpPr>
+        <p:spPr>
+          <a:xfrm>
+            <a:off x="2903053" y="5766600"/>
+            <a:ext cx="283320" cy="849960"/>
+          </a:xfrm>
+          <a:prstGeom prst="roundRect">
+            <a:avLst>
+              <a:gd name="adj" fmla="val 25000"/>
+            </a:avLst>
+          </a:prstGeom>
+          <a:noFill/>
+          <a:ln w="28575">
+            <a:solidFill>
+              <a:srgbClr val="8B1A2B"/>
+            </a:solidFill>
+          </a:ln>
+        </p:spPr>
+        <p:txBody>
+          <a:bodyPr/>
+          <a:lstStyle/>
+          <a:p>
+            <a:endParaRPr lang="fr-FR"/>
+          </a:p>
+        </p:txBody>
+      </p:sp>
+      <p:sp>
+        <p:nvSpPr>
+          <p:cNvPr id="68" name="Sil68"/>
+          <p:cNvSpPr/>
+          <p:nvPr/>
+        </p:nvSpPr>
+        <p:spPr>
+          <a:xfrm>
+            <a:off x="4376317" y="5766600"/>
+            <a:ext cx="283320" cy="849960"/>
+          </a:xfrm>
+          <a:prstGeom prst="roundRect">
+            <a:avLst>
+              <a:gd name="adj" fmla="val 25000"/>
+            </a:avLst>
+          </a:prstGeom>
+          <a:noFill/>
+          <a:ln w="28575">
+            <a:solidFill>
+              <a:srgbClr val="8B1A2B"/>
+            </a:solidFill>
+          </a:ln>
+        </p:spPr>
+        <p:txBody>
+          <a:bodyPr/>
+          <a:lstStyle/>
+          <a:p>
+            <a:endParaRPr lang="fr-FR"/>
+          </a:p>
+        </p:txBody>
+      </p:sp>
+      <p:sp>
+        <p:nvSpPr>
+          <p:cNvPr id="69" name="Sil69"/>
+          <p:cNvSpPr/>
+          <p:nvPr/>
+        </p:nvSpPr>
+        <p:spPr>
+          <a:xfrm>
+            <a:off x="2888887" y="6503232"/>
+            <a:ext cx="311652" cy="311652"/>
+          </a:xfrm>
+          <a:prstGeom prst="ellipse">
+            <a:avLst/>
+          </a:prstGeom>
+          <a:noFill/>
+          <a:ln w="28575">
+            <a:solidFill>
+              <a:srgbClr val="8B1A2B"/>
+            </a:solidFill>
+          </a:ln>
+        </p:spPr>
+        <p:txBody>
+          <a:bodyPr/>
+          <a:lstStyle/>
+          <a:p>
+            <a:endParaRPr lang="fr-FR"/>
+          </a:p>
+        </p:txBody>
+      </p:sp>
+      <p:sp>
+        <p:nvSpPr>
+          <p:cNvPr id="70" name="Sil70"/>
+          <p:cNvSpPr/>
+          <p:nvPr/>
+        </p:nvSpPr>
+        <p:spPr>
+          <a:xfrm>
+            <a:off x="4362151" y="6503232"/>
+            <a:ext cx="311652" cy="311652"/>
+          </a:xfrm>
+          <a:prstGeom prst="ellipse">
+            <a:avLst/>
+          </a:prstGeom>
+          <a:noFill/>
+          <a:ln w="28575">
+            <a:solidFill>
+              <a:srgbClr val="8B1A2B"/>
+            </a:solidFill>
+          </a:ln>
+        </p:spPr>
+        <p:txBody>
+          <a:bodyPr/>
+          <a:lstStyle/>
+          <a:p>
+            <a:endParaRPr lang="fr-FR"/>
+          </a:p>
+        </p:txBody>
+      </p:sp>
+      <p:sp>
+        <p:nvSpPr>
+          <p:cNvPr id="71" name="Sil71"/>
+          <p:cNvSpPr/>
+          <p:nvPr/>
+        </p:nvSpPr>
+        <p:spPr>
+          <a:xfrm>
+            <a:off x="3427195" y="6857382"/>
+            <a:ext cx="311652" cy="991620"/>
+          </a:xfrm>
+          <a:prstGeom prst="roundRect">
+            <a:avLst>
+              <a:gd name="adj" fmla="val 25000"/>
+            </a:avLst>
+          </a:prstGeom>
+          <a:noFill/>
+          <a:ln w="28575">
+            <a:solidFill>
+              <a:srgbClr val="8B1A2B"/>
+            </a:solidFill>
+          </a:ln>
+        </p:spPr>
+        <p:txBody>
+          <a:bodyPr/>
+          <a:lstStyle/>
+          <a:p>
+            <a:endParaRPr lang="fr-FR"/>
+          </a:p>
+        </p:txBody>
+      </p:sp>
+      <p:sp>
+        <p:nvSpPr>
+          <p:cNvPr id="72" name="Sil72"/>
+          <p:cNvSpPr/>
+          <p:nvPr/>
+        </p:nvSpPr>
+        <p:spPr>
+          <a:xfrm>
+            <a:off x="3823843" y="6857382"/>
+            <a:ext cx="311652" cy="991620"/>
+          </a:xfrm>
+          <a:prstGeom prst="roundRect">
+            <a:avLst>
+              <a:gd name="adj" fmla="val 25000"/>
+            </a:avLst>
+          </a:prstGeom>
+          <a:noFill/>
+          <a:ln w="28575">
+            <a:solidFill>
+              <a:srgbClr val="8B1A2B"/>
+            </a:solidFill>
+          </a:ln>
+        </p:spPr>
+        <p:txBody>
+          <a:bodyPr/>
+          <a:lstStyle/>
+          <a:p>
+            <a:endParaRPr lang="fr-FR"/>
+          </a:p>
+        </p:txBody>
+      </p:sp>
+      <p:sp>
+        <p:nvSpPr>
+          <p:cNvPr id="73" name="Sil73"/>
+          <p:cNvSpPr/>
+          <p:nvPr/>
+        </p:nvSpPr>
+        <p:spPr>
+          <a:xfrm>
+            <a:off x="3356365" y="7820670"/>
+            <a:ext cx="453312" cy="254988"/>
+          </a:xfrm>
+          <a:prstGeom prst="roundRect">
+            <a:avLst>
+              <a:gd name="adj" fmla="val 25000"/>
+            </a:avLst>
+          </a:prstGeom>
+          <a:noFill/>
+          <a:ln w="28575">
+            <a:solidFill>
+              <a:srgbClr val="8B1A2B"/>
+            </a:solidFill>
+          </a:ln>
+        </p:spPr>
+        <p:txBody>
+          <a:bodyPr/>
+          <a:lstStyle/>
+          <a:p>
+            <a:endParaRPr lang="fr-FR"/>
+          </a:p>
+        </p:txBody>
+      </p:sp>
+      <p:sp>
+        <p:nvSpPr>
+          <p:cNvPr id="74" name="Sil74"/>
+          <p:cNvSpPr/>
+          <p:nvPr/>
+        </p:nvSpPr>
+        <p:spPr>
+          <a:xfrm>
+            <a:off x="3753013" y="7820670"/>
+            <a:ext cx="453312" cy="254988"/>
+          </a:xfrm>
+          <a:prstGeom prst="roundRect">
+            <a:avLst>
+              <a:gd name="adj" fmla="val 25000"/>
+            </a:avLst>
+          </a:prstGeom>
+          <a:noFill/>
+          <a:ln w="28575">
+            <a:solidFill>
+              <a:srgbClr val="8B1A2B"/>
+            </a:solidFill>
+          </a:ln>
+        </p:spPr>
+        <p:txBody>
+          <a:bodyPr/>
+          <a:lstStyle/>
+          <a:p>
+            <a:endParaRPr lang="fr-FR"/>
+          </a:p>
+        </p:txBody>
+      </p:sp>
+      <p:sp>
+        <p:nvSpPr>
+          <p:cNvPr id="80" name="Text 80"/>
+          <p:cNvSpPr/>
+          <p:nvPr/>
+        </p:nvSpPr>
+        <p:spPr>
+          <a:xfrm>
+            <a:off x="1781425" y="9600000"/>
+            <a:ext cx="4000000" cy="400000"/>
+          </a:xfrm>
+          <a:prstGeom prst="rect">
+            <a:avLst/>
+          </a:prstGeom>
+          <a:noFill/>
+          <a:ln/>
+        </p:spPr>
+        <p:txBody>
+          <a:bodyPr wrap="square" lIns="0" tIns="0" rIns="0" bIns="0" rtlCol="0" anchor="t"/>
+          <a:lstStyle/>
+          <a:p>
+            <a:pPr marL="0" indent="0" algn="ctr">
+              <a:buNone/>
+            </a:pPr>
+            <a:r>
+              <a:rPr lang="fr-FR" sz="1400" b="0" i="1" dirty="0">
+                <a:solidFill>
+                  <a:srgbClr val="999999"/>
+                </a:solidFill>
+                <a:latin typeface="Poppins"/>
+              </a:rPr>
+              <a:t>Dessine-toi ici !</a:t>
+            </a:r>
+          </a:p>
+        </p:txBody>
+      </p:sp>
+    </p:spTree>
+  </p:cSld>
+  <p:clrMapOvr>
+    <a:masterClrMapping/>
+  </p:clrMapOvr>
+</p:sld>
+</file>
+
 <file path=ppt/slides/slide2.xml><?xml version="1.0" encoding="utf-8"?>
 <p:sld xmlns:a="http://schemas.openxmlformats.org/drawingml/2006/main" xmlns:r="http://schemas.openxmlformats.org/officeDocument/2006/relationships" xmlns:p="http://schemas.openxmlformats.org/presentationml/2006/main">
   <p:cSld>
@@ -6314,22 +8809,161 @@
           </a:prstGeom>
         </p:spPr>
       </p:pic>
-      <p:sp>
-        <p:nvSpPr>
-          <p:cNvPr id="6" name="Rectangle 5">
+    </p:spTree>
+  </p:cSld>
+  <p:clrMapOvr>
+    <a:masterClrMapping/>
+  </p:clrMapOvr>
+</p:sld>
+</file>
+
+<file path=ppt/slides/slide9.xml><?xml version="1.0" encoding="utf-8"?>
+<p:sld xmlns:a="http://schemas.openxmlformats.org/drawingml/2006/main" xmlns:r="http://schemas.openxmlformats.org/officeDocument/2006/relationships" xmlns:p="http://schemas.openxmlformats.org/presentationml/2006/main">
+  <p:cSld name="Slide 7">
+    <p:bg>
+      <p:bgPr>
+        <a:blipFill dpi="0" rotWithShape="1">
+          <a:blip r:embed="rId3">
+            <a:lum/>
+          </a:blip>
+          <a:srcRect/>
+          <a:stretch>
+            <a:fillRect/>
+          </a:stretch>
+        </a:blipFill>
+        <a:effectLst/>
+      </p:bgPr>
+    </p:bg>
+    <p:spTree>
+      <p:nvGrpSpPr>
+        <p:cNvPr id="1" name=""/>
+        <p:cNvGrpSpPr/>
+        <p:nvPr/>
+      </p:nvGrpSpPr>
+      <p:grpSpPr>
+        <a:xfrm>
+          <a:off x="0" y="0"/>
+          <a:ext cx="0" cy="0"/>
+          <a:chOff x="0" y="0"/>
+          <a:chExt cx="0" cy="0"/>
+        </a:xfrm>
+      </p:grpSpPr>
+      <p:sp>
+        <p:nvSpPr>
+          <p:cNvPr id="2" name="Text 0"/>
+          <p:cNvSpPr/>
+          <p:nvPr/>
+        </p:nvSpPr>
+        <p:spPr>
+          <a:xfrm>
+            <a:off x="457200" y="360000"/>
+            <a:ext cx="6647688" cy="648000"/>
+          </a:xfrm>
+          <a:prstGeom prst="rect">
+            <a:avLst/>
+          </a:prstGeom>
+          <a:noFill/>
+          <a:ln/>
+        </p:spPr>
+        <p:txBody>
+          <a:bodyPr wrap="square" lIns="0" tIns="0" rIns="0" bIns="0" rtlCol="0" anchor="ctr"/>
+          <a:lstStyle/>
+          <a:p>
+            <a:pPr marL="0" indent="0" algn="ctr">
+              <a:buNone/>
+            </a:pPr>
+            <a:r>
+              <a:rPr lang="en-US" sz="3000" b="1">
+                <a:solidFill>
+                  <a:srgbClr val="8B1A2B"/>
+                </a:solidFill>
+                <a:latin typeface="Poppins" pitchFamily="34" charset="0"/>
+                <a:ea typeface="Calibri" pitchFamily="34" charset="-122"/>
+                <a:cs typeface="Calibri" pitchFamily="34" charset="-120"/>
+              </a:rPr>
+              <a:t>Pour tes parents</a:t>
+            </a:r>
+            <a:endParaRPr lang="en-US" sz="3000"/>
+          </a:p>
+        </p:txBody>
+      </p:sp>
+      <p:sp>
+        <p:nvSpPr>
+          <p:cNvPr id="99" name="Footer"/>
+          <p:cNvSpPr/>
+          <p:nvPr/>
+        </p:nvSpPr>
+        <p:spPr>
+          <a:xfrm>
+            <a:off x="500000" y="10300000"/>
+            <a:ext cx="6562850" cy="300000"/>
+          </a:xfrm>
+          <a:prstGeom prst="rect">
+            <a:avLst/>
+          </a:prstGeom>
+          <a:noFill/>
+          <a:ln/>
+        </p:spPr>
+        <p:txBody>
+          <a:bodyPr wrap="square" lIns="0" tIns="0" rIns="0" bIns="0" rtlCol="0" anchor="ctr"/>
+          <a:lstStyle/>
+          <a:p>
+            <a:pPr marL="0" indent="0" algn="ctr">
+              <a:buNone/>
+            </a:pPr>
+            <a:r>
+              <a:rPr lang="fr-FR" sz="1000" i="1">
+                <a:solidFill>
+                  <a:srgbClr val="666666"/>
+                </a:solidFill>
+                <a:latin typeface="Poppins" pitchFamily="34" charset="0"/>
+                <a:ea typeface="Calibri" pitchFamily="34" charset="0"/>
+                <a:cs typeface="Calibri" pitchFamily="34" charset="0"/>
+              </a:rPr>
+              <a:t>Fait par l’association Sed’Occ France 04/2026</a:t>
+            </a:r>
+          </a:p>
+        </p:txBody>
+      </p:sp>
+      <p:pic>
+        <p:nvPicPr>
+          <p:cNvPr id="8" name="Image 7">
             <a:extLst>
               <a:ext uri="{FF2B5EF4-FFF2-40B4-BE49-F238E27FC236}">
-                <a16:creationId xmlns:a16="http://schemas.microsoft.com/office/drawing/2014/main" id="{E0B361EC-0B31-4A4E-94B4-F8CEAB4FC256}"/>
+                <a16:creationId xmlns:a16="http://schemas.microsoft.com/office/drawing/2014/main" id="{21E0B056-8D9F-8042-A02E-B988B66CF19F}"/>
               </a:ext>
             </a:extLst>
           </p:cNvPr>
-          <p:cNvSpPr/>
-          <p:nvPr/>
-        </p:nvSpPr>
-        <p:spPr>
-          <a:xfrm>
-            <a:off x="2033733" y="8353920"/>
-            <a:ext cx="3781425" cy="1628651"/>
+          <p:cNvPicPr>
+            <a:picLocks noChangeAspect="1"/>
+          </p:cNvPicPr>
+          <p:nvPr/>
+        </p:nvPicPr>
+        <p:blipFill rotWithShape="1">
+          <a:blip r:embed="rId6"/>
+          <a:srcRect l="9802" t="10888" r="15836" b="19876"/>
+          <a:stretch/>
+        </p:blipFill>
+        <p:spPr>
+          <a:xfrm>
+            <a:off x="6300000" y="9540000"/>
+            <a:ext cx="1080000" cy="1007999"/>
+          </a:xfrm>
+          <a:prstGeom prst="rect">
+            <a:avLst/>
+          </a:prstGeom>
+        </p:spPr>
+      </p:pic>
+      <p:sp>
+        <p:nvSpPr>
+          <p:cNvPr id="6" name="Rectangle 5"/>
+          <p:cNvSpPr/>
+          <p:nvPr/>
+        </p:nvSpPr>
+        <p:spPr>
+          <a:xfrm>
+            <a:off x="1281425" y="4200000"/>
+            <a:ext cx="5000000" cy="2400000"/>
           </a:xfrm>
           <a:prstGeom prst="rect">
             <a:avLst/>
@@ -6340,38 +8974,6 @@
             <a:spAutoFit/>
           </a:bodyPr>
           <a:lstStyle/>
-          <a:p>
-            <a:pPr algn="ctr">
-              <a:spcBef>
-                <a:spcPts val="800"/>
-              </a:spcBef>
-            </a:pPr>
-            <a:r>
-              <a:rPr lang="fr-FR" sz="1000" dirty="0">
-                <a:solidFill>
-                  <a:srgbClr val="CCBBBB"/>
-                </a:solidFill>
-                <a:latin typeface="Poppins"/>
-              </a:rPr>
-              <a:t>━━━━━━━━━━━━━━━━━━━━━━━━</a:t>
-            </a:r>
-          </a:p>
-          <a:p>
-            <a:pPr algn="ctr">
-              <a:spcBef>
-                <a:spcPts val="400"/>
-              </a:spcBef>
-            </a:pPr>
-            <a:r>
-              <a:rPr lang="fr-FR" sz="2400" b="1" dirty="0">
-                <a:solidFill>
-                  <a:srgbClr val="8B1A2B"/>
-                </a:solidFill>
-                <a:latin typeface="Poppins"/>
-              </a:rPr>
-              <a:t>Pour tes parents</a:t>
-            </a:r>
-          </a:p>
           <a:p>
             <a:pPr algn="ctr">
               <a:spcBef>
@@ -6379,7 +8981,7 @@
               </a:spcBef>
             </a:pPr>
             <a:r>
-              <a:rPr lang="fr-FR" sz="2000" dirty="0">
+              <a:rPr lang="fr-FR" sz="2400" dirty="0">
                 <a:solidFill>
                   <a:srgbClr val="666666"/>
                 </a:solidFill>
@@ -6388,7 +8990,7 @@
               <a:t>Site internet : </a:t>
             </a:r>
             <a:r>
-              <a:rPr lang="fr-FR" sz="2000" dirty="0" err="1">
+              <a:rPr lang="fr-FR" sz="2400" dirty="0" err="1">
                 <a:solidFill>
                   <a:srgbClr val="666666"/>
                 </a:solidFill>
@@ -6396,7 +8998,7 @@
               </a:rPr>
               <a:t>www.sedocc.fr</a:t>
             </a:r>
-            <a:endParaRPr lang="fr-FR" sz="2000" dirty="0">
+            <a:endParaRPr lang="fr-FR" sz="2400" dirty="0">
               <a:solidFill>
                 <a:srgbClr val="666666"/>
               </a:solidFill>
@@ -6406,7 +9008,7 @@
           <a:p>
             <a:pPr algn="ctr"/>
             <a:r>
-              <a:rPr lang="fr-FR" sz="2000" dirty="0">
+              <a:rPr lang="fr-FR" sz="2400" dirty="0">
                 <a:solidFill>
                   <a:srgbClr val="666666"/>
                 </a:solidFill>
@@ -6418,7 +9020,7 @@
           <a:p>
             <a:pPr algn="ctr"/>
             <a:r>
-              <a:rPr lang="fr-FR" sz="2000" dirty="0">
+              <a:rPr lang="fr-FR" sz="2400" dirty="0">
                 <a:solidFill>
                   <a:srgbClr val="666666"/>
                 </a:solidFill>
@@ -6427,7 +9029,7 @@
               <a:t>Facebook : </a:t>
             </a:r>
             <a:r>
-              <a:rPr lang="fr-FR" sz="2000" dirty="0" err="1">
+              <a:rPr lang="fr-FR" sz="2400" dirty="0" err="1">
                 <a:solidFill>
                   <a:srgbClr val="666666"/>
                 </a:solidFill>

--- a/documents/Livret-SED-enfant-SedOcc.pptx
+++ b/documents/Livret-SED-enfant-SedOcc.pptx
@@ -5,22 +5,21 @@
     <p:sldMasterId id="2147483648" r:id="rId1"/>
   </p:sldMasterIdLst>
   <p:notesMasterIdLst>
-    <p:notesMasterId r:id="rId10"/>
+    <p:notesMasterId r:id="rId14"/>
   </p:notesMasterIdLst>
   <p:sldIdLst>
     <p:sldId id="256" r:id="rId2"/>
     <p:sldId id="264" r:id="rId3"/>
     <p:sldId id="257" r:id="rId4"/>
     <p:sldId id="258" r:id="rId5"/>
-    <p:sldId id="259" r:id="rId6"/>
-    <p:sldId id="260" r:id="rId7"/>
-    <p:sldId id="261" r:id="rId8"/>
-    <p:sldId id="262" r:id="rId9"/>
-    <p:sldId id="266" r:id="rId16"/>
-    <p:sldId id="267" r:id="rId17"/>
-    <p:sldId id="268" r:id="rId18"/>
-    <p:sldId id="269" r:id="rId19"/>
-    <p:sldId id="265" r:id="rId15"/>
+    <p:sldId id="266" r:id="rId6"/>
+    <p:sldId id="259" r:id="rId7"/>
+    <p:sldId id="260" r:id="rId8"/>
+    <p:sldId id="261" r:id="rId9"/>
+    <p:sldId id="262" r:id="rId10"/>
+    <p:sldId id="268" r:id="rId11"/>
+    <p:sldId id="269" r:id="rId12"/>
+    <p:sldId id="265" r:id="rId13"/>
   </p:sldIdLst>
   <p:sldSz cx="7562850" cy="10688638"/>
   <p:notesSz cx="10688638" cy="7562850"/>
@@ -910,7 +909,7 @@
           <a:p>
             <a:fld id="{F7021451-1387-4CA6-816F-3879F97B5CBC}" type="slidenum">
               <a:rPr lang="en-US"/>
-              <a:t>5</a:t>
+              <a:t>6</a:t>
             </a:fld>
             <a:endParaRPr lang="en-US"/>
           </a:p>
@@ -999,7 +998,7 @@
           <a:p>
             <a:fld id="{F7021451-1387-4CA6-816F-3879F97B5CBC}" type="slidenum">
               <a:rPr lang="en-US"/>
-              <a:t>6</a:t>
+              <a:t>7</a:t>
             </a:fld>
             <a:endParaRPr lang="en-US"/>
           </a:p>
@@ -1088,7 +1087,7 @@
           <a:p>
             <a:fld id="{F7021451-1387-4CA6-816F-3879F97B5CBC}" type="slidenum">
               <a:rPr lang="en-US"/>
-              <a:t>7</a:t>
+              <a:t>8</a:t>
             </a:fld>
             <a:endParaRPr lang="en-US"/>
           </a:p>
@@ -1177,7 +1176,7 @@
           <a:p>
             <a:fld id="{F7021451-1387-4CA6-816F-3879F97B5CBC}" type="slidenum">
               <a:rPr lang="en-US"/>
-              <a:t>8</a:t>
+              <a:t>9</a:t>
             </a:fld>
             <a:endParaRPr lang="en-US"/>
           </a:p>
@@ -2587,7 +2586,7 @@
                 <a:ea typeface="Calibri" pitchFamily="34" charset="-122"/>
                 <a:cs typeface="Calibri" pitchFamily="34" charset="-120"/>
               </a:rPr>
-              <a:t>Le Livret SED'OCC</a:t>
+              <a:t>Le Livret Sed'Occ France</a:t>
             </a:r>
             <a:endParaRPr lang="fr-FR" sz="3600" dirty="0">
               <a:solidFill>
@@ -2833,7 +2832,7 @@
     <p:bg>
       <p:bgPr>
         <a:blipFill dpi="0" rotWithShape="1">
-          <a:blip r:embed="rId3">
+          <a:blip r:embed="rId2">
             <a:lum/>
           </a:blip>
           <a:srcRect/>
@@ -2891,7 +2890,7 @@
                 <a:ea typeface="Calibri" pitchFamily="34" charset="-122"/>
                 <a:cs typeface="Calibri" pitchFamily="34" charset="-120"/>
               </a:rPr>
-              <a:t>Mon niveau de super-énergie !</a:t>
+              <a:t>Le Pacte des Supers Copains !</a:t>
             </a:r>
             <a:endParaRPr lang="fr-FR" sz="2800" dirty="0"/>
           </a:p>
@@ -2950,7 +2949,7 @@
           <p:nvPr/>
         </p:nvPicPr>
         <p:blipFill rotWithShape="1">
-          <a:blip r:embed="rId5"/>
+          <a:blip r:embed="rId3"/>
           <a:srcRect l="9802" t="10888" r="15836" b="19876"/>
           <a:stretch/>
         </p:blipFill>
@@ -2973,7 +2972,7 @@
         <p:spPr>
           <a:xfrm>
             <a:off x="457200" y="1080000"/>
-            <a:ext cx="6647688" cy="1700000"/>
+            <a:ext cx="6647688" cy="1300000"/>
           </a:xfrm>
           <a:prstGeom prst="rect">
             <a:avLst/>
@@ -2989,105 +2988,37 @@
               <a:buNone/>
             </a:pPr>
             <a:r>
-              <a:rPr lang="fr-FR" sz="1800" b="0" dirty="0">
+              <a:rPr lang="fr-FR" sz="2400" b="0" dirty="0">
                 <a:solidFill>
                   <a:srgbClr val="333333"/>
                 </a:solidFill>
                 <a:latin typeface="Poppins"/>
               </a:rPr>
-              <a:t>Comme on l'a vu, à cause de la colle lâche, le corps fait plus d'efforts et la grande batterie peut se vider plus vite. C'est normal !</a:t>
-            </a:r>
-          </a:p>
-          <a:p>
-            <a:pPr marL="0" indent="0" algn="ctr">
-              <a:buNone/>
-            </a:pPr>
-            <a:r>
-              <a:rPr lang="fr-FR" sz="1800" b="0" dirty="0">
-                <a:solidFill>
-                  <a:srgbClr val="333333"/>
-                </a:solidFill>
-                <a:latin typeface="Poppins"/>
-              </a:rPr>
-              <a:t>Parfois, quand la batterie est à plat ou que les alarmes sonnent, tu as le droit de te sentir triste ou en colère. L'important, c'est d'apprendre à écouter ton corps.</a:t>
-            </a:r>
-          </a:p>
-          <a:p>
-            <a:pPr marL="0" indent="0" algn="ctr">
-              <a:buNone/>
-            </a:pPr>
-            <a:r>
-              <a:rPr lang="fr-FR" sz="1800" b="1" dirty="0">
-                <a:solidFill>
-                  <a:srgbClr val="8B1A2B"/>
-                </a:solidFill>
-                <a:latin typeface="Poppins"/>
-              </a:rPr>
-              <a:t>Montre à tes parents ou à tes copains où en est ta batterie aujourd'hui :</a:t>
-            </a:r>
-          </a:p>
-        </p:txBody>
-      </p:sp>
-      <p:sp>
-        <p:nvSpPr>
-          <p:cNvPr id="61" name="Card 61"/>
-          <p:cNvSpPr/>
-          <p:nvPr/>
-        </p:nvSpPr>
-        <p:spPr>
-          <a:xfrm>
-            <a:off x="457200" y="3350000"/>
-            <a:ext cx="2050000" cy="4400000"/>
+              <a:t>Peut-être que tu connais déjà, ou que tu rencontreras un jour, un copain ou une copine avec le SED. Sa colle spéciale le rend plus fragile, mais ce n'est pas de sa faute ! Pas besoin de se pousser pour bien rigoler ensemble.</a:t>
+            </a:r>
+          </a:p>
+        </p:txBody>
+      </p:sp>
+      <p:sp>
+        <p:nvSpPr>
+          <p:cNvPr id="51" name="DiplomaBox"/>
+          <p:cNvSpPr/>
+          <p:nvPr/>
+        </p:nvSpPr>
+        <p:spPr>
+          <a:xfrm>
+            <a:off x="770513" y="3195858"/>
+            <a:ext cx="5962850" cy="6344141"/>
           </a:xfrm>
           <a:prstGeom prst="roundRect">
             <a:avLst>
-              <a:gd name="adj" fmla="val 6000"/>
+              <a:gd name="adj" fmla="val 3500"/>
             </a:avLst>
           </a:prstGeom>
           <a:solidFill>
             <a:srgbClr val="FFFFFF"/>
           </a:solidFill>
-          <a:ln w="12700">
-            <a:solidFill>
-              <a:srgbClr val="8B1A2B">
-                <a:alpha val="15000"/>
-              </a:srgbClr>
-            </a:solidFill>
-          </a:ln>
-          <a:effectLst>
-            <a:outerShdw blurRad="60000" dist="20000" dir="5400000" algn="t" rotWithShape="0">
-              <a:srgbClr val="8B1A2B">
-                <a:alpha val="18000"/>
-              </a:srgbClr>
-            </a:outerShdw>
-          </a:effectLst>
-        </p:spPr>
-        <p:txBody>
-          <a:bodyPr/>
-          <a:lstStyle/>
-          <a:p>
-            <a:endParaRPr lang="fr-FR"/>
-          </a:p>
-        </p:txBody>
-      </p:sp>
-      <p:sp>
-        <p:nvSpPr>
-          <p:cNvPr id="62" name="BattBody 62"/>
-          <p:cNvSpPr/>
-          <p:nvPr/>
-        </p:nvSpPr>
-        <p:spPr>
-          <a:xfrm>
-            <a:off x="1122200" y="3610000"/>
-            <a:ext cx="720000" cy="380000"/>
-          </a:xfrm>
-          <a:prstGeom prst="roundRect">
-            <a:avLst>
-              <a:gd name="adj" fmla="val 15000"/>
-            </a:avLst>
-          </a:prstGeom>
-          <a:noFill/>
-          <a:ln w="28575">
+          <a:ln w="34925" cmpd="dbl">
             <a:solidFill>
               <a:srgbClr val="8B1A2B"/>
             </a:solidFill>
@@ -3101,76 +3032,40 @@
           </a:p>
         </p:txBody>
       </p:sp>
-      <p:sp>
-        <p:nvSpPr>
-          <p:cNvPr id="63" name="BattNub 63"/>
-          <p:cNvSpPr/>
-          <p:nvPr/>
-        </p:nvSpPr>
-        <p:spPr>
-          <a:xfrm>
-            <a:off x="1842200" y="3740000"/>
-            <a:ext cx="45000" cy="120000"/>
-          </a:xfrm>
-          <a:prstGeom prst="rect">
-            <a:avLst/>
-          </a:prstGeom>
-          <a:solidFill>
-            <a:srgbClr val="8B1A2B"/>
-          </a:solidFill>
-          <a:ln>
-            <a:noFill/>
-          </a:ln>
-        </p:spPr>
-        <p:txBody>
-          <a:bodyPr/>
-          <a:lstStyle/>
-          <a:p>
-            <a:endParaRPr lang="fr-FR"/>
-          </a:p>
-        </p:txBody>
-      </p:sp>
-      <p:sp>
-        <p:nvSpPr>
-          <p:cNvPr id="64" name="BattFill 64"/>
-          <p:cNvSpPr/>
-          <p:nvPr/>
-        </p:nvSpPr>
-        <p:spPr>
-          <a:xfrm>
-            <a:off x="1142200" y="3630000"/>
-            <a:ext cx="680000" cy="340000"/>
-          </a:xfrm>
-          <a:prstGeom prst="roundRect">
-            <a:avLst>
-              <a:gd name="adj" fmla="val 15000"/>
-            </a:avLst>
-          </a:prstGeom>
-          <a:solidFill>
-            <a:srgbClr val="5CA86B"/>
-          </a:solidFill>
-          <a:ln>
-            <a:noFill/>
-          </a:ln>
-        </p:spPr>
-        <p:txBody>
-          <a:bodyPr/>
-          <a:lstStyle/>
-          <a:p>
-            <a:endParaRPr lang="fr-FR"/>
-          </a:p>
-        </p:txBody>
-      </p:sp>
-      <p:sp>
-        <p:nvSpPr>
-          <p:cNvPr id="65" name="Text 65"/>
-          <p:cNvSpPr/>
-          <p:nvPr/>
-        </p:nvSpPr>
-        <p:spPr>
-          <a:xfrm>
-            <a:off x="507200" y="4110000"/>
-            <a:ext cx="1950000" cy="700000"/>
+      <p:pic>
+        <p:nvPicPr>
+          <p:cNvPr id="52" name="Badge"/>
+          <p:cNvPicPr>
+            <a:picLocks noChangeAspect="1"/>
+          </p:cNvPicPr>
+          <p:nvPr/>
+        </p:nvPicPr>
+        <p:blipFill>
+          <a:blip r:embed="rId4"/>
+          <a:stretch>
+            <a:fillRect/>
+          </a:stretch>
+        </p:blipFill>
+        <p:spPr>
+          <a:xfrm>
+            <a:off x="3095625" y="3131850"/>
+            <a:ext cx="1410706" cy="1410706"/>
+          </a:xfrm>
+          <a:prstGeom prst="rect">
+            <a:avLst/>
+          </a:prstGeom>
+        </p:spPr>
+      </p:pic>
+      <p:sp>
+        <p:nvSpPr>
+          <p:cNvPr id="53" name="Text 53"/>
+          <p:cNvSpPr/>
+          <p:nvPr/>
+        </p:nvSpPr>
+        <p:spPr>
+          <a:xfrm>
+            <a:off x="920513" y="4527901"/>
+            <a:ext cx="5662850" cy="500000"/>
           </a:xfrm>
           <a:prstGeom prst="rect">
             <a:avLst/>
@@ -3186,501 +3081,116 @@
               <a:buNone/>
             </a:pPr>
             <a:r>
-              <a:rPr lang="fr-FR" sz="1500" b="1" dirty="0">
+              <a:rPr lang="fr-FR" sz="2400" b="1" dirty="0">
                 <a:solidFill>
                   <a:srgbClr val="8B1A2B"/>
                 </a:solidFill>
                 <a:latin typeface="Poppins"/>
               </a:rPr>
-              <a:t>Pile Verte</a:t>
-            </a:r>
-          </a:p>
+              <a:t>En signant ce diplôme de Super Copain, je m'engage à :</a:t>
+            </a:r>
+          </a:p>
+        </p:txBody>
+      </p:sp>
+      <p:sp>
+        <p:nvSpPr>
+          <p:cNvPr id="54" name="Bullets 54"/>
+          <p:cNvSpPr/>
+          <p:nvPr/>
+        </p:nvSpPr>
+        <p:spPr>
+          <a:xfrm>
+            <a:off x="920513" y="5458954"/>
+            <a:ext cx="5691955" cy="3200000"/>
+          </a:xfrm>
+          <a:prstGeom prst="rect">
+            <a:avLst/>
+          </a:prstGeom>
+          <a:noFill/>
+          <a:ln/>
+        </p:spPr>
+        <p:txBody>
+          <a:bodyPr wrap="square" lIns="0" tIns="0" rIns="0" bIns="0" rtlCol="0" anchor="t"/>
+          <a:lstStyle/>
+          <a:p>
+            <a:pPr marL="342900" indent="-342900">
+              <a:buFont typeface="Arial"/>
+              <a:buChar char="•"/>
+            </a:pPr>
+            <a:r>
+              <a:rPr lang="fr-FR" sz="2400" dirty="0">
+                <a:solidFill>
+                  <a:srgbClr val="333333"/>
+                </a:solidFill>
+                <a:latin typeface="Poppins"/>
+              </a:rPr>
+              <a:t>Écouter un copain ou une copine qui me dit que sa batterie est à plat.</a:t>
+            </a:r>
+          </a:p>
+          <a:p>
+            <a:pPr marL="342900" indent="-342900">
+              <a:buFont typeface="Arial"/>
+              <a:buChar char="•"/>
+            </a:pPr>
+            <a:r>
+              <a:rPr lang="fr-FR" sz="2400" dirty="0">
+                <a:solidFill>
+                  <a:srgbClr val="333333"/>
+                </a:solidFill>
+                <a:latin typeface="Poppins"/>
+              </a:rPr>
+              <a:t>Proposer des jeux sans bousculade (comme la marelle, les jeux de société, inventer des histoires...).</a:t>
+            </a:r>
+          </a:p>
+          <a:p>
+            <a:pPr marL="342900" indent="-342900">
+              <a:buFont typeface="Arial"/>
+              <a:buChar char="•"/>
+            </a:pPr>
+            <a:r>
+              <a:rPr lang="fr-FR" sz="2400" dirty="0">
+                <a:solidFill>
+                  <a:srgbClr val="333333"/>
+                </a:solidFill>
+                <a:latin typeface="Poppins"/>
+              </a:rPr>
+              <a:t>Me rappeler que même quand la colle de quelqu'un est différente, ensemble, on est plus forts !</a:t>
+            </a:r>
+          </a:p>
+        </p:txBody>
+      </p:sp>
+      <p:sp>
+        <p:nvSpPr>
+          <p:cNvPr id="55" name="Text 55"/>
+          <p:cNvSpPr/>
+          <p:nvPr/>
+        </p:nvSpPr>
+        <p:spPr>
+          <a:xfrm>
+            <a:off x="949619" y="8638764"/>
+            <a:ext cx="5662850" cy="700000"/>
+          </a:xfrm>
+          <a:prstGeom prst="rect">
+            <a:avLst/>
+          </a:prstGeom>
+          <a:noFill/>
+          <a:ln/>
+        </p:spPr>
+        <p:txBody>
+          <a:bodyPr wrap="square" lIns="0" tIns="0" rIns="0" bIns="0" rtlCol="0" anchor="t"/>
+          <a:lstStyle/>
           <a:p>
             <a:pPr marL="0" indent="0" algn="ctr">
               <a:buNone/>
             </a:pPr>
             <a:r>
-              <a:rPr lang="fr-FR" sz="1500" b="1" dirty="0">
+              <a:rPr lang="fr-FR" sz="2400" b="1" dirty="0">
                 <a:solidFill>
                   <a:srgbClr val="8B1A2B"/>
                 </a:solidFill>
                 <a:latin typeface="Poppins"/>
               </a:rPr>
-              <a:t>(Pleine)</a:t>
-            </a:r>
-          </a:p>
-        </p:txBody>
-      </p:sp>
-      <p:sp>
-        <p:nvSpPr>
-          <p:cNvPr id="66" name="Text 66"/>
-          <p:cNvSpPr/>
-          <p:nvPr/>
-        </p:nvSpPr>
-        <p:spPr>
-          <a:xfrm>
-            <a:off x="537200" y="4890000"/>
-            <a:ext cx="1890000" cy="2860000"/>
-          </a:xfrm>
-          <a:prstGeom prst="rect">
-            <a:avLst/>
-          </a:prstGeom>
-          <a:noFill/>
-          <a:ln/>
-        </p:spPr>
-        <p:txBody>
-          <a:bodyPr wrap="square" lIns="0" tIns="0" rIns="0" bIns="0" rtlCol="0" anchor="t"/>
-          <a:lstStyle/>
-          <a:p>
-            <a:pPr marL="0" indent="0" algn="ctr">
-              <a:buNone/>
-            </a:pPr>
-            <a:r>
-              <a:rPr lang="fr-FR" sz="1150" b="0" dirty="0">
-                <a:solidFill>
-                  <a:srgbClr val="333333"/>
-                </a:solidFill>
-                <a:latin typeface="Poppins"/>
-              </a:rPr>
-              <a:t>Je suis en pleine forme ! Je peux jouer, mais je fais attention à ma colle magique.</a:t>
-            </a:r>
-          </a:p>
-        </p:txBody>
-      </p:sp>
-      <p:sp>
-        <p:nvSpPr>
-          <p:cNvPr id="67" name="Card 67"/>
-          <p:cNvSpPr/>
-          <p:nvPr/>
-        </p:nvSpPr>
-        <p:spPr>
-          <a:xfrm>
-            <a:off x="2756044" y="3350000"/>
-            <a:ext cx="2050000" cy="4400000"/>
-          </a:xfrm>
-          <a:prstGeom prst="roundRect">
-            <a:avLst>
-              <a:gd name="adj" fmla="val 6000"/>
-            </a:avLst>
-          </a:prstGeom>
-          <a:solidFill>
-            <a:srgbClr val="FFFFFF"/>
-          </a:solidFill>
-          <a:ln w="12700">
-            <a:solidFill>
-              <a:srgbClr val="8B1A2B">
-                <a:alpha val="15000"/>
-              </a:srgbClr>
-            </a:solidFill>
-          </a:ln>
-          <a:effectLst>
-            <a:outerShdw blurRad="60000" dist="20000" dir="5400000" algn="t" rotWithShape="0">
-              <a:srgbClr val="8B1A2B">
-                <a:alpha val="18000"/>
-              </a:srgbClr>
-            </a:outerShdw>
-          </a:effectLst>
-        </p:spPr>
-        <p:txBody>
-          <a:bodyPr/>
-          <a:lstStyle/>
-          <a:p>
-            <a:endParaRPr lang="fr-FR"/>
-          </a:p>
-        </p:txBody>
-      </p:sp>
-      <p:sp>
-        <p:nvSpPr>
-          <p:cNvPr id="68" name="BattBody 68"/>
-          <p:cNvSpPr/>
-          <p:nvPr/>
-        </p:nvSpPr>
-        <p:spPr>
-          <a:xfrm>
-            <a:off x="3421044" y="3610000"/>
-            <a:ext cx="720000" cy="380000"/>
-          </a:xfrm>
-          <a:prstGeom prst="roundRect">
-            <a:avLst>
-              <a:gd name="adj" fmla="val 15000"/>
-            </a:avLst>
-          </a:prstGeom>
-          <a:noFill/>
-          <a:ln w="28575">
-            <a:solidFill>
-              <a:srgbClr val="8B1A2B"/>
-            </a:solidFill>
-          </a:ln>
-        </p:spPr>
-        <p:txBody>
-          <a:bodyPr/>
-          <a:lstStyle/>
-          <a:p>
-            <a:endParaRPr lang="fr-FR"/>
-          </a:p>
-        </p:txBody>
-      </p:sp>
-      <p:sp>
-        <p:nvSpPr>
-          <p:cNvPr id="69" name="BattNub 69"/>
-          <p:cNvSpPr/>
-          <p:nvPr/>
-        </p:nvSpPr>
-        <p:spPr>
-          <a:xfrm>
-            <a:off x="4141044" y="3740000"/>
-            <a:ext cx="45000" cy="120000"/>
-          </a:xfrm>
-          <a:prstGeom prst="rect">
-            <a:avLst/>
-          </a:prstGeom>
-          <a:solidFill>
-            <a:srgbClr val="8B1A2B"/>
-          </a:solidFill>
-          <a:ln>
-            <a:noFill/>
-          </a:ln>
-        </p:spPr>
-        <p:txBody>
-          <a:bodyPr/>
-          <a:lstStyle/>
-          <a:p>
-            <a:endParaRPr lang="fr-FR"/>
-          </a:p>
-        </p:txBody>
-      </p:sp>
-      <p:sp>
-        <p:nvSpPr>
-          <p:cNvPr id="70" name="BattFill 70"/>
-          <p:cNvSpPr/>
-          <p:nvPr/>
-        </p:nvSpPr>
-        <p:spPr>
-          <a:xfrm>
-            <a:off x="3441044" y="3630000"/>
-            <a:ext cx="408000" cy="340000"/>
-          </a:xfrm>
-          <a:prstGeom prst="roundRect">
-            <a:avLst>
-              <a:gd name="adj" fmla="val 15000"/>
-            </a:avLst>
-          </a:prstGeom>
-          <a:solidFill>
-            <a:srgbClr val="E8963D"/>
-          </a:solidFill>
-          <a:ln>
-            <a:noFill/>
-          </a:ln>
-        </p:spPr>
-        <p:txBody>
-          <a:bodyPr/>
-          <a:lstStyle/>
-          <a:p>
-            <a:endParaRPr lang="fr-FR"/>
-          </a:p>
-        </p:txBody>
-      </p:sp>
-      <p:sp>
-        <p:nvSpPr>
-          <p:cNvPr id="71" name="Text 71"/>
-          <p:cNvSpPr/>
-          <p:nvPr/>
-        </p:nvSpPr>
-        <p:spPr>
-          <a:xfrm>
-            <a:off x="2806044" y="4110000"/>
-            <a:ext cx="1950000" cy="700000"/>
-          </a:xfrm>
-          <a:prstGeom prst="rect">
-            <a:avLst/>
-          </a:prstGeom>
-          <a:noFill/>
-          <a:ln/>
-        </p:spPr>
-        <p:txBody>
-          <a:bodyPr wrap="square" lIns="0" tIns="0" rIns="0" bIns="0" rtlCol="0" anchor="t"/>
-          <a:lstStyle/>
-          <a:p>
-            <a:pPr marL="0" indent="0" algn="ctr">
-              <a:buNone/>
-            </a:pPr>
-            <a:r>
-              <a:rPr lang="fr-FR" sz="1500" b="1" dirty="0">
-                <a:solidFill>
-                  <a:srgbClr val="8B1A2B"/>
-                </a:solidFill>
-                <a:latin typeface="Poppins"/>
-              </a:rPr>
-              <a:t>Pile Orange</a:t>
-            </a:r>
-          </a:p>
-          <a:p>
-            <a:pPr marL="0" indent="0" algn="ctr">
-              <a:buNone/>
-            </a:pPr>
-            <a:r>
-              <a:rPr lang="fr-FR" sz="1500" b="1" dirty="0">
-                <a:solidFill>
-                  <a:srgbClr val="8B1A2B"/>
-                </a:solidFill>
-                <a:latin typeface="Poppins"/>
-              </a:rPr>
-              <a:t>(Moyenne)</a:t>
-            </a:r>
-          </a:p>
-        </p:txBody>
-      </p:sp>
-      <p:sp>
-        <p:nvSpPr>
-          <p:cNvPr id="72" name="Text 72"/>
-          <p:cNvSpPr/>
-          <p:nvPr/>
-        </p:nvSpPr>
-        <p:spPr>
-          <a:xfrm>
-            <a:off x="2836044" y="4890000"/>
-            <a:ext cx="1890000" cy="2860000"/>
-          </a:xfrm>
-          <a:prstGeom prst="rect">
-            <a:avLst/>
-          </a:prstGeom>
-          <a:noFill/>
-          <a:ln/>
-        </p:spPr>
-        <p:txBody>
-          <a:bodyPr wrap="square" lIns="0" tIns="0" rIns="0" bIns="0" rtlCol="0" anchor="t"/>
-          <a:lstStyle/>
-          <a:p>
-            <a:pPr marL="0" indent="0" algn="ctr">
-              <a:buNone/>
-            </a:pPr>
-            <a:r>
-              <a:rPr lang="fr-FR" sz="1150" b="0" dirty="0">
-                <a:solidFill>
-                  <a:srgbClr val="333333"/>
-                </a:solidFill>
-                <a:latin typeface="Poppins"/>
-              </a:rPr>
-              <a:t>Ma batterie baisse un peu... J'ai besoin de faire une pause ou de choisir un jeu calme, comme le dessin.</a:t>
-            </a:r>
-          </a:p>
-        </p:txBody>
-      </p:sp>
-      <p:sp>
-        <p:nvSpPr>
-          <p:cNvPr id="73" name="Card 73"/>
-          <p:cNvSpPr/>
-          <p:nvPr/>
-        </p:nvSpPr>
-        <p:spPr>
-          <a:xfrm>
-            <a:off x="5054888" y="3350000"/>
-            <a:ext cx="2050000" cy="4400000"/>
-          </a:xfrm>
-          <a:prstGeom prst="roundRect">
-            <a:avLst>
-              <a:gd name="adj" fmla="val 6000"/>
-            </a:avLst>
-          </a:prstGeom>
-          <a:solidFill>
-            <a:srgbClr val="FFFFFF"/>
-          </a:solidFill>
-          <a:ln w="12700">
-            <a:solidFill>
-              <a:srgbClr val="8B1A2B">
-                <a:alpha val="15000"/>
-              </a:srgbClr>
-            </a:solidFill>
-          </a:ln>
-          <a:effectLst>
-            <a:outerShdw blurRad="60000" dist="20000" dir="5400000" algn="t" rotWithShape="0">
-              <a:srgbClr val="8B1A2B">
-                <a:alpha val="18000"/>
-              </a:srgbClr>
-            </a:outerShdw>
-          </a:effectLst>
-        </p:spPr>
-        <p:txBody>
-          <a:bodyPr/>
-          <a:lstStyle/>
-          <a:p>
-            <a:endParaRPr lang="fr-FR"/>
-          </a:p>
-        </p:txBody>
-      </p:sp>
-      <p:sp>
-        <p:nvSpPr>
-          <p:cNvPr id="74" name="BattBody 74"/>
-          <p:cNvSpPr/>
-          <p:nvPr/>
-        </p:nvSpPr>
-        <p:spPr>
-          <a:xfrm>
-            <a:off x="5719888" y="3610000"/>
-            <a:ext cx="720000" cy="380000"/>
-          </a:xfrm>
-          <a:prstGeom prst="roundRect">
-            <a:avLst>
-              <a:gd name="adj" fmla="val 15000"/>
-            </a:avLst>
-          </a:prstGeom>
-          <a:noFill/>
-          <a:ln w="28575">
-            <a:solidFill>
-              <a:srgbClr val="8B1A2B"/>
-            </a:solidFill>
-          </a:ln>
-        </p:spPr>
-        <p:txBody>
-          <a:bodyPr/>
-          <a:lstStyle/>
-          <a:p>
-            <a:endParaRPr lang="fr-FR"/>
-          </a:p>
-        </p:txBody>
-      </p:sp>
-      <p:sp>
-        <p:nvSpPr>
-          <p:cNvPr id="75" name="BattNub 75"/>
-          <p:cNvSpPr/>
-          <p:nvPr/>
-        </p:nvSpPr>
-        <p:spPr>
-          <a:xfrm>
-            <a:off x="6439888" y="3740000"/>
-            <a:ext cx="45000" cy="120000"/>
-          </a:xfrm>
-          <a:prstGeom prst="rect">
-            <a:avLst/>
-          </a:prstGeom>
-          <a:solidFill>
-            <a:srgbClr val="8B1A2B"/>
-          </a:solidFill>
-          <a:ln>
-            <a:noFill/>
-          </a:ln>
-        </p:spPr>
-        <p:txBody>
-          <a:bodyPr/>
-          <a:lstStyle/>
-          <a:p>
-            <a:endParaRPr lang="fr-FR"/>
-          </a:p>
-        </p:txBody>
-      </p:sp>
-      <p:sp>
-        <p:nvSpPr>
-          <p:cNvPr id="76" name="BattFill 76"/>
-          <p:cNvSpPr/>
-          <p:nvPr/>
-        </p:nvSpPr>
-        <p:spPr>
-          <a:xfrm>
-            <a:off x="5739888" y="3630000"/>
-            <a:ext cx="170000" cy="340000"/>
-          </a:xfrm>
-          <a:prstGeom prst="roundRect">
-            <a:avLst>
-              <a:gd name="adj" fmla="val 15000"/>
-            </a:avLst>
-          </a:prstGeom>
-          <a:solidFill>
-            <a:srgbClr val="C94F4F"/>
-          </a:solidFill>
-          <a:ln>
-            <a:noFill/>
-          </a:ln>
-        </p:spPr>
-        <p:txBody>
-          <a:bodyPr/>
-          <a:lstStyle/>
-          <a:p>
-            <a:endParaRPr lang="fr-FR"/>
-          </a:p>
-        </p:txBody>
-      </p:sp>
-      <p:sp>
-        <p:nvSpPr>
-          <p:cNvPr id="77" name="Text 77"/>
-          <p:cNvSpPr/>
-          <p:nvPr/>
-        </p:nvSpPr>
-        <p:spPr>
-          <a:xfrm>
-            <a:off x="5104888" y="4110000"/>
-            <a:ext cx="1950000" cy="700000"/>
-          </a:xfrm>
-          <a:prstGeom prst="rect">
-            <a:avLst/>
-          </a:prstGeom>
-          <a:noFill/>
-          <a:ln/>
-        </p:spPr>
-        <p:txBody>
-          <a:bodyPr wrap="square" lIns="0" tIns="0" rIns="0" bIns="0" rtlCol="0" anchor="t"/>
-          <a:lstStyle/>
-          <a:p>
-            <a:pPr marL="0" indent="0" algn="ctr">
-              <a:buNone/>
-            </a:pPr>
-            <a:r>
-              <a:rPr lang="fr-FR" sz="1500" b="1" dirty="0">
-                <a:solidFill>
-                  <a:srgbClr val="8B1A2B"/>
-                </a:solidFill>
-                <a:latin typeface="Poppins"/>
-              </a:rPr>
-              <a:t>Pile Rouge</a:t>
-            </a:r>
-          </a:p>
-          <a:p>
-            <a:pPr marL="0" indent="0" algn="ctr">
-              <a:buNone/>
-            </a:pPr>
-            <a:r>
-              <a:rPr lang="fr-FR" sz="1500" b="1" dirty="0">
-                <a:solidFill>
-                  <a:srgbClr val="8B1A2B"/>
-                </a:solidFill>
-                <a:latin typeface="Poppins"/>
-              </a:rPr>
-              <a:t>(Vide)</a:t>
-            </a:r>
-          </a:p>
-        </p:txBody>
-      </p:sp>
-      <p:sp>
-        <p:nvSpPr>
-          <p:cNvPr id="78" name="Text 78"/>
-          <p:cNvSpPr/>
-          <p:nvPr/>
-        </p:nvSpPr>
-        <p:spPr>
-          <a:xfrm>
-            <a:off x="5134888" y="4890000"/>
-            <a:ext cx="1890000" cy="2860000"/>
-          </a:xfrm>
-          <a:prstGeom prst="rect">
-            <a:avLst/>
-          </a:prstGeom>
-          <a:noFill/>
-          <a:ln/>
-        </p:spPr>
-        <p:txBody>
-          <a:bodyPr wrap="square" lIns="0" tIns="0" rIns="0" bIns="0" rtlCol="0" anchor="t"/>
-          <a:lstStyle/>
-          <a:p>
-            <a:pPr marL="0" indent="0" algn="ctr">
-              <a:buNone/>
-            </a:pPr>
-            <a:r>
-              <a:rPr lang="fr-FR" sz="1150" b="0" dirty="0">
-                <a:solidFill>
-                  <a:srgbClr val="333333"/>
-                </a:solidFill>
-                <a:latin typeface="Poppins"/>
-              </a:rPr>
-              <a:t>Batterie à plat ! Mes alarmes sonnent, j'ai besoin de me reposer pour recharger mon énergie.</a:t>
+              <a:t>Signature du super copain : _________________________</a:t>
             </a:r>
           </a:p>
         </p:txBody>
@@ -3699,7 +3209,7 @@
     <p:bg>
       <p:bgPr>
         <a:blipFill dpi="0" rotWithShape="1">
-          <a:blip r:embed="rId3">
+          <a:blip r:embed="rId2">
             <a:lum/>
           </a:blip>
           <a:srcRect/>
@@ -3757,7 +3267,7 @@
                 <a:ea typeface="Calibri" pitchFamily="34" charset="-122"/>
                 <a:cs typeface="Calibri" pitchFamily="34" charset="-120"/>
               </a:rPr>
-              <a:t>Mes équipements de Super-Héros !</a:t>
+              <a:t>À toi de créer ton propre Super-Héros !</a:t>
             </a:r>
             <a:endParaRPr lang="fr-FR" sz="2800" dirty="0"/>
           </a:p>
@@ -3816,7 +3326,7 @@
           <p:nvPr/>
         </p:nvPicPr>
         <p:blipFill rotWithShape="1">
-          <a:blip r:embed="rId5"/>
+          <a:blip r:embed="rId3"/>
           <a:srcRect l="9802" t="10888" r="15836" b="19876"/>
           <a:stretch/>
         </p:blipFill>
@@ -3838,8 +3348,8 @@
         </p:nvSpPr>
         <p:spPr>
           <a:xfrm>
-            <a:off x="457200" y="1080000"/>
-            <a:ext cx="6647688" cy="750000"/>
+            <a:off x="457200" y="1351310"/>
+            <a:ext cx="6647688" cy="1650000"/>
           </a:xfrm>
           <a:prstGeom prst="rect">
             <a:avLst/>
@@ -3855,65 +3365,121 @@
               <a:buNone/>
             </a:pPr>
             <a:r>
-              <a:rPr lang="fr-FR" sz="2000" b="0" dirty="0">
+              <a:rPr lang="fr-FR" sz="2400" b="0" dirty="0">
                 <a:solidFill>
                   <a:srgbClr val="333333"/>
                 </a:solidFill>
                 <a:latin typeface="Poppins"/>
               </a:rPr>
-              <a:t>Pour aider notre colle spéciale, nous avons des supers outils. Ce sont des aides précieuses pour notre corps !</a:t>
-            </a:r>
+              <a:t>Tu as découvert le secret de la colle magique et tu as appris à écouter ta grande batterie. Tu sais quoi ? Gérer tout ça tous les jours fait de toi un vrai super-héros !</a:t>
+            </a:r>
+          </a:p>
+        </p:txBody>
+      </p:sp>
+      <p:sp>
+        <p:nvSpPr>
+          <p:cNvPr id="51" name="Text 51"/>
+          <p:cNvSpPr/>
+          <p:nvPr/>
+        </p:nvSpPr>
+        <p:spPr>
+          <a:xfrm>
+            <a:off x="500000" y="3213148"/>
+            <a:ext cx="6647688" cy="1100000"/>
+          </a:xfrm>
+          <a:prstGeom prst="rect">
+            <a:avLst/>
+          </a:prstGeom>
+          <a:noFill/>
+          <a:ln/>
+        </p:spPr>
+        <p:txBody>
+          <a:bodyPr wrap="square" lIns="0" tIns="0" rIns="0" bIns="0" rtlCol="0" anchor="t"/>
+          <a:lstStyle/>
+          <a:p>
+            <a:pPr marL="0" indent="0" algn="ctr">
+              <a:buNone/>
+            </a:pPr>
+            <a:r>
+              <a:rPr lang="fr-FR" sz="2400" b="0" dirty="0">
+                <a:solidFill>
+                  <a:srgbClr val="333333"/>
+                </a:solidFill>
+                <a:latin typeface="Poppins"/>
+              </a:rPr>
+              <a:t>À quoi ressemble ton costume ? Dessine-toi en super-héros ou colorie la silhouette ci-dessous. N'oublie pas de choisir tes couleurs préférées et de rajouter tes supers outils pour t'aider !</a:t>
+            </a:r>
+          </a:p>
+        </p:txBody>
+      </p:sp>
+      <p:sp>
+        <p:nvSpPr>
+          <p:cNvPr id="60" name="DrawBox"/>
+          <p:cNvSpPr/>
+          <p:nvPr/>
+        </p:nvSpPr>
+        <p:spPr>
+          <a:xfrm>
+            <a:off x="1781425" y="5034614"/>
+            <a:ext cx="4000000" cy="4378119"/>
+          </a:xfrm>
+          <a:prstGeom prst="roundRect">
+            <a:avLst>
+              <a:gd name="adj" fmla="val 4000"/>
+            </a:avLst>
+          </a:prstGeom>
+          <a:solidFill>
+            <a:srgbClr val="FFFFFF"/>
+          </a:solidFill>
+          <a:ln w="28575">
+            <a:solidFill>
+              <a:srgbClr val="E8963D"/>
+            </a:solidFill>
+            <a:prstDash val="dash"/>
+          </a:ln>
+        </p:spPr>
+        <p:txBody>
+          <a:bodyPr/>
+          <a:lstStyle/>
+          <a:p>
+            <a:endParaRPr lang="fr-FR"/>
           </a:p>
         </p:txBody>
       </p:sp>
       <p:pic>
         <p:nvPicPr>
-          <p:cNvPr id="71" name="Equip 71"/>
+          <p:cNvPr id="90" name="Silhouette"/>
           <p:cNvPicPr>
             <a:picLocks noChangeAspect="1"/>
           </p:cNvPicPr>
           <p:nvPr/>
         </p:nvPicPr>
         <p:blipFill>
-          <a:blip r:embed="rId7"/>
+          <a:blip r:embed="rId4"/>
           <a:stretch>
             <a:fillRect/>
           </a:stretch>
         </p:blipFill>
         <p:spPr>
           <a:xfrm>
-            <a:off x="457200" y="2400000"/>
-            <a:ext cx="1050000" cy="1050000"/>
-          </a:xfrm>
-          <a:prstGeom prst="ellipse">
-            <a:avLst/>
-          </a:prstGeom>
-          <a:ln w="19050">
-            <a:solidFill>
-              <a:srgbClr val="8B1A2B">
-                <a:alpha val="30000"/>
-              </a:srgbClr>
-            </a:solidFill>
-          </a:ln>
-          <a:effectLst>
-            <a:outerShdw blurRad="50000" dist="20000" dir="5400000" algn="t" rotWithShape="0">
-              <a:srgbClr val="8B1A2B">
-                <a:alpha val="20000"/>
-              </a:srgbClr>
-            </a:outerShdw>
-          </a:effectLst>
+            <a:off x="2081044" y="5458290"/>
+            <a:ext cx="3400000" cy="3530769"/>
+          </a:xfrm>
+          <a:prstGeom prst="rect">
+            <a:avLst/>
+          </a:prstGeom>
         </p:spPr>
       </p:pic>
       <p:sp>
         <p:nvSpPr>
-          <p:cNvPr id="72" name="Text 72"/>
-          <p:cNvSpPr/>
-          <p:nvPr/>
-        </p:nvSpPr>
-        <p:spPr>
-          <a:xfrm>
-            <a:off x="1787200" y="2050000"/>
-            <a:ext cx="5317688" cy="1750000"/>
+          <p:cNvPr id="80" name="Text 80"/>
+          <p:cNvSpPr/>
+          <p:nvPr/>
+        </p:nvSpPr>
+        <p:spPr>
+          <a:xfrm>
+            <a:off x="1781425" y="9600000"/>
+            <a:ext cx="4000000" cy="400000"/>
           </a:xfrm>
           <a:prstGeom prst="rect">
             <a:avLst/>
@@ -3925,300 +3491,17 @@
           <a:bodyPr wrap="square" lIns="0" tIns="0" rIns="0" bIns="0" rtlCol="0" anchor="t"/>
           <a:lstStyle/>
           <a:p>
-            <a:pPr marL="0" indent="0" algn="l">
+            <a:pPr marL="0" indent="0" algn="ctr">
               <a:buNone/>
             </a:pPr>
             <a:r>
-              <a:rPr lang="fr-FR" sz="1900" b="1" dirty="0">
-                <a:solidFill>
-                  <a:srgbClr val="8B1A2B"/>
+              <a:rPr lang="fr-FR" sz="1400" b="0" i="1" dirty="0">
+                <a:solidFill>
+                  <a:srgbClr val="999999"/>
                 </a:solidFill>
                 <a:latin typeface="Poppins"/>
               </a:rPr>
-              <a:t>Les Boucliers Magiques </a:t>
-            </a:r>
-            <a:r>
-              <a:rPr lang="fr-FR" sz="1900" b="0" dirty="0">
-                <a:solidFill>
-                  <a:srgbClr val="8B1A2B"/>
-                </a:solidFill>
-                <a:latin typeface="Poppins"/>
-              </a:rPr>
-              <a:t>(les attelles)</a:t>
-            </a:r>
-          </a:p>
-        </p:txBody>
-      </p:sp>
-      <p:sp>
-        <p:nvSpPr>
-          <p:cNvPr id="73" name="Text 73"/>
-          <p:cNvSpPr/>
-          <p:nvPr/>
-        </p:nvSpPr>
-        <p:spPr>
-          <a:xfrm>
-            <a:off x="1787200" y="2600000"/>
-            <a:ext cx="5317688" cy="1200000"/>
-          </a:xfrm>
-          <a:prstGeom prst="rect">
-            <a:avLst/>
-          </a:prstGeom>
-          <a:noFill/>
-          <a:ln/>
-        </p:spPr>
-        <p:txBody>
-          <a:bodyPr wrap="square" lIns="0" tIns="0" rIns="0" bIns="0" rtlCol="0" anchor="t"/>
-          <a:lstStyle/>
-          <a:p>
-            <a:pPr marL="0" indent="0" algn="l">
-              <a:buNone/>
-            </a:pPr>
-            <a:r>
-              <a:rPr lang="fr-FR" sz="1500" b="0" dirty="0">
-                <a:solidFill>
-                  <a:srgbClr val="333333"/>
-                </a:solidFill>
-                <a:latin typeface="Poppins"/>
-              </a:rPr>
-              <a:t>Ils protègent les articulations pour qu'elles restent bien en place et ne fassent pas de bêtises.</a:t>
-            </a:r>
-          </a:p>
-        </p:txBody>
-      </p:sp>
-      <p:pic>
-        <p:nvPicPr>
-          <p:cNvPr id="74" name="Equip 74"/>
-          <p:cNvPicPr>
-            <a:picLocks noChangeAspect="1"/>
-          </p:cNvPicPr>
-          <p:nvPr/>
-        </p:nvPicPr>
-        <p:blipFill>
-          <a:blip r:embed="rId8"/>
-          <a:stretch>
-            <a:fillRect/>
-          </a:stretch>
-        </p:blipFill>
-        <p:spPr>
-          <a:xfrm>
-            <a:off x="457200" y="4370000"/>
-            <a:ext cx="1050000" cy="1050000"/>
-          </a:xfrm>
-          <a:prstGeom prst="ellipse">
-            <a:avLst/>
-          </a:prstGeom>
-          <a:ln w="19050">
-            <a:solidFill>
-              <a:srgbClr val="8B1A2B">
-                <a:alpha val="30000"/>
-              </a:srgbClr>
-            </a:solidFill>
-          </a:ln>
-          <a:effectLst>
-            <a:outerShdw blurRad="50000" dist="20000" dir="5400000" algn="t" rotWithShape="0">
-              <a:srgbClr val="8B1A2B">
-                <a:alpha val="20000"/>
-              </a:srgbClr>
-            </a:outerShdw>
-          </a:effectLst>
-        </p:spPr>
-      </p:pic>
-      <p:sp>
-        <p:nvSpPr>
-          <p:cNvPr id="75" name="Text 75"/>
-          <p:cNvSpPr/>
-          <p:nvPr/>
-        </p:nvSpPr>
-        <p:spPr>
-          <a:xfrm>
-            <a:off x="1787200" y="4020000"/>
-            <a:ext cx="5317688" cy="1750000"/>
-          </a:xfrm>
-          <a:prstGeom prst="rect">
-            <a:avLst/>
-          </a:prstGeom>
-          <a:noFill/>
-          <a:ln/>
-        </p:spPr>
-        <p:txBody>
-          <a:bodyPr wrap="square" lIns="0" tIns="0" rIns="0" bIns="0" rtlCol="0" anchor="t"/>
-          <a:lstStyle/>
-          <a:p>
-            <a:pPr marL="0" indent="0" algn="l">
-              <a:buNone/>
-            </a:pPr>
-            <a:r>
-              <a:rPr lang="fr-FR" sz="1900" b="1" dirty="0">
-                <a:solidFill>
-                  <a:srgbClr val="8B1A2B"/>
-                </a:solidFill>
-                <a:latin typeface="Poppins"/>
-              </a:rPr>
-              <a:t>L'Armure Secrète </a:t>
-            </a:r>
-            <a:r>
-              <a:rPr lang="fr-FR" sz="1900" b="0" dirty="0">
-                <a:solidFill>
-                  <a:srgbClr val="8B1A2B"/>
-                </a:solidFill>
-                <a:latin typeface="Poppins"/>
-              </a:rPr>
-              <a:t>(les vêtements de compression)</a:t>
-            </a:r>
-          </a:p>
-        </p:txBody>
-      </p:sp>
-      <p:sp>
-        <p:nvSpPr>
-          <p:cNvPr id="76" name="Text 76"/>
-          <p:cNvSpPr/>
-          <p:nvPr/>
-        </p:nvSpPr>
-        <p:spPr>
-          <a:xfrm>
-            <a:off x="1787200" y="4570000"/>
-            <a:ext cx="5317688" cy="1200000"/>
-          </a:xfrm>
-          <a:prstGeom prst="rect">
-            <a:avLst/>
-          </a:prstGeom>
-          <a:noFill/>
-          <a:ln/>
-        </p:spPr>
-        <p:txBody>
-          <a:bodyPr wrap="square" lIns="0" tIns="0" rIns="0" bIns="0" rtlCol="0" anchor="t"/>
-          <a:lstStyle/>
-          <a:p>
-            <a:pPr marL="0" indent="0" algn="l">
-              <a:buNone/>
-            </a:pPr>
-            <a:r>
-              <a:rPr lang="fr-FR" sz="1500" b="0" dirty="0">
-                <a:solidFill>
-                  <a:srgbClr val="333333"/>
-                </a:solidFill>
-                <a:latin typeface="Poppins"/>
-              </a:rPr>
-              <a:t>Elle serre un petit peu, comme un gros câlin, pour aider le corps à se tenir bien droit et à moins se fatiguer.</a:t>
-            </a:r>
-          </a:p>
-        </p:txBody>
-      </p:sp>
-      <p:pic>
-        <p:nvPicPr>
-          <p:cNvPr id="77" name="Equip 77"/>
-          <p:cNvPicPr>
-            <a:picLocks noChangeAspect="1"/>
-          </p:cNvPicPr>
-          <p:nvPr/>
-        </p:nvPicPr>
-        <p:blipFill>
-          <a:blip r:embed="rId9"/>
-          <a:stretch>
-            <a:fillRect/>
-          </a:stretch>
-        </p:blipFill>
-        <p:spPr>
-          <a:xfrm>
-            <a:off x="457200" y="6340000"/>
-            <a:ext cx="1050000" cy="1050000"/>
-          </a:xfrm>
-          <a:prstGeom prst="ellipse">
-            <a:avLst/>
-          </a:prstGeom>
-          <a:ln w="19050">
-            <a:solidFill>
-              <a:srgbClr val="8B1A2B">
-                <a:alpha val="30000"/>
-              </a:srgbClr>
-            </a:solidFill>
-          </a:ln>
-          <a:effectLst>
-            <a:outerShdw blurRad="50000" dist="20000" dir="5400000" algn="t" rotWithShape="0">
-              <a:srgbClr val="8B1A2B">
-                <a:alpha val="20000"/>
-              </a:srgbClr>
-            </a:outerShdw>
-          </a:effectLst>
-        </p:spPr>
-      </p:pic>
-      <p:sp>
-        <p:nvSpPr>
-          <p:cNvPr id="78" name="Text 78"/>
-          <p:cNvSpPr/>
-          <p:nvPr/>
-        </p:nvSpPr>
-        <p:spPr>
-          <a:xfrm>
-            <a:off x="1787200" y="5990000"/>
-            <a:ext cx="5317688" cy="1750000"/>
-          </a:xfrm>
-          <a:prstGeom prst="rect">
-            <a:avLst/>
-          </a:prstGeom>
-          <a:noFill/>
-          <a:ln/>
-        </p:spPr>
-        <p:txBody>
-          <a:bodyPr wrap="square" lIns="0" tIns="0" rIns="0" bIns="0" rtlCol="0" anchor="t"/>
-          <a:lstStyle/>
-          <a:p>
-            <a:pPr marL="0" indent="0" algn="l">
-              <a:buNone/>
-            </a:pPr>
-            <a:r>
-              <a:rPr lang="fr-FR" sz="1900" b="1" dirty="0">
-                <a:solidFill>
-                  <a:srgbClr val="8B1A2B"/>
-                </a:solidFill>
-                <a:latin typeface="Poppins"/>
-              </a:rPr>
-              <a:t>Les Super-Propulseurs </a:t>
-            </a:r>
-            <a:r>
-              <a:rPr lang="fr-FR" sz="1900" b="0" dirty="0">
-                <a:solidFill>
-                  <a:srgbClr val="8B1A2B"/>
-                </a:solidFill>
-                <a:latin typeface="Poppins"/>
-              </a:rPr>
-              <a:t>(les béquilles ou le fauteuil)</a:t>
-            </a:r>
-          </a:p>
-        </p:txBody>
-      </p:sp>
-      <p:sp>
-        <p:nvSpPr>
-          <p:cNvPr id="79" name="Text 79"/>
-          <p:cNvSpPr/>
-          <p:nvPr/>
-        </p:nvSpPr>
-        <p:spPr>
-          <a:xfrm>
-            <a:off x="1787200" y="6540000"/>
-            <a:ext cx="5317688" cy="1200000"/>
-          </a:xfrm>
-          <a:prstGeom prst="rect">
-            <a:avLst/>
-          </a:prstGeom>
-          <a:noFill/>
-          <a:ln/>
-        </p:spPr>
-        <p:txBody>
-          <a:bodyPr wrap="square" lIns="0" tIns="0" rIns="0" bIns="0" rtlCol="0" anchor="t"/>
-          <a:lstStyle/>
-          <a:p>
-            <a:pPr marL="0" indent="0" algn="l">
-              <a:buNone/>
-            </a:pPr>
-            <a:r>
-              <a:rPr lang="fr-FR" sz="1500" b="0" dirty="0">
-                <a:solidFill>
-                  <a:srgbClr val="333333"/>
-                </a:solidFill>
-                <a:latin typeface="Poppins"/>
-              </a:rPr>
-              <a:t>Quand les jambes n'ont plus de batterie, ils nous aident à avancer et à nous reposer en même temps !</a:t>
+              <a:t>Dessine-toi ici !</a:t>
             </a:r>
           </a:p>
         </p:txBody>
@@ -4233,11 +3516,11 @@
 
 <file path=ppt/slides/slide12.xml><?xml version="1.0" encoding="utf-8"?>
 <p:sld xmlns:a="http://schemas.openxmlformats.org/drawingml/2006/main" xmlns:r="http://schemas.openxmlformats.org/officeDocument/2006/relationships" xmlns:p="http://schemas.openxmlformats.org/presentationml/2006/main">
-  <p:cSld name="Slide 2">
+  <p:cSld name="Slide 7">
     <p:bg>
       <p:bgPr>
         <a:blipFill dpi="0" rotWithShape="1">
-          <a:blip r:embed="rId3">
+          <a:blip r:embed="rId2">
             <a:lum/>
           </a:blip>
           <a:srcRect/>
@@ -4270,8 +3553,8 @@
         </p:nvSpPr>
         <p:spPr>
           <a:xfrm>
-            <a:off x="457200" y="365760"/>
-            <a:ext cx="6647688" cy="640080"/>
+            <a:off x="457200" y="360000"/>
+            <a:ext cx="6647688" cy="648000"/>
           </a:xfrm>
           <a:prstGeom prst="rect">
             <a:avLst/>
@@ -4287,7 +3570,7 @@
               <a:buNone/>
             </a:pPr>
             <a:r>
-              <a:rPr lang="fr-FR" sz="2800" b="1" dirty="0">
+              <a:rPr lang="en-US" sz="3000" b="1">
                 <a:solidFill>
                   <a:srgbClr val="8B1A2B"/>
                 </a:solidFill>
@@ -4295,9 +3578,9 @@
                 <a:ea typeface="Calibri" pitchFamily="34" charset="-122"/>
                 <a:cs typeface="Calibri" pitchFamily="34" charset="-120"/>
               </a:rPr>
-              <a:t>Le Pacte des Supers Copains !</a:t>
-            </a:r>
-            <a:endParaRPr lang="fr-FR" sz="2800" dirty="0"/>
+              <a:t>Pour tes parents</a:t>
+            </a:r>
+            <a:endParaRPr lang="en-US" sz="3000"/>
           </a:p>
         </p:txBody>
       </p:sp>
@@ -4341,10 +3624,10 @@
       </p:sp>
       <p:pic>
         <p:nvPicPr>
-          <p:cNvPr id="9" name="Image 8">
+          <p:cNvPr id="8" name="Image 7">
             <a:extLst>
               <a:ext uri="{FF2B5EF4-FFF2-40B4-BE49-F238E27FC236}">
-                <a16:creationId xmlns:a16="http://schemas.microsoft.com/office/drawing/2014/main" id="{1272B92B-21E4-464F-9F8E-4A62B1E16185}"/>
+                <a16:creationId xmlns:a16="http://schemas.microsoft.com/office/drawing/2014/main" id="{21E0B056-8D9F-8042-A02E-B988B66CF19F}"/>
               </a:ext>
             </a:extLst>
           </p:cNvPr>
@@ -4354,7 +3637,7 @@
           <p:nvPr/>
         </p:nvPicPr>
         <p:blipFill rotWithShape="1">
-          <a:blip r:embed="rId5"/>
+          <a:blip r:embed="rId3"/>
           <a:srcRect l="9802" t="10888" r="15836" b="19876"/>
           <a:stretch/>
         </p:blipFill>
@@ -4370,942 +3653,93 @@
       </p:pic>
       <p:sp>
         <p:nvSpPr>
-          <p:cNvPr id="50" name="Text 50"/>
-          <p:cNvSpPr/>
-          <p:nvPr/>
-        </p:nvSpPr>
-        <p:spPr>
-          <a:xfrm>
-            <a:off x="457200" y="1080000"/>
-            <a:ext cx="6647688" cy="1300000"/>
-          </a:xfrm>
-          <a:prstGeom prst="rect">
-            <a:avLst/>
-          </a:prstGeom>
-          <a:noFill/>
-          <a:ln/>
-        </p:spPr>
-        <p:txBody>
-          <a:bodyPr wrap="square" lIns="0" tIns="0" rIns="0" bIns="0" rtlCol="0" anchor="t"/>
-          <a:lstStyle/>
-          <a:p>
-            <a:pPr marL="0" indent="0" algn="ctr">
-              <a:buNone/>
+          <p:cNvPr id="6" name="Rectangle 5"/>
+          <p:cNvSpPr/>
+          <p:nvPr/>
+        </p:nvSpPr>
+        <p:spPr>
+          <a:xfrm>
+            <a:off x="1281425" y="4200000"/>
+            <a:ext cx="5000000" cy="2400000"/>
+          </a:xfrm>
+          <a:prstGeom prst="rect">
+            <a:avLst/>
+          </a:prstGeom>
+        </p:spPr>
+        <p:txBody>
+          <a:bodyPr>
+            <a:spAutoFit/>
+          </a:bodyPr>
+          <a:lstStyle/>
+          <a:p>
+            <a:pPr algn="ctr">
+              <a:spcBef>
+                <a:spcPts val="300"/>
+              </a:spcBef>
             </a:pPr>
             <a:r>
-              <a:rPr lang="fr-FR" sz="1800" b="0" dirty="0">
-                <a:solidFill>
-                  <a:srgbClr val="333333"/>
+              <a:rPr lang="fr-FR" sz="2400" dirty="0">
+                <a:solidFill>
+                  <a:srgbClr val="666666"/>
                 </a:solidFill>
                 <a:latin typeface="Poppins"/>
               </a:rPr>
-              <a:t>Ton copain avec le SED a une colle spéciale qui le rend plus fragile. Ce n'est pas de sa faute, et il a besoin de ta gentillesse ! Pas besoin de se pousser pour bien rigoler !</a:t>
-            </a:r>
-          </a:p>
-        </p:txBody>
-      </p:sp>
-      <p:sp>
-        <p:nvSpPr>
-          <p:cNvPr id="51" name="DiplomaBox"/>
-          <p:cNvSpPr/>
-          <p:nvPr/>
-        </p:nvSpPr>
-        <p:spPr>
-          <a:xfrm>
-            <a:off x="650000" y="2550000"/>
-            <a:ext cx="6262850" cy="7250000"/>
-          </a:xfrm>
-          <a:prstGeom prst="roundRect">
-            <a:avLst>
-              <a:gd name="adj" fmla="val 3500"/>
-            </a:avLst>
-          </a:prstGeom>
-          <a:solidFill>
-            <a:srgbClr val="FFFFFF"/>
-          </a:solidFill>
-          <a:ln w="34925" cmpd="dbl">
-            <a:solidFill>
-              <a:srgbClr val="8B1A2B"/>
-            </a:solidFill>
-          </a:ln>
-        </p:spPr>
-        <p:txBody>
-          <a:bodyPr/>
-          <a:lstStyle/>
-          <a:p>
-            <a:endParaRPr lang="fr-FR"/>
-          </a:p>
-        </p:txBody>
-      </p:sp>
-      <p:pic>
-        <p:nvPicPr>
-          <p:cNvPr id="52" name="Badge"/>
-          <p:cNvPicPr>
-            <a:picLocks noChangeAspect="1"/>
-          </p:cNvPicPr>
-          <p:nvPr/>
-        </p:nvPicPr>
-        <p:blipFill>
-          <a:blip r:embed="rId4"/>
-          <a:stretch>
-            <a:fillRect/>
-          </a:stretch>
-        </p:blipFill>
-        <p:spPr>
-          <a:xfrm>
-            <a:off x="3331425" y="2850000"/>
-            <a:ext cx="900000" cy="900000"/>
-          </a:xfrm>
-          <a:prstGeom prst="rect">
-            <a:avLst/>
-          </a:prstGeom>
-        </p:spPr>
-      </p:pic>
-      <p:sp>
-        <p:nvSpPr>
-          <p:cNvPr id="53" name="Text 53"/>
-          <p:cNvSpPr/>
-          <p:nvPr/>
-        </p:nvSpPr>
-        <p:spPr>
-          <a:xfrm>
-            <a:off x="950000" y="3970000"/>
-            <a:ext cx="5662850" cy="500000"/>
-          </a:xfrm>
-          <a:prstGeom prst="rect">
-            <a:avLst/>
-          </a:prstGeom>
-          <a:noFill/>
-          <a:ln/>
-        </p:spPr>
-        <p:txBody>
-          <a:bodyPr wrap="square" lIns="0" tIns="0" rIns="0" bIns="0" rtlCol="0" anchor="t"/>
-          <a:lstStyle/>
-          <a:p>
-            <a:pPr marL="0" indent="0" algn="ctr">
-              <a:buNone/>
-            </a:pPr>
-            <a:r>
-              <a:rPr lang="fr-FR" sz="1800" b="1" dirty="0">
-                <a:solidFill>
-                  <a:srgbClr val="8B1A2B"/>
+              <a:t>Site internet : </a:t>
+            </a:r>
+            <a:r>
+              <a:rPr lang="fr-FR" sz="2400" dirty="0" err="1">
+                <a:solidFill>
+                  <a:srgbClr val="666666"/>
                 </a:solidFill>
                 <a:latin typeface="Poppins"/>
               </a:rPr>
-              <a:t>En signant ce diplôme de Super Copain, je m'engage à :</a:t>
-            </a:r>
-          </a:p>
-        </p:txBody>
-      </p:sp>
-      <p:sp>
-        <p:nvSpPr>
-          <p:cNvPr id="54" name="Bullets 54"/>
-          <p:cNvSpPr/>
-          <p:nvPr/>
-        </p:nvSpPr>
-        <p:spPr>
-          <a:xfrm>
-            <a:off x="1200000" y="4570000"/>
-            <a:ext cx="5162850" cy="3200000"/>
-          </a:xfrm>
-          <a:prstGeom prst="rect">
-            <a:avLst/>
-          </a:prstGeom>
-          <a:noFill/>
-          <a:ln/>
-        </p:spPr>
-        <p:txBody>
-          <a:bodyPr wrap="square" lIns="0" tIns="0" rIns="0" bIns="0" rtlCol="0" anchor="t"/>
-          <a:lstStyle/>
-          <a:p>
-            <a:pPr marL="342900" indent="-342900">
-              <a:buFont typeface="Arial"/>
-              <a:buChar char="•"/>
-            </a:pPr>
-            <a:r>
-              <a:rPr lang="fr-FR" sz="1700" dirty="0">
-                <a:solidFill>
-                  <a:srgbClr val="333333"/>
+              <a:t>www.sedocc.fr</a:t>
+            </a:r>
+            <a:endParaRPr lang="fr-FR" sz="2400" dirty="0">
+              <a:solidFill>
+                <a:srgbClr val="666666"/>
+              </a:solidFill>
+              <a:latin typeface="Poppins"/>
+            </a:endParaRPr>
+          </a:p>
+          <a:p>
+            <a:pPr algn="ctr"/>
+            <a:r>
+              <a:rPr lang="fr-FR" sz="2400" dirty="0">
+                <a:solidFill>
+                  <a:srgbClr val="666666"/>
                 </a:solidFill>
                 <a:latin typeface="Poppins"/>
               </a:rPr>
-              <a:t>Écouter mon copain s'il me dit que sa batterie est à plat.</a:t>
-            </a:r>
-          </a:p>
-          <a:p>
-            <a:pPr marL="342900" indent="-342900">
-              <a:buFont typeface="Arial"/>
-              <a:buChar char="•"/>
-            </a:pPr>
-            <a:r>
-              <a:rPr lang="fr-FR" sz="1700" dirty="0">
-                <a:solidFill>
-                  <a:srgbClr val="333333"/>
+              <a:t>Email : Sedocc31@gmail.com</a:t>
+            </a:r>
+          </a:p>
+          <a:p>
+            <a:pPr algn="ctr"/>
+            <a:r>
+              <a:rPr lang="fr-FR" sz="2400" dirty="0">
+                <a:solidFill>
+                  <a:srgbClr val="666666"/>
                 </a:solidFill>
                 <a:latin typeface="Poppins"/>
               </a:rPr>
-              <a:t>Choisir des jeux sans bousculade ensemble avec lui (comme la marelle, les jeux de société, inventer des histoires...).</a:t>
-            </a:r>
-          </a:p>
-          <a:p>
-            <a:pPr marL="342900" indent="-342900">
-              <a:buFont typeface="Arial"/>
-              <a:buChar char="•"/>
-            </a:pPr>
-            <a:r>
-              <a:rPr lang="fr-FR" sz="1700" dirty="0">
-                <a:solidFill>
-                  <a:srgbClr val="333333"/>
+              <a:t>Facebook : </a:t>
+            </a:r>
+            <a:r>
+              <a:rPr lang="fr-FR" sz="2400" dirty="0" err="1">
+                <a:solidFill>
+                  <a:srgbClr val="666666"/>
                 </a:solidFill>
                 <a:latin typeface="Poppins"/>
               </a:rPr>
-              <a:t>Me rappeler que même si sa colle est différente, ensemble, on est plus forts !</a:t>
-            </a:r>
-          </a:p>
-        </p:txBody>
-      </p:sp>
-      <p:sp>
-        <p:nvSpPr>
-          <p:cNvPr id="55" name="Text 55"/>
-          <p:cNvSpPr/>
-          <p:nvPr/>
-        </p:nvSpPr>
-        <p:spPr>
-          <a:xfrm>
-            <a:off x="950000" y="8700000"/>
-            <a:ext cx="5662850" cy="700000"/>
-          </a:xfrm>
-          <a:prstGeom prst="rect">
-            <a:avLst/>
-          </a:prstGeom>
-          <a:noFill/>
-          <a:ln/>
-        </p:spPr>
-        <p:txBody>
-          <a:bodyPr wrap="square" lIns="0" tIns="0" rIns="0" bIns="0" rtlCol="0" anchor="t"/>
-          <a:lstStyle/>
-          <a:p>
-            <a:pPr marL="0" indent="0" algn="ctr">
-              <a:buNone/>
-            </a:pPr>
-            <a:r>
-              <a:rPr lang="fr-FR" sz="1700" b="1" dirty="0">
-                <a:solidFill>
-                  <a:srgbClr val="8B1A2B"/>
-                </a:solidFill>
-                <a:latin typeface="Poppins"/>
-              </a:rPr>
-              <a:t>Signature du super copain : _________________________</a:t>
-            </a:r>
-          </a:p>
-        </p:txBody>
-      </p:sp>
-    </p:spTree>
-  </p:cSld>
-  <p:clrMapOvr>
-    <a:masterClrMapping/>
-  </p:clrMapOvr>
-</p:sld>
-</file>
-
-<file path=ppt/slides/slide13.xml><?xml version="1.0" encoding="utf-8"?>
-<p:sld xmlns:a="http://schemas.openxmlformats.org/drawingml/2006/main" xmlns:r="http://schemas.openxmlformats.org/officeDocument/2006/relationships" xmlns:p="http://schemas.openxmlformats.org/presentationml/2006/main">
-  <p:cSld name="Slide 2">
-    <p:bg>
-      <p:bgPr>
-        <a:blipFill dpi="0" rotWithShape="1">
-          <a:blip r:embed="rId3">
-            <a:lum/>
-          </a:blip>
-          <a:srcRect/>
-          <a:stretch>
-            <a:fillRect/>
-          </a:stretch>
-        </a:blipFill>
-        <a:effectLst/>
-      </p:bgPr>
-    </p:bg>
-    <p:spTree>
-      <p:nvGrpSpPr>
-        <p:cNvPr id="1" name=""/>
-        <p:cNvGrpSpPr/>
-        <p:nvPr/>
-      </p:nvGrpSpPr>
-      <p:grpSpPr>
-        <a:xfrm>
-          <a:off x="0" y="0"/>
-          <a:ext cx="0" cy="0"/>
-          <a:chOff x="0" y="0"/>
-          <a:chExt cx="0" cy="0"/>
-        </a:xfrm>
-      </p:grpSpPr>
-      <p:sp>
-        <p:nvSpPr>
-          <p:cNvPr id="2" name="Text 0"/>
-          <p:cNvSpPr/>
-          <p:nvPr/>
-        </p:nvSpPr>
-        <p:spPr>
-          <a:xfrm>
-            <a:off x="457200" y="365760"/>
-            <a:ext cx="6647688" cy="640080"/>
-          </a:xfrm>
-          <a:prstGeom prst="rect">
-            <a:avLst/>
-          </a:prstGeom>
-          <a:noFill/>
-          <a:ln/>
-        </p:spPr>
-        <p:txBody>
-          <a:bodyPr wrap="square" lIns="0" tIns="0" rIns="0" bIns="0" rtlCol="0" anchor="ctr"/>
-          <a:lstStyle/>
-          <a:p>
-            <a:pPr marL="0" indent="0" algn="ctr">
-              <a:buNone/>
-            </a:pPr>
-            <a:r>
-              <a:rPr lang="fr-FR" sz="2800" b="1" dirty="0">
-                <a:solidFill>
-                  <a:srgbClr val="8B1A2B"/>
-                </a:solidFill>
-                <a:latin typeface="Poppins" pitchFamily="34" charset="0"/>
-                <a:ea typeface="Calibri" pitchFamily="34" charset="-122"/>
-                <a:cs typeface="Calibri" pitchFamily="34" charset="-120"/>
-              </a:rPr>
-              <a:t>À toi de créer ton propre Super-Héros !</a:t>
-            </a:r>
-            <a:endParaRPr lang="fr-FR" sz="2800" dirty="0"/>
-          </a:p>
-        </p:txBody>
-      </p:sp>
-      <p:sp>
-        <p:nvSpPr>
-          <p:cNvPr id="99" name="Footer"/>
-          <p:cNvSpPr/>
-          <p:nvPr/>
-        </p:nvSpPr>
-        <p:spPr>
-          <a:xfrm>
-            <a:off x="500000" y="10300000"/>
-            <a:ext cx="6562850" cy="300000"/>
-          </a:xfrm>
-          <a:prstGeom prst="rect">
-            <a:avLst/>
-          </a:prstGeom>
-          <a:noFill/>
-          <a:ln/>
-        </p:spPr>
-        <p:txBody>
-          <a:bodyPr wrap="square" lIns="0" tIns="0" rIns="0" bIns="0" rtlCol="0" anchor="ctr"/>
-          <a:lstStyle/>
-          <a:p>
-            <a:pPr marL="0" indent="0" algn="ctr">
-              <a:buNone/>
-            </a:pPr>
-            <a:r>
-              <a:rPr lang="fr-FR" sz="1000" i="1">
-                <a:solidFill>
-                  <a:srgbClr val="666666"/>
-                </a:solidFill>
-                <a:latin typeface="Poppins" pitchFamily="34" charset="0"/>
-                <a:ea typeface="Calibri" pitchFamily="34" charset="0"/>
-                <a:cs typeface="Calibri" pitchFamily="34" charset="0"/>
-              </a:rPr>
-              <a:t>Fait par l’association Sed’Occ France 04/2026</a:t>
-            </a:r>
-          </a:p>
-        </p:txBody>
-      </p:sp>
-      <p:pic>
-        <p:nvPicPr>
-          <p:cNvPr id="9" name="Image 8">
-            <a:extLst>
-              <a:ext uri="{FF2B5EF4-FFF2-40B4-BE49-F238E27FC236}">
-                <a16:creationId xmlns:a16="http://schemas.microsoft.com/office/drawing/2014/main" id="{1272B92B-21E4-464F-9F8E-4A62B1E16185}"/>
-              </a:ext>
-            </a:extLst>
-          </p:cNvPr>
-          <p:cNvPicPr>
-            <a:picLocks noChangeAspect="1"/>
-          </p:cNvPicPr>
-          <p:nvPr/>
-        </p:nvPicPr>
-        <p:blipFill rotWithShape="1">
-          <a:blip r:embed="rId5"/>
-          <a:srcRect l="9802" t="10888" r="15836" b="19876"/>
-          <a:stretch/>
-        </p:blipFill>
-        <p:spPr>
-          <a:xfrm>
-            <a:off x="6300000" y="9540000"/>
-            <a:ext cx="1080000" cy="1007999"/>
-          </a:xfrm>
-          <a:prstGeom prst="rect">
-            <a:avLst/>
-          </a:prstGeom>
-        </p:spPr>
-      </p:pic>
-      <p:sp>
-        <p:nvSpPr>
-          <p:cNvPr id="50" name="Text 50"/>
-          <p:cNvSpPr/>
-          <p:nvPr/>
-        </p:nvSpPr>
-        <p:spPr>
-          <a:xfrm>
-            <a:off x="457200" y="1080000"/>
-            <a:ext cx="6647688" cy="1650000"/>
-          </a:xfrm>
-          <a:prstGeom prst="rect">
-            <a:avLst/>
-          </a:prstGeom>
-          <a:noFill/>
-          <a:ln/>
-        </p:spPr>
-        <p:txBody>
-          <a:bodyPr wrap="square" lIns="0" tIns="0" rIns="0" bIns="0" rtlCol="0" anchor="t"/>
-          <a:lstStyle/>
-          <a:p>
-            <a:pPr marL="0" indent="0" algn="ctr">
-              <a:buNone/>
-            </a:pPr>
-            <a:r>
-              <a:rPr lang="fr-FR" sz="1700" b="0" dirty="0">
-                <a:solidFill>
-                  <a:srgbClr val="333333"/>
-                </a:solidFill>
-                <a:latin typeface="Poppins"/>
-              </a:rPr>
-              <a:t>Tu as découvert le secret de la colle magique et tu as appris à écouter ta grande batterie. Tu sais quoi ? Gérer tout ça tous les jours fait de toi un vrai super-héros !</a:t>
-            </a:r>
-          </a:p>
-        </p:txBody>
-      </p:sp>
-      <p:sp>
-        <p:nvSpPr>
-          <p:cNvPr id="51" name="Text 51"/>
-          <p:cNvSpPr/>
-          <p:nvPr/>
-        </p:nvSpPr>
-        <p:spPr>
-          <a:xfrm>
-            <a:off x="457200" y="2750000"/>
-            <a:ext cx="6647688" cy="1100000"/>
-          </a:xfrm>
-          <a:prstGeom prst="rect">
-            <a:avLst/>
-          </a:prstGeom>
-          <a:noFill/>
-          <a:ln/>
-        </p:spPr>
-        <p:txBody>
-          <a:bodyPr wrap="square" lIns="0" tIns="0" rIns="0" bIns="0" rtlCol="0" anchor="t"/>
-          <a:lstStyle/>
-          <a:p>
-            <a:pPr marL="0" indent="0" algn="ctr">
-              <a:buNone/>
-            </a:pPr>
-            <a:r>
-              <a:rPr lang="fr-FR" sz="1600" b="0" dirty="0">
-                <a:solidFill>
-                  <a:srgbClr val="333333"/>
-                </a:solidFill>
-                <a:latin typeface="Poppins"/>
-              </a:rPr>
-              <a:t>À quoi ressemble ton costume ? Dessine-toi en super-héros ou colorie la silhouette ci-dessous. N'oublie pas de choisir tes couleurs préférées et de rajouter tes supers outils pour t'aider !</a:t>
-            </a:r>
-          </a:p>
-        </p:txBody>
-      </p:sp>
-      <p:sp>
-        <p:nvSpPr>
-          <p:cNvPr id="60" name="DrawBox"/>
-          <p:cNvSpPr/>
-          <p:nvPr/>
-        </p:nvSpPr>
-        <p:spPr>
-          <a:xfrm>
-            <a:off x="1781425" y="4050000"/>
-            <a:ext cx="4000000" cy="5450000"/>
-          </a:xfrm>
-          <a:prstGeom prst="roundRect">
-            <a:avLst>
-              <a:gd name="adj" fmla="val 4000"/>
-            </a:avLst>
-          </a:prstGeom>
-          <a:solidFill>
-            <a:srgbClr val="FFFFFF"/>
-          </a:solidFill>
-          <a:ln w="28575">
-            <a:solidFill>
-              <a:srgbClr val="E8963D"/>
-            </a:solidFill>
-            <a:prstDash val="dash"/>
-          </a:ln>
-        </p:spPr>
-        <p:txBody>
-          <a:bodyPr/>
-          <a:lstStyle/>
-          <a:p>
-            <a:endParaRPr lang="fr-FR"/>
-          </a:p>
-        </p:txBody>
-      </p:sp>
-      <p:sp>
-        <p:nvSpPr>
-          <p:cNvPr id="61" name="Sil61"/>
-          <p:cNvSpPr/>
-          <p:nvPr/>
-        </p:nvSpPr>
-        <p:spPr>
-          <a:xfrm>
-            <a:off x="2959717" y="5624940"/>
-            <a:ext cx="1643256" cy="2011572"/>
-          </a:xfrm>
-          <a:prstGeom prst="triangle">
-            <a:avLst/>
-          </a:prstGeom>
-          <a:noFill/>
-          <a:ln w="28575">
-            <a:solidFill>
-              <a:srgbClr val="8B1A2B"/>
-            </a:solidFill>
-          </a:ln>
-        </p:spPr>
-        <p:txBody>
-          <a:bodyPr/>
-          <a:lstStyle/>
-          <a:p>
-            <a:endParaRPr lang="fr-FR"/>
-          </a:p>
-        </p:txBody>
-      </p:sp>
-      <p:sp>
-        <p:nvSpPr>
-          <p:cNvPr id="62" name="Sil62"/>
-          <p:cNvSpPr/>
-          <p:nvPr/>
-        </p:nvSpPr>
-        <p:spPr>
-          <a:xfrm>
-            <a:off x="3271369" y="4619154"/>
-            <a:ext cx="1019952" cy="1019952"/>
-          </a:xfrm>
-          <a:prstGeom prst="ellipse">
-            <a:avLst/>
-          </a:prstGeom>
-          <a:noFill/>
-          <a:ln w="28575">
-            <a:solidFill>
-              <a:srgbClr val="8B1A2B"/>
-            </a:solidFill>
-          </a:ln>
-        </p:spPr>
-        <p:txBody>
-          <a:bodyPr/>
-          <a:lstStyle/>
-          <a:p>
-            <a:endParaRPr lang="fr-FR"/>
-          </a:p>
-        </p:txBody>
-      </p:sp>
-      <p:sp>
-        <p:nvSpPr>
-          <p:cNvPr id="63" name="Sil63"/>
-          <p:cNvSpPr/>
-          <p:nvPr/>
-        </p:nvSpPr>
-        <p:spPr>
-          <a:xfrm>
-            <a:off x="3356365" y="5029968"/>
-            <a:ext cx="849960" cy="184158"/>
-          </a:xfrm>
-          <a:prstGeom prst="roundRect">
-            <a:avLst>
-              <a:gd name="adj" fmla="val 25000"/>
-            </a:avLst>
-          </a:prstGeom>
-          <a:noFill/>
-          <a:ln w="28575">
-            <a:solidFill>
-              <a:srgbClr val="8B1A2B"/>
-            </a:solidFill>
-          </a:ln>
-        </p:spPr>
-        <p:txBody>
-          <a:bodyPr/>
-          <a:lstStyle/>
-          <a:p>
-            <a:endParaRPr lang="fr-FR"/>
-          </a:p>
-        </p:txBody>
-      </p:sp>
-      <p:sp>
-        <p:nvSpPr>
-          <p:cNvPr id="64" name="Sil64"/>
-          <p:cNvSpPr/>
-          <p:nvPr/>
-        </p:nvSpPr>
-        <p:spPr>
-          <a:xfrm>
-            <a:off x="3328033" y="5653272"/>
-            <a:ext cx="906624" cy="1204110"/>
-          </a:xfrm>
-          <a:prstGeom prst="roundRect">
-            <a:avLst>
-              <a:gd name="adj" fmla="val 25000"/>
-            </a:avLst>
-          </a:prstGeom>
-          <a:noFill/>
-          <a:ln w="28575">
-            <a:solidFill>
-              <a:srgbClr val="8B1A2B"/>
-            </a:solidFill>
-          </a:ln>
-        </p:spPr>
-        <p:txBody>
-          <a:bodyPr/>
-          <a:lstStyle/>
-          <a:p>
-            <a:endParaRPr lang="fr-FR"/>
-          </a:p>
-        </p:txBody>
-      </p:sp>
-      <p:sp>
-        <p:nvSpPr>
-          <p:cNvPr id="65" name="Sil65"/>
-          <p:cNvSpPr/>
-          <p:nvPr/>
-        </p:nvSpPr>
-        <p:spPr>
-          <a:xfrm>
-            <a:off x="3583021" y="5922426"/>
-            <a:ext cx="396648" cy="396648"/>
-          </a:xfrm>
-          <a:prstGeom prst="star5">
-            <a:avLst/>
-          </a:prstGeom>
-          <a:noFill/>
-          <a:ln w="28575">
-            <a:solidFill>
-              <a:srgbClr val="8B1A2B"/>
-            </a:solidFill>
-          </a:ln>
-        </p:spPr>
-        <p:txBody>
-          <a:bodyPr/>
-          <a:lstStyle/>
-          <a:p>
-            <a:endParaRPr lang="fr-FR"/>
-          </a:p>
-        </p:txBody>
-      </p:sp>
-      <p:sp>
-        <p:nvSpPr>
-          <p:cNvPr id="66" name="Sil66"/>
-          <p:cNvSpPr/>
-          <p:nvPr/>
-        </p:nvSpPr>
-        <p:spPr>
-          <a:xfrm>
-            <a:off x="3682183" y="6588228"/>
-            <a:ext cx="198324" cy="198324"/>
-          </a:xfrm>
-          <a:prstGeom prst="ellipse">
-            <a:avLst/>
-          </a:prstGeom>
-          <a:noFill/>
-          <a:ln w="28575">
-            <a:solidFill>
-              <a:srgbClr val="8B1A2B"/>
-            </a:solidFill>
-          </a:ln>
-        </p:spPr>
-        <p:txBody>
-          <a:bodyPr/>
-          <a:lstStyle/>
-          <a:p>
-            <a:endParaRPr lang="fr-FR"/>
-          </a:p>
-        </p:txBody>
-      </p:sp>
-      <p:sp>
-        <p:nvSpPr>
-          <p:cNvPr id="67" name="Sil67"/>
-          <p:cNvSpPr/>
-          <p:nvPr/>
-        </p:nvSpPr>
-        <p:spPr>
-          <a:xfrm>
-            <a:off x="2903053" y="5766600"/>
-            <a:ext cx="283320" cy="849960"/>
-          </a:xfrm>
-          <a:prstGeom prst="roundRect">
-            <a:avLst>
-              <a:gd name="adj" fmla="val 25000"/>
-            </a:avLst>
-          </a:prstGeom>
-          <a:noFill/>
-          <a:ln w="28575">
-            <a:solidFill>
-              <a:srgbClr val="8B1A2B"/>
-            </a:solidFill>
-          </a:ln>
-        </p:spPr>
-        <p:txBody>
-          <a:bodyPr/>
-          <a:lstStyle/>
-          <a:p>
-            <a:endParaRPr lang="fr-FR"/>
-          </a:p>
-        </p:txBody>
-      </p:sp>
-      <p:sp>
-        <p:nvSpPr>
-          <p:cNvPr id="68" name="Sil68"/>
-          <p:cNvSpPr/>
-          <p:nvPr/>
-        </p:nvSpPr>
-        <p:spPr>
-          <a:xfrm>
-            <a:off x="4376317" y="5766600"/>
-            <a:ext cx="283320" cy="849960"/>
-          </a:xfrm>
-          <a:prstGeom prst="roundRect">
-            <a:avLst>
-              <a:gd name="adj" fmla="val 25000"/>
-            </a:avLst>
-          </a:prstGeom>
-          <a:noFill/>
-          <a:ln w="28575">
-            <a:solidFill>
-              <a:srgbClr val="8B1A2B"/>
-            </a:solidFill>
-          </a:ln>
-        </p:spPr>
-        <p:txBody>
-          <a:bodyPr/>
-          <a:lstStyle/>
-          <a:p>
-            <a:endParaRPr lang="fr-FR"/>
-          </a:p>
-        </p:txBody>
-      </p:sp>
-      <p:sp>
-        <p:nvSpPr>
-          <p:cNvPr id="69" name="Sil69"/>
-          <p:cNvSpPr/>
-          <p:nvPr/>
-        </p:nvSpPr>
-        <p:spPr>
-          <a:xfrm>
-            <a:off x="2888887" y="6503232"/>
-            <a:ext cx="311652" cy="311652"/>
-          </a:xfrm>
-          <a:prstGeom prst="ellipse">
-            <a:avLst/>
-          </a:prstGeom>
-          <a:noFill/>
-          <a:ln w="28575">
-            <a:solidFill>
-              <a:srgbClr val="8B1A2B"/>
-            </a:solidFill>
-          </a:ln>
-        </p:spPr>
-        <p:txBody>
-          <a:bodyPr/>
-          <a:lstStyle/>
-          <a:p>
-            <a:endParaRPr lang="fr-FR"/>
-          </a:p>
-        </p:txBody>
-      </p:sp>
-      <p:sp>
-        <p:nvSpPr>
-          <p:cNvPr id="70" name="Sil70"/>
-          <p:cNvSpPr/>
-          <p:nvPr/>
-        </p:nvSpPr>
-        <p:spPr>
-          <a:xfrm>
-            <a:off x="4362151" y="6503232"/>
-            <a:ext cx="311652" cy="311652"/>
-          </a:xfrm>
-          <a:prstGeom prst="ellipse">
-            <a:avLst/>
-          </a:prstGeom>
-          <a:noFill/>
-          <a:ln w="28575">
-            <a:solidFill>
-              <a:srgbClr val="8B1A2B"/>
-            </a:solidFill>
-          </a:ln>
-        </p:spPr>
-        <p:txBody>
-          <a:bodyPr/>
-          <a:lstStyle/>
-          <a:p>
-            <a:endParaRPr lang="fr-FR"/>
-          </a:p>
-        </p:txBody>
-      </p:sp>
-      <p:sp>
-        <p:nvSpPr>
-          <p:cNvPr id="71" name="Sil71"/>
-          <p:cNvSpPr/>
-          <p:nvPr/>
-        </p:nvSpPr>
-        <p:spPr>
-          <a:xfrm>
-            <a:off x="3427195" y="6857382"/>
-            <a:ext cx="311652" cy="991620"/>
-          </a:xfrm>
-          <a:prstGeom prst="roundRect">
-            <a:avLst>
-              <a:gd name="adj" fmla="val 25000"/>
-            </a:avLst>
-          </a:prstGeom>
-          <a:noFill/>
-          <a:ln w="28575">
-            <a:solidFill>
-              <a:srgbClr val="8B1A2B"/>
-            </a:solidFill>
-          </a:ln>
-        </p:spPr>
-        <p:txBody>
-          <a:bodyPr/>
-          <a:lstStyle/>
-          <a:p>
-            <a:endParaRPr lang="fr-FR"/>
-          </a:p>
-        </p:txBody>
-      </p:sp>
-      <p:sp>
-        <p:nvSpPr>
-          <p:cNvPr id="72" name="Sil72"/>
-          <p:cNvSpPr/>
-          <p:nvPr/>
-        </p:nvSpPr>
-        <p:spPr>
-          <a:xfrm>
-            <a:off x="3823843" y="6857382"/>
-            <a:ext cx="311652" cy="991620"/>
-          </a:xfrm>
-          <a:prstGeom prst="roundRect">
-            <a:avLst>
-              <a:gd name="adj" fmla="val 25000"/>
-            </a:avLst>
-          </a:prstGeom>
-          <a:noFill/>
-          <a:ln w="28575">
-            <a:solidFill>
-              <a:srgbClr val="8B1A2B"/>
-            </a:solidFill>
-          </a:ln>
-        </p:spPr>
-        <p:txBody>
-          <a:bodyPr/>
-          <a:lstStyle/>
-          <a:p>
-            <a:endParaRPr lang="fr-FR"/>
-          </a:p>
-        </p:txBody>
-      </p:sp>
-      <p:sp>
-        <p:nvSpPr>
-          <p:cNvPr id="73" name="Sil73"/>
-          <p:cNvSpPr/>
-          <p:nvPr/>
-        </p:nvSpPr>
-        <p:spPr>
-          <a:xfrm>
-            <a:off x="3356365" y="7820670"/>
-            <a:ext cx="453312" cy="254988"/>
-          </a:xfrm>
-          <a:prstGeom prst="roundRect">
-            <a:avLst>
-              <a:gd name="adj" fmla="val 25000"/>
-            </a:avLst>
-          </a:prstGeom>
-          <a:noFill/>
-          <a:ln w="28575">
-            <a:solidFill>
-              <a:srgbClr val="8B1A2B"/>
-            </a:solidFill>
-          </a:ln>
-        </p:spPr>
-        <p:txBody>
-          <a:bodyPr/>
-          <a:lstStyle/>
-          <a:p>
-            <a:endParaRPr lang="fr-FR"/>
-          </a:p>
-        </p:txBody>
-      </p:sp>
-      <p:sp>
-        <p:nvSpPr>
-          <p:cNvPr id="74" name="Sil74"/>
-          <p:cNvSpPr/>
-          <p:nvPr/>
-        </p:nvSpPr>
-        <p:spPr>
-          <a:xfrm>
-            <a:off x="3753013" y="7820670"/>
-            <a:ext cx="453312" cy="254988"/>
-          </a:xfrm>
-          <a:prstGeom prst="roundRect">
-            <a:avLst>
-              <a:gd name="adj" fmla="val 25000"/>
-            </a:avLst>
-          </a:prstGeom>
-          <a:noFill/>
-          <a:ln w="28575">
-            <a:solidFill>
-              <a:srgbClr val="8B1A2B"/>
-            </a:solidFill>
-          </a:ln>
-        </p:spPr>
-        <p:txBody>
-          <a:bodyPr/>
-          <a:lstStyle/>
-          <a:p>
-            <a:endParaRPr lang="fr-FR"/>
-          </a:p>
-        </p:txBody>
-      </p:sp>
-      <p:sp>
-        <p:nvSpPr>
-          <p:cNvPr id="80" name="Text 80"/>
-          <p:cNvSpPr/>
-          <p:nvPr/>
-        </p:nvSpPr>
-        <p:spPr>
-          <a:xfrm>
-            <a:off x="1781425" y="9600000"/>
-            <a:ext cx="4000000" cy="400000"/>
-          </a:xfrm>
-          <a:prstGeom prst="rect">
-            <a:avLst/>
-          </a:prstGeom>
-          <a:noFill/>
-          <a:ln/>
-        </p:spPr>
-        <p:txBody>
-          <a:bodyPr wrap="square" lIns="0" tIns="0" rIns="0" bIns="0" rtlCol="0" anchor="t"/>
-          <a:lstStyle/>
-          <a:p>
-            <a:pPr marL="0" indent="0" algn="ctr">
-              <a:buNone/>
-            </a:pPr>
-            <a:r>
-              <a:rPr lang="fr-FR" sz="1400" b="0" i="1" dirty="0">
-                <a:solidFill>
-                  <a:srgbClr val="999999"/>
-                </a:solidFill>
-                <a:latin typeface="Poppins"/>
-              </a:rPr>
-              <a:t>Dessine-toi ici !</a:t>
-            </a:r>
+              <a:t>SedOcc</a:t>
+            </a:r>
+            <a:endParaRPr lang="fr-FR" dirty="0">
+              <a:solidFill>
+                <a:srgbClr val="666666"/>
+              </a:solidFill>
+              <a:latin typeface="Poppins"/>
+            </a:endParaRPr>
           </a:p>
         </p:txBody>
       </p:sp>
@@ -6833,6 +5267,894 @@
 
 <file path=ppt/slides/slide5.xml><?xml version="1.0" encoding="utf-8"?>
 <p:sld xmlns:a="http://schemas.openxmlformats.org/drawingml/2006/main" xmlns:r="http://schemas.openxmlformats.org/officeDocument/2006/relationships" xmlns:p="http://schemas.openxmlformats.org/presentationml/2006/main">
+  <p:cSld name="Slide 2">
+    <p:bg>
+      <p:bgPr>
+        <a:blipFill dpi="0" rotWithShape="1">
+          <a:blip r:embed="rId2">
+            <a:lum/>
+          </a:blip>
+          <a:srcRect/>
+          <a:stretch>
+            <a:fillRect/>
+          </a:stretch>
+        </a:blipFill>
+        <a:effectLst/>
+      </p:bgPr>
+    </p:bg>
+    <p:spTree>
+      <p:nvGrpSpPr>
+        <p:cNvPr id="1" name=""/>
+        <p:cNvGrpSpPr/>
+        <p:nvPr/>
+      </p:nvGrpSpPr>
+      <p:grpSpPr>
+        <a:xfrm>
+          <a:off x="0" y="0"/>
+          <a:ext cx="0" cy="0"/>
+          <a:chOff x="0" y="0"/>
+          <a:chExt cx="0" cy="0"/>
+        </a:xfrm>
+      </p:grpSpPr>
+      <p:sp>
+        <p:nvSpPr>
+          <p:cNvPr id="2" name="Text 0"/>
+          <p:cNvSpPr/>
+          <p:nvPr/>
+        </p:nvSpPr>
+        <p:spPr>
+          <a:xfrm>
+            <a:off x="428625" y="238919"/>
+            <a:ext cx="6647688" cy="640080"/>
+          </a:xfrm>
+          <a:prstGeom prst="rect">
+            <a:avLst/>
+          </a:prstGeom>
+          <a:noFill/>
+          <a:ln/>
+        </p:spPr>
+        <p:txBody>
+          <a:bodyPr wrap="square" lIns="0" tIns="0" rIns="0" bIns="0" rtlCol="0" anchor="ctr"/>
+          <a:lstStyle/>
+          <a:p>
+            <a:pPr marL="0" indent="0" algn="ctr">
+              <a:buNone/>
+            </a:pPr>
+            <a:r>
+              <a:rPr lang="fr-FR" sz="2800" b="1" dirty="0">
+                <a:solidFill>
+                  <a:srgbClr val="8B1A2B"/>
+                </a:solidFill>
+                <a:latin typeface="Poppins" pitchFamily="34" charset="0"/>
+                <a:ea typeface="Calibri" pitchFamily="34" charset="-122"/>
+                <a:cs typeface="Calibri" pitchFamily="34" charset="-120"/>
+              </a:rPr>
+              <a:t>Mon niveau de super-énergie !</a:t>
+            </a:r>
+            <a:endParaRPr lang="fr-FR" sz="2800" dirty="0"/>
+          </a:p>
+        </p:txBody>
+      </p:sp>
+      <p:sp>
+        <p:nvSpPr>
+          <p:cNvPr id="99" name="Footer"/>
+          <p:cNvSpPr/>
+          <p:nvPr/>
+        </p:nvSpPr>
+        <p:spPr>
+          <a:xfrm>
+            <a:off x="471425" y="10173159"/>
+            <a:ext cx="6562850" cy="300000"/>
+          </a:xfrm>
+          <a:prstGeom prst="rect">
+            <a:avLst/>
+          </a:prstGeom>
+          <a:noFill/>
+          <a:ln/>
+        </p:spPr>
+        <p:txBody>
+          <a:bodyPr wrap="square" lIns="0" tIns="0" rIns="0" bIns="0" rtlCol="0" anchor="ctr"/>
+          <a:lstStyle/>
+          <a:p>
+            <a:pPr marL="0" indent="0" algn="ctr">
+              <a:buNone/>
+            </a:pPr>
+            <a:r>
+              <a:rPr lang="fr-FR" sz="1000" i="1">
+                <a:solidFill>
+                  <a:srgbClr val="666666"/>
+                </a:solidFill>
+                <a:latin typeface="Poppins" pitchFamily="34" charset="0"/>
+                <a:ea typeface="Calibri" pitchFamily="34" charset="0"/>
+                <a:cs typeface="Calibri" pitchFamily="34" charset="0"/>
+              </a:rPr>
+              <a:t>Fait par l’association Sed’Occ France 04/2026</a:t>
+            </a:r>
+          </a:p>
+        </p:txBody>
+      </p:sp>
+      <p:pic>
+        <p:nvPicPr>
+          <p:cNvPr id="9" name="Image 8">
+            <a:extLst>
+              <a:ext uri="{FF2B5EF4-FFF2-40B4-BE49-F238E27FC236}">
+                <a16:creationId xmlns:a16="http://schemas.microsoft.com/office/drawing/2014/main" id="{1272B92B-21E4-464F-9F8E-4A62B1E16185}"/>
+              </a:ext>
+            </a:extLst>
+          </p:cNvPr>
+          <p:cNvPicPr>
+            <a:picLocks noChangeAspect="1"/>
+          </p:cNvPicPr>
+          <p:nvPr/>
+        </p:nvPicPr>
+        <p:blipFill rotWithShape="1">
+          <a:blip r:embed="rId3"/>
+          <a:srcRect l="9802" t="10888" r="15836" b="19876"/>
+          <a:stretch/>
+        </p:blipFill>
+        <p:spPr>
+          <a:xfrm>
+            <a:off x="6271425" y="9413159"/>
+            <a:ext cx="1080000" cy="1007999"/>
+          </a:xfrm>
+          <a:prstGeom prst="rect">
+            <a:avLst/>
+          </a:prstGeom>
+        </p:spPr>
+      </p:pic>
+      <p:sp>
+        <p:nvSpPr>
+          <p:cNvPr id="50" name="Text 50"/>
+          <p:cNvSpPr/>
+          <p:nvPr/>
+        </p:nvSpPr>
+        <p:spPr>
+          <a:xfrm>
+            <a:off x="471127" y="1307092"/>
+            <a:ext cx="6647688" cy="1700000"/>
+          </a:xfrm>
+          <a:prstGeom prst="rect">
+            <a:avLst/>
+          </a:prstGeom>
+          <a:noFill/>
+          <a:ln/>
+        </p:spPr>
+        <p:txBody>
+          <a:bodyPr wrap="square" lIns="0" tIns="0" rIns="0" bIns="0" rtlCol="0" anchor="t"/>
+          <a:lstStyle/>
+          <a:p>
+            <a:pPr marL="0" indent="0" algn="ctr">
+              <a:buNone/>
+            </a:pPr>
+            <a:r>
+              <a:rPr lang="fr-FR" sz="2400" b="0" dirty="0">
+                <a:solidFill>
+                  <a:srgbClr val="333333"/>
+                </a:solidFill>
+                <a:latin typeface="Poppins"/>
+              </a:rPr>
+              <a:t>Tout le monde a une grande batterie d'énergie à l'intérieur de soi, et elle ne reste pas toujours pleine ! Ça, c'est normal.</a:t>
+            </a:r>
+          </a:p>
+          <a:p>
+            <a:pPr marL="0" indent="0" algn="ctr">
+              <a:buNone/>
+            </a:pPr>
+            <a:r>
+              <a:rPr lang="fr-FR" sz="2400" b="0" dirty="0">
+                <a:solidFill>
+                  <a:srgbClr val="333333"/>
+                </a:solidFill>
+                <a:latin typeface="Poppins"/>
+              </a:rPr>
+              <a:t>Parfois, quand la batterie est à plat, tu as le droit de te sentir triste ou en colère. L'important, c'est d'apprendre à écouter ton corps.</a:t>
+            </a:r>
+          </a:p>
+          <a:p>
+            <a:pPr marL="0" indent="0" algn="ctr">
+              <a:buNone/>
+            </a:pPr>
+            <a:endParaRPr lang="fr-FR" sz="2400" b="1" dirty="0">
+              <a:solidFill>
+                <a:srgbClr val="8B1A2B"/>
+              </a:solidFill>
+              <a:latin typeface="Poppins"/>
+            </a:endParaRPr>
+          </a:p>
+          <a:p>
+            <a:pPr marL="0" indent="0" algn="ctr">
+              <a:buNone/>
+            </a:pPr>
+            <a:endParaRPr lang="fr-FR" sz="2400" b="1" dirty="0">
+              <a:solidFill>
+                <a:srgbClr val="8B1A2B"/>
+              </a:solidFill>
+              <a:latin typeface="Poppins"/>
+            </a:endParaRPr>
+          </a:p>
+          <a:p>
+            <a:pPr marL="0" indent="0" algn="ctr">
+              <a:buNone/>
+            </a:pPr>
+            <a:r>
+              <a:rPr lang="fr-FR" sz="2400" b="1" dirty="0">
+                <a:solidFill>
+                  <a:srgbClr val="8B1A2B"/>
+                </a:solidFill>
+                <a:latin typeface="Poppins"/>
+              </a:rPr>
+              <a:t>Montre à tes parents ou à tes copains où en est ta batterie aujourd'hui :</a:t>
+            </a:r>
+          </a:p>
+        </p:txBody>
+      </p:sp>
+      <p:sp>
+        <p:nvSpPr>
+          <p:cNvPr id="61" name="Card 61"/>
+          <p:cNvSpPr/>
+          <p:nvPr/>
+        </p:nvSpPr>
+        <p:spPr>
+          <a:xfrm>
+            <a:off x="364494" y="5865386"/>
+            <a:ext cx="2050000" cy="2375319"/>
+          </a:xfrm>
+          <a:prstGeom prst="roundRect">
+            <a:avLst>
+              <a:gd name="adj" fmla="val 6000"/>
+            </a:avLst>
+          </a:prstGeom>
+          <a:solidFill>
+            <a:srgbClr val="FFFFFF"/>
+          </a:solidFill>
+          <a:ln w="12700">
+            <a:solidFill>
+              <a:srgbClr val="8B1A2B">
+                <a:alpha val="15000"/>
+              </a:srgbClr>
+            </a:solidFill>
+          </a:ln>
+          <a:effectLst>
+            <a:outerShdw blurRad="60000" dist="20000" dir="5400000" algn="t" rotWithShape="0">
+              <a:srgbClr val="8B1A2B">
+                <a:alpha val="18000"/>
+              </a:srgbClr>
+            </a:outerShdw>
+          </a:effectLst>
+        </p:spPr>
+        <p:txBody>
+          <a:bodyPr/>
+          <a:lstStyle/>
+          <a:p>
+            <a:endParaRPr lang="fr-FR"/>
+          </a:p>
+        </p:txBody>
+      </p:sp>
+      <p:sp>
+        <p:nvSpPr>
+          <p:cNvPr id="62" name="BattBody 62"/>
+          <p:cNvSpPr/>
+          <p:nvPr/>
+        </p:nvSpPr>
+        <p:spPr>
+          <a:xfrm>
+            <a:off x="1086127" y="6114865"/>
+            <a:ext cx="720000" cy="380000"/>
+          </a:xfrm>
+          <a:prstGeom prst="roundRect">
+            <a:avLst>
+              <a:gd name="adj" fmla="val 15000"/>
+            </a:avLst>
+          </a:prstGeom>
+          <a:noFill/>
+          <a:ln w="28575">
+            <a:solidFill>
+              <a:srgbClr val="8B1A2B"/>
+            </a:solidFill>
+          </a:ln>
+        </p:spPr>
+        <p:txBody>
+          <a:bodyPr/>
+          <a:lstStyle/>
+          <a:p>
+            <a:endParaRPr lang="fr-FR"/>
+          </a:p>
+        </p:txBody>
+      </p:sp>
+      <p:sp>
+        <p:nvSpPr>
+          <p:cNvPr id="63" name="BattNub 63"/>
+          <p:cNvSpPr/>
+          <p:nvPr/>
+        </p:nvSpPr>
+        <p:spPr>
+          <a:xfrm>
+            <a:off x="1806127" y="6244865"/>
+            <a:ext cx="45000" cy="120000"/>
+          </a:xfrm>
+          <a:prstGeom prst="rect">
+            <a:avLst/>
+          </a:prstGeom>
+          <a:solidFill>
+            <a:srgbClr val="8B1A2B"/>
+          </a:solidFill>
+          <a:ln>
+            <a:noFill/>
+          </a:ln>
+        </p:spPr>
+        <p:txBody>
+          <a:bodyPr/>
+          <a:lstStyle/>
+          <a:p>
+            <a:endParaRPr lang="fr-FR"/>
+          </a:p>
+        </p:txBody>
+      </p:sp>
+      <p:sp>
+        <p:nvSpPr>
+          <p:cNvPr id="64" name="BattFill 64"/>
+          <p:cNvSpPr/>
+          <p:nvPr/>
+        </p:nvSpPr>
+        <p:spPr>
+          <a:xfrm>
+            <a:off x="1106127" y="6134865"/>
+            <a:ext cx="680000" cy="340000"/>
+          </a:xfrm>
+          <a:prstGeom prst="roundRect">
+            <a:avLst>
+              <a:gd name="adj" fmla="val 15000"/>
+            </a:avLst>
+          </a:prstGeom>
+          <a:solidFill>
+            <a:srgbClr val="5CA86B"/>
+          </a:solidFill>
+          <a:ln>
+            <a:noFill/>
+          </a:ln>
+        </p:spPr>
+        <p:txBody>
+          <a:bodyPr/>
+          <a:lstStyle/>
+          <a:p>
+            <a:endParaRPr lang="fr-FR"/>
+          </a:p>
+        </p:txBody>
+      </p:sp>
+      <p:sp>
+        <p:nvSpPr>
+          <p:cNvPr id="65" name="Text 65"/>
+          <p:cNvSpPr/>
+          <p:nvPr/>
+        </p:nvSpPr>
+        <p:spPr>
+          <a:xfrm>
+            <a:off x="471127" y="6614865"/>
+            <a:ext cx="1950000" cy="700000"/>
+          </a:xfrm>
+          <a:prstGeom prst="rect">
+            <a:avLst/>
+          </a:prstGeom>
+          <a:noFill/>
+          <a:ln/>
+        </p:spPr>
+        <p:txBody>
+          <a:bodyPr wrap="square" lIns="0" tIns="0" rIns="0" bIns="0" rtlCol="0" anchor="t"/>
+          <a:lstStyle/>
+          <a:p>
+            <a:pPr marL="0" indent="0" algn="ctr">
+              <a:buNone/>
+            </a:pPr>
+            <a:r>
+              <a:rPr lang="fr-FR" sz="1500" b="1" dirty="0">
+                <a:solidFill>
+                  <a:srgbClr val="8B1A2B"/>
+                </a:solidFill>
+                <a:latin typeface="Poppins"/>
+              </a:rPr>
+              <a:t>Pile Verte</a:t>
+            </a:r>
+          </a:p>
+          <a:p>
+            <a:pPr marL="0" indent="0" algn="ctr">
+              <a:buNone/>
+            </a:pPr>
+            <a:r>
+              <a:rPr lang="fr-FR" sz="1500" b="1" dirty="0">
+                <a:solidFill>
+                  <a:srgbClr val="8B1A2B"/>
+                </a:solidFill>
+                <a:latin typeface="Poppins"/>
+              </a:rPr>
+              <a:t>(Pleine)</a:t>
+            </a:r>
+          </a:p>
+        </p:txBody>
+      </p:sp>
+      <p:sp>
+        <p:nvSpPr>
+          <p:cNvPr id="66" name="Text 66"/>
+          <p:cNvSpPr/>
+          <p:nvPr/>
+        </p:nvSpPr>
+        <p:spPr>
+          <a:xfrm>
+            <a:off x="501127" y="7463159"/>
+            <a:ext cx="1890000" cy="2860000"/>
+          </a:xfrm>
+          <a:prstGeom prst="rect">
+            <a:avLst/>
+          </a:prstGeom>
+          <a:noFill/>
+          <a:ln/>
+        </p:spPr>
+        <p:txBody>
+          <a:bodyPr wrap="square" lIns="0" tIns="0" rIns="0" bIns="0" rtlCol="0" anchor="t"/>
+          <a:lstStyle/>
+          <a:p>
+            <a:pPr marL="0" indent="0" algn="ctr">
+              <a:buNone/>
+            </a:pPr>
+            <a:r>
+              <a:rPr lang="fr-FR" sz="1150" b="0" dirty="0">
+                <a:solidFill>
+                  <a:srgbClr val="333333"/>
+                </a:solidFill>
+                <a:latin typeface="Poppins"/>
+              </a:rPr>
+              <a:t>Je suis en pleine forme ! Je peux jouer et faire plein de choses.</a:t>
+            </a:r>
+          </a:p>
+        </p:txBody>
+      </p:sp>
+      <p:sp>
+        <p:nvSpPr>
+          <p:cNvPr id="67" name="Card 67"/>
+          <p:cNvSpPr/>
+          <p:nvPr/>
+        </p:nvSpPr>
+        <p:spPr>
+          <a:xfrm>
+            <a:off x="2719971" y="5854865"/>
+            <a:ext cx="2050000" cy="2375319"/>
+          </a:xfrm>
+          <a:prstGeom prst="roundRect">
+            <a:avLst>
+              <a:gd name="adj" fmla="val 6000"/>
+            </a:avLst>
+          </a:prstGeom>
+          <a:solidFill>
+            <a:srgbClr val="FFFFFF"/>
+          </a:solidFill>
+          <a:ln w="12700">
+            <a:solidFill>
+              <a:srgbClr val="8B1A2B">
+                <a:alpha val="15000"/>
+              </a:srgbClr>
+            </a:solidFill>
+          </a:ln>
+          <a:effectLst>
+            <a:outerShdw blurRad="60000" dist="20000" dir="5400000" algn="t" rotWithShape="0">
+              <a:srgbClr val="8B1A2B">
+                <a:alpha val="18000"/>
+              </a:srgbClr>
+            </a:outerShdw>
+          </a:effectLst>
+        </p:spPr>
+        <p:txBody>
+          <a:bodyPr/>
+          <a:lstStyle/>
+          <a:p>
+            <a:endParaRPr lang="fr-FR"/>
+          </a:p>
+        </p:txBody>
+      </p:sp>
+      <p:sp>
+        <p:nvSpPr>
+          <p:cNvPr id="68" name="BattBody 68"/>
+          <p:cNvSpPr/>
+          <p:nvPr/>
+        </p:nvSpPr>
+        <p:spPr>
+          <a:xfrm>
+            <a:off x="3384971" y="6114865"/>
+            <a:ext cx="720000" cy="380000"/>
+          </a:xfrm>
+          <a:prstGeom prst="roundRect">
+            <a:avLst>
+              <a:gd name="adj" fmla="val 15000"/>
+            </a:avLst>
+          </a:prstGeom>
+          <a:noFill/>
+          <a:ln w="28575">
+            <a:solidFill>
+              <a:srgbClr val="8B1A2B"/>
+            </a:solidFill>
+          </a:ln>
+        </p:spPr>
+        <p:txBody>
+          <a:bodyPr/>
+          <a:lstStyle/>
+          <a:p>
+            <a:endParaRPr lang="fr-FR"/>
+          </a:p>
+        </p:txBody>
+      </p:sp>
+      <p:sp>
+        <p:nvSpPr>
+          <p:cNvPr id="69" name="BattNub 69"/>
+          <p:cNvSpPr/>
+          <p:nvPr/>
+        </p:nvSpPr>
+        <p:spPr>
+          <a:xfrm>
+            <a:off x="4104971" y="6244865"/>
+            <a:ext cx="45000" cy="120000"/>
+          </a:xfrm>
+          <a:prstGeom prst="rect">
+            <a:avLst/>
+          </a:prstGeom>
+          <a:solidFill>
+            <a:srgbClr val="8B1A2B"/>
+          </a:solidFill>
+          <a:ln>
+            <a:noFill/>
+          </a:ln>
+        </p:spPr>
+        <p:txBody>
+          <a:bodyPr/>
+          <a:lstStyle/>
+          <a:p>
+            <a:endParaRPr lang="fr-FR"/>
+          </a:p>
+        </p:txBody>
+      </p:sp>
+      <p:sp>
+        <p:nvSpPr>
+          <p:cNvPr id="70" name="BattFill 70"/>
+          <p:cNvSpPr/>
+          <p:nvPr/>
+        </p:nvSpPr>
+        <p:spPr>
+          <a:xfrm>
+            <a:off x="3404971" y="6134865"/>
+            <a:ext cx="408000" cy="340000"/>
+          </a:xfrm>
+          <a:prstGeom prst="roundRect">
+            <a:avLst>
+              <a:gd name="adj" fmla="val 15000"/>
+            </a:avLst>
+          </a:prstGeom>
+          <a:solidFill>
+            <a:srgbClr val="E8963D"/>
+          </a:solidFill>
+          <a:ln>
+            <a:noFill/>
+          </a:ln>
+        </p:spPr>
+        <p:txBody>
+          <a:bodyPr/>
+          <a:lstStyle/>
+          <a:p>
+            <a:endParaRPr lang="fr-FR"/>
+          </a:p>
+        </p:txBody>
+      </p:sp>
+      <p:sp>
+        <p:nvSpPr>
+          <p:cNvPr id="71" name="Text 71"/>
+          <p:cNvSpPr/>
+          <p:nvPr/>
+        </p:nvSpPr>
+        <p:spPr>
+          <a:xfrm>
+            <a:off x="2769971" y="6614865"/>
+            <a:ext cx="1950000" cy="700000"/>
+          </a:xfrm>
+          <a:prstGeom prst="rect">
+            <a:avLst/>
+          </a:prstGeom>
+          <a:noFill/>
+          <a:ln/>
+        </p:spPr>
+        <p:txBody>
+          <a:bodyPr wrap="square" lIns="0" tIns="0" rIns="0" bIns="0" rtlCol="0" anchor="t"/>
+          <a:lstStyle/>
+          <a:p>
+            <a:pPr marL="0" indent="0" algn="ctr">
+              <a:buNone/>
+            </a:pPr>
+            <a:r>
+              <a:rPr lang="fr-FR" sz="1500" b="1" dirty="0">
+                <a:solidFill>
+                  <a:srgbClr val="8B1A2B"/>
+                </a:solidFill>
+                <a:latin typeface="Poppins"/>
+              </a:rPr>
+              <a:t>Pile Orange</a:t>
+            </a:r>
+          </a:p>
+          <a:p>
+            <a:pPr marL="0" indent="0" algn="ctr">
+              <a:buNone/>
+            </a:pPr>
+            <a:r>
+              <a:rPr lang="fr-FR" sz="1500" b="1" dirty="0">
+                <a:solidFill>
+                  <a:srgbClr val="8B1A2B"/>
+                </a:solidFill>
+                <a:latin typeface="Poppins"/>
+              </a:rPr>
+              <a:t>(Moyenne)</a:t>
+            </a:r>
+          </a:p>
+        </p:txBody>
+      </p:sp>
+      <p:sp>
+        <p:nvSpPr>
+          <p:cNvPr id="72" name="Text 72"/>
+          <p:cNvSpPr/>
+          <p:nvPr/>
+        </p:nvSpPr>
+        <p:spPr>
+          <a:xfrm>
+            <a:off x="2799971" y="7394865"/>
+            <a:ext cx="1890000" cy="835319"/>
+          </a:xfrm>
+          <a:prstGeom prst="rect">
+            <a:avLst/>
+          </a:prstGeom>
+          <a:noFill/>
+          <a:ln/>
+        </p:spPr>
+        <p:txBody>
+          <a:bodyPr wrap="square" lIns="0" tIns="0" rIns="0" bIns="0" rtlCol="0" anchor="t"/>
+          <a:lstStyle/>
+          <a:p>
+            <a:pPr marL="0" indent="0" algn="ctr">
+              <a:buNone/>
+            </a:pPr>
+            <a:r>
+              <a:rPr lang="fr-FR" sz="1150" b="0" dirty="0">
+                <a:solidFill>
+                  <a:srgbClr val="333333"/>
+                </a:solidFill>
+                <a:latin typeface="Poppins"/>
+              </a:rPr>
+              <a:t>Ma batterie baisse un peu... J'ai besoin de faire une pause ou de choisir un jeu calme, comme le dessin.</a:t>
+            </a:r>
+          </a:p>
+        </p:txBody>
+      </p:sp>
+      <p:sp>
+        <p:nvSpPr>
+          <p:cNvPr id="73" name="Card 73"/>
+          <p:cNvSpPr/>
+          <p:nvPr/>
+        </p:nvSpPr>
+        <p:spPr>
+          <a:xfrm>
+            <a:off x="5018815" y="5854865"/>
+            <a:ext cx="2050000" cy="2385840"/>
+          </a:xfrm>
+          <a:prstGeom prst="roundRect">
+            <a:avLst>
+              <a:gd name="adj" fmla="val 6000"/>
+            </a:avLst>
+          </a:prstGeom>
+          <a:solidFill>
+            <a:srgbClr val="FFFFFF"/>
+          </a:solidFill>
+          <a:ln w="12700">
+            <a:solidFill>
+              <a:srgbClr val="8B1A2B">
+                <a:alpha val="15000"/>
+              </a:srgbClr>
+            </a:solidFill>
+          </a:ln>
+          <a:effectLst>
+            <a:outerShdw blurRad="60000" dist="20000" dir="5400000" algn="t" rotWithShape="0">
+              <a:srgbClr val="8B1A2B">
+                <a:alpha val="18000"/>
+              </a:srgbClr>
+            </a:outerShdw>
+          </a:effectLst>
+        </p:spPr>
+        <p:txBody>
+          <a:bodyPr/>
+          <a:lstStyle/>
+          <a:p>
+            <a:endParaRPr lang="fr-FR"/>
+          </a:p>
+        </p:txBody>
+      </p:sp>
+      <p:sp>
+        <p:nvSpPr>
+          <p:cNvPr id="74" name="BattBody 74"/>
+          <p:cNvSpPr/>
+          <p:nvPr/>
+        </p:nvSpPr>
+        <p:spPr>
+          <a:xfrm>
+            <a:off x="5683815" y="6114865"/>
+            <a:ext cx="720000" cy="380000"/>
+          </a:xfrm>
+          <a:prstGeom prst="roundRect">
+            <a:avLst>
+              <a:gd name="adj" fmla="val 15000"/>
+            </a:avLst>
+          </a:prstGeom>
+          <a:noFill/>
+          <a:ln w="28575">
+            <a:solidFill>
+              <a:srgbClr val="8B1A2B"/>
+            </a:solidFill>
+          </a:ln>
+        </p:spPr>
+        <p:txBody>
+          <a:bodyPr/>
+          <a:lstStyle/>
+          <a:p>
+            <a:endParaRPr lang="fr-FR"/>
+          </a:p>
+        </p:txBody>
+      </p:sp>
+      <p:sp>
+        <p:nvSpPr>
+          <p:cNvPr id="75" name="BattNub 75"/>
+          <p:cNvSpPr/>
+          <p:nvPr/>
+        </p:nvSpPr>
+        <p:spPr>
+          <a:xfrm>
+            <a:off x="6403815" y="6244865"/>
+            <a:ext cx="45000" cy="120000"/>
+          </a:xfrm>
+          <a:prstGeom prst="rect">
+            <a:avLst/>
+          </a:prstGeom>
+          <a:solidFill>
+            <a:srgbClr val="8B1A2B"/>
+          </a:solidFill>
+          <a:ln>
+            <a:noFill/>
+          </a:ln>
+        </p:spPr>
+        <p:txBody>
+          <a:bodyPr/>
+          <a:lstStyle/>
+          <a:p>
+            <a:endParaRPr lang="fr-FR"/>
+          </a:p>
+        </p:txBody>
+      </p:sp>
+      <p:sp>
+        <p:nvSpPr>
+          <p:cNvPr id="76" name="BattFill 76"/>
+          <p:cNvSpPr/>
+          <p:nvPr/>
+        </p:nvSpPr>
+        <p:spPr>
+          <a:xfrm>
+            <a:off x="5703815" y="6134865"/>
+            <a:ext cx="170000" cy="340000"/>
+          </a:xfrm>
+          <a:prstGeom prst="roundRect">
+            <a:avLst>
+              <a:gd name="adj" fmla="val 15000"/>
+            </a:avLst>
+          </a:prstGeom>
+          <a:solidFill>
+            <a:srgbClr val="C94F4F"/>
+          </a:solidFill>
+          <a:ln>
+            <a:noFill/>
+          </a:ln>
+        </p:spPr>
+        <p:txBody>
+          <a:bodyPr/>
+          <a:lstStyle/>
+          <a:p>
+            <a:endParaRPr lang="fr-FR"/>
+          </a:p>
+        </p:txBody>
+      </p:sp>
+      <p:sp>
+        <p:nvSpPr>
+          <p:cNvPr id="77" name="Text 77"/>
+          <p:cNvSpPr/>
+          <p:nvPr/>
+        </p:nvSpPr>
+        <p:spPr>
+          <a:xfrm>
+            <a:off x="5068815" y="6614865"/>
+            <a:ext cx="1950000" cy="700000"/>
+          </a:xfrm>
+          <a:prstGeom prst="rect">
+            <a:avLst/>
+          </a:prstGeom>
+          <a:noFill/>
+          <a:ln/>
+        </p:spPr>
+        <p:txBody>
+          <a:bodyPr wrap="square" lIns="0" tIns="0" rIns="0" bIns="0" rtlCol="0" anchor="t"/>
+          <a:lstStyle/>
+          <a:p>
+            <a:pPr marL="0" indent="0" algn="ctr">
+              <a:buNone/>
+            </a:pPr>
+            <a:r>
+              <a:rPr lang="fr-FR" sz="1500" b="1" dirty="0">
+                <a:solidFill>
+                  <a:srgbClr val="8B1A2B"/>
+                </a:solidFill>
+                <a:latin typeface="Poppins"/>
+              </a:rPr>
+              <a:t>Pile Rouge</a:t>
+            </a:r>
+          </a:p>
+          <a:p>
+            <a:pPr marL="0" indent="0" algn="ctr">
+              <a:buNone/>
+            </a:pPr>
+            <a:r>
+              <a:rPr lang="fr-FR" sz="1500" b="1" dirty="0">
+                <a:solidFill>
+                  <a:srgbClr val="8B1A2B"/>
+                </a:solidFill>
+                <a:latin typeface="Poppins"/>
+              </a:rPr>
+              <a:t>(Vide)</a:t>
+            </a:r>
+          </a:p>
+        </p:txBody>
+      </p:sp>
+      <p:sp>
+        <p:nvSpPr>
+          <p:cNvPr id="78" name="Text 78"/>
+          <p:cNvSpPr/>
+          <p:nvPr/>
+        </p:nvSpPr>
+        <p:spPr>
+          <a:xfrm>
+            <a:off x="5170741" y="7468580"/>
+            <a:ext cx="1890000" cy="2860000"/>
+          </a:xfrm>
+          <a:prstGeom prst="rect">
+            <a:avLst/>
+          </a:prstGeom>
+          <a:noFill/>
+          <a:ln/>
+        </p:spPr>
+        <p:txBody>
+          <a:bodyPr wrap="square" lIns="0" tIns="0" rIns="0" bIns="0" rtlCol="0" anchor="t"/>
+          <a:lstStyle/>
+          <a:p>
+            <a:pPr marL="0" indent="0" algn="ctr">
+              <a:buNone/>
+            </a:pPr>
+            <a:r>
+              <a:rPr lang="fr-FR" sz="1150" b="0" dirty="0">
+                <a:solidFill>
+                  <a:srgbClr val="333333"/>
+                </a:solidFill>
+                <a:latin typeface="Poppins"/>
+              </a:rPr>
+              <a:t>Batterie à plat ! J'ai besoin de me reposer pour recharger mon énergie.</a:t>
+            </a:r>
+          </a:p>
+        </p:txBody>
+      </p:sp>
+    </p:spTree>
+  </p:cSld>
+  <p:clrMapOvr>
+    <a:masterClrMapping/>
+  </p:clrMapOvr>
+</p:sld>
+</file>
+
+<file path=ppt/slides/slide6.xml><?xml version="1.0" encoding="utf-8"?>
+<p:sld xmlns:a="http://schemas.openxmlformats.org/drawingml/2006/main" xmlns:r="http://schemas.openxmlformats.org/officeDocument/2006/relationships" xmlns:p="http://schemas.openxmlformats.org/presentationml/2006/main">
   <p:cSld name="Slide 4">
     <p:bg>
       <p:bgPr>
@@ -7282,7 +6604,7 @@
 </p:sld>
 </file>
 
-<file path=ppt/slides/slide6.xml><?xml version="1.0" encoding="utf-8"?>
+<file path=ppt/slides/slide7.xml><?xml version="1.0" encoding="utf-8"?>
 <p:sld xmlns:a="http://schemas.openxmlformats.org/drawingml/2006/main" xmlns:r="http://schemas.openxmlformats.org/officeDocument/2006/relationships" xmlns:p="http://schemas.openxmlformats.org/presentationml/2006/main">
   <p:cSld name="Slide 5">
     <p:bg>
@@ -7363,7 +6685,7 @@
                 <a:ea typeface="Calibri" pitchFamily="34" charset="-122"/>
                 <a:cs typeface="Calibri" pitchFamily="34" charset="-120"/>
               </a:rPr>
-              <a:t>(les supers outils)</a:t>
+              <a:t>(mes équipements de super-héros)</a:t>
             </a:r>
             <a:endParaRPr lang="fr-FR" sz="2800" dirty="0"/>
           </a:p>
@@ -7436,9 +6758,45 @@
           </a:prstGeom>
         </p:spPr>
       </p:pic>
+      <p:sp>
+        <p:nvSpPr>
+          <p:cNvPr id="50" name="Text 50"/>
+          <p:cNvSpPr/>
+          <p:nvPr/>
+        </p:nvSpPr>
+        <p:spPr>
+          <a:xfrm>
+            <a:off x="831409" y="1425124"/>
+            <a:ext cx="6041625" cy="700000"/>
+          </a:xfrm>
+          <a:prstGeom prst="rect">
+            <a:avLst/>
+          </a:prstGeom>
+          <a:noFill/>
+          <a:ln/>
+        </p:spPr>
+        <p:txBody>
+          <a:bodyPr wrap="square" lIns="0" tIns="0" rIns="0" bIns="0" rtlCol="0" anchor="t"/>
+          <a:lstStyle/>
+          <a:p>
+            <a:pPr marL="0" indent="0" algn="ctr">
+              <a:buNone/>
+            </a:pPr>
+            <a:r>
+              <a:rPr lang="fr-FR" sz="2400" b="0" dirty="0">
+                <a:solidFill>
+                  <a:srgbClr val="333333"/>
+                </a:solidFill>
+                <a:latin typeface="Poppins"/>
+              </a:rPr>
+              <a:t>Il existe plein de supers outils pour nous aider au quotidien. Ce sont des aides précieuses pour notre corps !</a:t>
+            </a:r>
+          </a:p>
+        </p:txBody>
+      </p:sp>
       <p:pic>
         <p:nvPicPr>
-          <p:cNvPr id="101" name="Picture 100" descr="image.jpeg"/>
+          <p:cNvPr id="71" name="Equip 71"/>
           <p:cNvPicPr>
             <a:picLocks noChangeAspect="1"/>
           </p:cNvPicPr>
@@ -7452,26 +6810,112 @@
         </p:blipFill>
         <p:spPr>
           <a:xfrm>
-            <a:off x="775973" y="4214827"/>
-            <a:ext cx="2624452" cy="1874574"/>
-          </a:xfrm>
-          <a:prstGeom prst="roundRect">
-            <a:avLst>
-              <a:gd name="adj" fmla="val 3000"/>
-            </a:avLst>
-          </a:prstGeom>
+            <a:off x="408928" y="3221469"/>
+            <a:ext cx="1456640" cy="1196253"/>
+          </a:xfrm>
+          <a:prstGeom prst="ellipse">
+            <a:avLst/>
+          </a:prstGeom>
+          <a:ln w="19050">
+            <a:solidFill>
+              <a:srgbClr val="8B1A2B">
+                <a:alpha val="30000"/>
+              </a:srgbClr>
+            </a:solidFill>
+          </a:ln>
           <a:effectLst>
-            <a:outerShdw blurRad="76200" dist="38100" dir="5400000" algn="t" rotWithShape="0">
+            <a:outerShdw blurRad="50000" dist="20000" dir="5400000" algn="t" rotWithShape="0">
               <a:srgbClr val="8B1A2B">
-                <a:alpha val="22000"/>
+                <a:alpha val="20000"/>
               </a:srgbClr>
             </a:outerShdw>
           </a:effectLst>
         </p:spPr>
       </p:pic>
+      <p:sp>
+        <p:nvSpPr>
+          <p:cNvPr id="72" name="Text 72"/>
+          <p:cNvSpPr/>
+          <p:nvPr/>
+        </p:nvSpPr>
+        <p:spPr>
+          <a:xfrm>
+            <a:off x="1437639" y="2622902"/>
+            <a:ext cx="5317688" cy="1750000"/>
+          </a:xfrm>
+          <a:prstGeom prst="rect">
+            <a:avLst/>
+          </a:prstGeom>
+          <a:noFill/>
+          <a:ln/>
+        </p:spPr>
+        <p:txBody>
+          <a:bodyPr wrap="square" lIns="0" tIns="0" rIns="0" bIns="0" rtlCol="0" anchor="t"/>
+          <a:lstStyle/>
+          <a:p>
+            <a:pPr marL="0" indent="0" algn="l">
+              <a:buNone/>
+            </a:pPr>
+            <a:r>
+              <a:rPr lang="fr-FR" sz="2400" b="1" dirty="0">
+                <a:solidFill>
+                  <a:srgbClr val="8B1A2B"/>
+                </a:solidFill>
+                <a:latin typeface="Poppins"/>
+              </a:rPr>
+              <a:t>Les Boucliers Magiques </a:t>
+            </a:r>
+            <a:r>
+              <a:rPr lang="fr-FR" sz="2400" b="0" dirty="0">
+                <a:solidFill>
+                  <a:srgbClr val="8B1A2B"/>
+                </a:solidFill>
+                <a:latin typeface="Poppins"/>
+              </a:rPr>
+              <a:t>(les attelles)</a:t>
+            </a:r>
+          </a:p>
+        </p:txBody>
+      </p:sp>
+      <p:sp>
+        <p:nvSpPr>
+          <p:cNvPr id="73" name="Text 73"/>
+          <p:cNvSpPr/>
+          <p:nvPr/>
+        </p:nvSpPr>
+        <p:spPr>
+          <a:xfrm>
+            <a:off x="1983275" y="3235469"/>
+            <a:ext cx="4889759" cy="610719"/>
+          </a:xfrm>
+          <a:prstGeom prst="rect">
+            <a:avLst/>
+          </a:prstGeom>
+          <a:noFill/>
+          <a:ln/>
+        </p:spPr>
+        <p:txBody>
+          <a:bodyPr wrap="square" lIns="0" tIns="0" rIns="0" bIns="0" rtlCol="0" anchor="t"/>
+          <a:lstStyle/>
+          <a:p>
+            <a:pPr marL="0" indent="0" algn="l">
+              <a:buNone/>
+            </a:pPr>
+            <a:r>
+              <a:rPr lang="fr-FR" sz="2400" b="0" dirty="0">
+                <a:solidFill>
+                  <a:srgbClr val="333333"/>
+                </a:solidFill>
+                <a:latin typeface="Poppins"/>
+              </a:rPr>
+              <a:t>Ils protègent les articulations (genoux, poignets...) pour qu'elles restent bien en place et ne fassent pas de bêtises.</a:t>
+            </a:r>
+          </a:p>
+        </p:txBody>
+      </p:sp>
       <p:pic>
         <p:nvPicPr>
-          <p:cNvPr id="102" name="Picture 101" descr="image.jpeg"/>
+          <p:cNvPr id="74" name="Equip 74"/>
           <p:cNvPicPr>
             <a:picLocks noChangeAspect="1"/>
           </p:cNvPicPr>
@@ -7485,26 +6929,112 @@
         </p:blipFill>
         <p:spPr>
           <a:xfrm>
-            <a:off x="4238625" y="7163385"/>
-            <a:ext cx="2595825" cy="1914632"/>
-          </a:xfrm>
-          <a:prstGeom prst="roundRect">
-            <a:avLst>
-              <a:gd name="adj" fmla="val 3000"/>
-            </a:avLst>
-          </a:prstGeom>
+            <a:off x="457200" y="5586739"/>
+            <a:ext cx="1432486" cy="1186358"/>
+          </a:xfrm>
+          <a:prstGeom prst="ellipse">
+            <a:avLst/>
+          </a:prstGeom>
+          <a:ln w="19050">
+            <a:solidFill>
+              <a:srgbClr val="8B1A2B">
+                <a:alpha val="30000"/>
+              </a:srgbClr>
+            </a:solidFill>
+          </a:ln>
           <a:effectLst>
-            <a:outerShdw blurRad="76200" dist="38100" dir="5400000" algn="t" rotWithShape="0">
+            <a:outerShdw blurRad="50000" dist="20000" dir="5400000" algn="t" rotWithShape="0">
               <a:srgbClr val="8B1A2B">
-                <a:alpha val="22000"/>
+                <a:alpha val="20000"/>
               </a:srgbClr>
             </a:outerShdw>
           </a:effectLst>
         </p:spPr>
       </p:pic>
+      <p:sp>
+        <p:nvSpPr>
+          <p:cNvPr id="75" name="Text 75"/>
+          <p:cNvSpPr/>
+          <p:nvPr/>
+        </p:nvSpPr>
+        <p:spPr>
+          <a:xfrm>
+            <a:off x="1555345" y="4771859"/>
+            <a:ext cx="5507503" cy="1750000"/>
+          </a:xfrm>
+          <a:prstGeom prst="rect">
+            <a:avLst/>
+          </a:prstGeom>
+          <a:noFill/>
+          <a:ln/>
+        </p:spPr>
+        <p:txBody>
+          <a:bodyPr wrap="square" lIns="0" tIns="0" rIns="0" bIns="0" rtlCol="0" anchor="t"/>
+          <a:lstStyle/>
+          <a:p>
+            <a:pPr marL="0" indent="0" algn="l">
+              <a:buNone/>
+            </a:pPr>
+            <a:r>
+              <a:rPr lang="fr-FR" sz="2400" b="1" dirty="0">
+                <a:solidFill>
+                  <a:srgbClr val="8B1A2B"/>
+                </a:solidFill>
+                <a:latin typeface="Poppins"/>
+              </a:rPr>
+              <a:t>L'Armure Secrète </a:t>
+            </a:r>
+            <a:r>
+              <a:rPr lang="fr-FR" sz="2400" b="0" dirty="0">
+                <a:solidFill>
+                  <a:srgbClr val="8B1A2B"/>
+                </a:solidFill>
+                <a:latin typeface="Poppins"/>
+              </a:rPr>
+              <a:t>(les vêtements de compression)</a:t>
+            </a:r>
+          </a:p>
+        </p:txBody>
+      </p:sp>
+      <p:sp>
+        <p:nvSpPr>
+          <p:cNvPr id="76" name="Text 76"/>
+          <p:cNvSpPr/>
+          <p:nvPr/>
+        </p:nvSpPr>
+        <p:spPr>
+          <a:xfrm>
+            <a:off x="2079500" y="5675996"/>
+            <a:ext cx="4793534" cy="1200000"/>
+          </a:xfrm>
+          <a:prstGeom prst="rect">
+            <a:avLst/>
+          </a:prstGeom>
+          <a:noFill/>
+          <a:ln/>
+        </p:spPr>
+        <p:txBody>
+          <a:bodyPr wrap="square" lIns="0" tIns="0" rIns="0" bIns="0" rtlCol="0" anchor="t"/>
+          <a:lstStyle/>
+          <a:p>
+            <a:pPr marL="0" indent="0" algn="l">
+              <a:buNone/>
+            </a:pPr>
+            <a:r>
+              <a:rPr lang="fr-FR" sz="2400" b="0" dirty="0">
+                <a:solidFill>
+                  <a:srgbClr val="333333"/>
+                </a:solidFill>
+                <a:latin typeface="Poppins"/>
+              </a:rPr>
+              <a:t>Elle serre un petit peu, comme un gros câlin, pour aider le corps à se tenir bien droit et à moins se fatiguer.</a:t>
+            </a:r>
+          </a:p>
+        </p:txBody>
+      </p:sp>
       <p:pic>
         <p:nvPicPr>
-          <p:cNvPr id="103" name="Picture 102" descr="image.png"/>
+          <p:cNvPr id="77" name="Equip 77"/>
           <p:cNvPicPr>
             <a:picLocks noChangeAspect="1"/>
           </p:cNvPicPr>
@@ -7518,276 +7048,38 @@
         </p:blipFill>
         <p:spPr>
           <a:xfrm>
-            <a:off x="2409825" y="5768995"/>
-            <a:ext cx="2550676" cy="1755747"/>
-          </a:xfrm>
-          <a:prstGeom prst="roundRect">
-            <a:avLst>
-              <a:gd name="adj" fmla="val 3000"/>
-            </a:avLst>
-          </a:prstGeom>
-          <a:effectLst>
-            <a:outerShdw blurRad="76200" dist="38100" dir="5400000" algn="t" rotWithShape="0">
-              <a:srgbClr val="8B1A2B">
-                <a:alpha val="22000"/>
-              </a:srgbClr>
-            </a:outerShdw>
-          </a:effectLst>
-        </p:spPr>
-      </p:pic>
-      <p:pic>
-        <p:nvPicPr>
-          <p:cNvPr id="104" name="Picture 103" descr="image.jpg"/>
-          <p:cNvPicPr>
-            <a:picLocks noChangeAspect="1"/>
-          </p:cNvPicPr>
-          <p:nvPr/>
-        </p:nvPicPr>
-        <p:blipFill>
-          <a:blip r:embed="rId8"/>
-          <a:stretch>
-            <a:fillRect/>
-          </a:stretch>
-        </p:blipFill>
-        <p:spPr>
-          <a:xfrm>
-            <a:off x="916190" y="7199865"/>
-            <a:ext cx="2560435" cy="1872000"/>
-          </a:xfrm>
-          <a:prstGeom prst="roundRect">
-            <a:avLst>
-              <a:gd name="adj" fmla="val 3000"/>
-            </a:avLst>
-          </a:prstGeom>
-          <a:effectLst>
-            <a:outerShdw blurRad="76200" dist="38100" dir="5400000" algn="t" rotWithShape="0">
-              <a:srgbClr val="8B1A2B">
-                <a:alpha val="22000"/>
-              </a:srgbClr>
-            </a:outerShdw>
-          </a:effectLst>
-        </p:spPr>
-      </p:pic>
-      <p:pic>
-        <p:nvPicPr>
-          <p:cNvPr id="105" name="Picture 104" descr="image.jpg"/>
-          <p:cNvPicPr>
-            <a:picLocks noChangeAspect="1"/>
-          </p:cNvPicPr>
-          <p:nvPr/>
-        </p:nvPicPr>
-        <p:blipFill>
-          <a:blip r:embed="rId9"/>
-          <a:stretch>
-            <a:fillRect/>
-          </a:stretch>
-        </p:blipFill>
-        <p:spPr>
-          <a:xfrm>
-            <a:off x="4162425" y="4222027"/>
-            <a:ext cx="2672025" cy="1872000"/>
-          </a:xfrm>
-          <a:prstGeom prst="roundRect">
-            <a:avLst>
-              <a:gd name="adj" fmla="val 3000"/>
-            </a:avLst>
-          </a:prstGeom>
-          <a:effectLst>
-            <a:outerShdw blurRad="76200" dist="38100" dir="5400000" algn="t" rotWithShape="0">
-              <a:srgbClr val="8B1A2B">
-                <a:alpha val="22000"/>
-              </a:srgbClr>
-            </a:outerShdw>
-          </a:effectLst>
-        </p:spPr>
-      </p:pic>
-      <p:sp>
-        <p:nvSpPr>
-          <p:cNvPr id="352" name="Dot 6-2"/>
-          <p:cNvSpPr/>
-          <p:nvPr/>
-        </p:nvSpPr>
-        <p:spPr>
-          <a:xfrm>
-            <a:off x="4920901" y="2336400"/>
-            <a:ext cx="79200" cy="79200"/>
+            <a:off x="520569" y="8168217"/>
+            <a:ext cx="1462706" cy="1175742"/>
           </a:xfrm>
           <a:prstGeom prst="ellipse">
             <a:avLst/>
           </a:prstGeom>
-          <a:solidFill>
-            <a:srgbClr val="FFFFFF">
-              <a:alpha val="65000"/>
-            </a:srgbClr>
-          </a:solidFill>
-          <a:ln w="12700">
+          <a:ln w="19050">
             <a:solidFill>
               <a:srgbClr val="8B1A2B">
                 <a:alpha val="30000"/>
               </a:srgbClr>
             </a:solidFill>
           </a:ln>
-        </p:spPr>
-        <p:txBody>
-          <a:bodyPr/>
-          <a:lstStyle/>
-          <a:p>
-            <a:endParaRPr lang="fr-FR"/>
-          </a:p>
-        </p:txBody>
-      </p:sp>
-      <p:sp>
-        <p:nvSpPr>
-          <p:cNvPr id="351" name="Dot 6-1"/>
-          <p:cNvSpPr/>
-          <p:nvPr/>
-        </p:nvSpPr>
-        <p:spPr>
-          <a:xfrm>
-            <a:off x="5074955" y="2207702"/>
-            <a:ext cx="125999" cy="125999"/>
-          </a:xfrm>
-          <a:prstGeom prst="ellipse">
-            <a:avLst/>
-          </a:prstGeom>
-          <a:solidFill>
-            <a:srgbClr val="FFFFFF">
-              <a:alpha val="65000"/>
-            </a:srgbClr>
-          </a:solidFill>
-          <a:ln w="12700">
-            <a:solidFill>
+          <a:effectLst>
+            <a:outerShdw blurRad="50000" dist="20000" dir="5400000" algn="t" rotWithShape="0">
               <a:srgbClr val="8B1A2B">
-                <a:alpha val="30000"/>
-              </a:srgbClr>
-            </a:solidFill>
-          </a:ln>
-        </p:spPr>
-        <p:txBody>
-          <a:bodyPr/>
-          <a:lstStyle/>
-          <a:p>
-            <a:endParaRPr lang="fr-FR"/>
-          </a:p>
-        </p:txBody>
-      </p:sp>
-      <p:sp>
-        <p:nvSpPr>
-          <p:cNvPr id="350" name="Dot 6-0"/>
-          <p:cNvSpPr/>
-          <p:nvPr/>
-        </p:nvSpPr>
-        <p:spPr>
-          <a:xfrm flipH="1">
-            <a:off x="5324241" y="2039404"/>
-            <a:ext cx="169809" cy="168298"/>
-          </a:xfrm>
-          <a:prstGeom prst="ellipse">
-            <a:avLst/>
-          </a:prstGeom>
-          <a:solidFill>
-            <a:srgbClr val="FFFFFF">
-              <a:alpha val="65000"/>
-            </a:srgbClr>
-          </a:solidFill>
-          <a:ln w="12700">
-            <a:solidFill>
-              <a:srgbClr val="8B1A2B">
-                <a:alpha val="30000"/>
-              </a:srgbClr>
-            </a:solidFill>
-          </a:ln>
-        </p:spPr>
-        <p:txBody>
-          <a:bodyPr/>
-          <a:lstStyle/>
-          <a:p>
-            <a:endParaRPr lang="fr-FR"/>
-          </a:p>
-        </p:txBody>
-      </p:sp>
-      <p:sp>
-        <p:nvSpPr>
-          <p:cNvPr id="205" name="HeroBubble 6"/>
-          <p:cNvSpPr/>
-          <p:nvPr/>
-        </p:nvSpPr>
-        <p:spPr>
-          <a:xfrm>
-            <a:off x="5538451" y="2171702"/>
-            <a:ext cx="1295999" cy="1295999"/>
-          </a:xfrm>
-          <a:prstGeom prst="ellipse">
-            <a:avLst/>
-          </a:prstGeom>
-          <a:solidFill>
-            <a:srgbClr val="FFFFFF">
-              <a:alpha val="70000"/>
-            </a:srgbClr>
-          </a:solidFill>
-          <a:ln w="15875">
-            <a:solidFill>
-              <a:srgbClr val="8B1A2B">
-                <a:alpha val="35000"/>
-              </a:srgbClr>
-            </a:solidFill>
-          </a:ln>
-          <a:effectLst>
-            <a:outerShdw blurRad="40000" dist="20000" dir="5400000" algn="t" rotWithShape="0">
-              <a:srgbClr val="8B1A2B">
-                <a:alpha val="12000"/>
+                <a:alpha val="20000"/>
               </a:srgbClr>
             </a:outerShdw>
           </a:effectLst>
         </p:spPr>
-        <p:txBody>
-          <a:bodyPr/>
-          <a:lstStyle/>
-          <a:p>
-            <a:endParaRPr lang="fr-FR"/>
-          </a:p>
-        </p:txBody>
-      </p:sp>
-      <p:pic>
-        <p:nvPicPr>
-          <p:cNvPr id="106" name="Picture 105" descr="image.jpeg"/>
-          <p:cNvPicPr>
-            <a:picLocks noChangeAspect="1"/>
-          </p:cNvPicPr>
-          <p:nvPr/>
-        </p:nvPicPr>
-        <p:blipFill>
-          <a:blip r:embed="rId10"/>
-          <a:stretch>
-            <a:fillRect/>
-          </a:stretch>
-        </p:blipFill>
-        <p:spPr>
-          <a:xfrm>
-            <a:off x="5739304" y="2324298"/>
-            <a:ext cx="1007999" cy="1007999"/>
-          </a:xfrm>
-          <a:prstGeom prst="rect">
-            <a:avLst/>
-          </a:prstGeom>
-        </p:spPr>
       </p:pic>
       <p:sp>
         <p:nvSpPr>
-          <p:cNvPr id="17" name="Text 1">
-            <a:extLst>
-              <a:ext uri="{FF2B5EF4-FFF2-40B4-BE49-F238E27FC236}">
-                <a16:creationId xmlns:a16="http://schemas.microsoft.com/office/drawing/2014/main" id="{E2DCB18F-0F80-8B4A-AAD9-E7E70105770E}"/>
-              </a:ext>
-            </a:extLst>
-          </p:cNvPr>
-          <p:cNvSpPr/>
-          <p:nvPr/>
-        </p:nvSpPr>
-        <p:spPr>
-          <a:xfrm>
-            <a:off x="457200" y="1615750"/>
-            <a:ext cx="4476000" cy="1620000"/>
+          <p:cNvPr id="78" name="Text 78"/>
+          <p:cNvSpPr/>
+          <p:nvPr/>
+        </p:nvSpPr>
+        <p:spPr>
+          <a:xfrm>
+            <a:off x="1702300" y="7318044"/>
+            <a:ext cx="5317688" cy="1750000"/>
           </a:xfrm>
           <a:prstGeom prst="rect">
             <a:avLst/>
@@ -7799,41 +7091,62 @@
           <a:bodyPr wrap="square" lIns="0" tIns="0" rIns="0" bIns="0" rtlCol="0" anchor="t"/>
           <a:lstStyle/>
           <a:p>
-            <a:pPr marL="0" indent="0" algn="ctr">
+            <a:pPr marL="0" indent="0" algn="l">
               <a:buNone/>
             </a:pPr>
-            <a:endParaRPr lang="fr-FR" sz="2400" dirty="0">
-              <a:solidFill>
-                <a:srgbClr val="333333"/>
-              </a:solidFill>
-              <a:latin typeface="Poppins"/>
-            </a:endParaRPr>
-          </a:p>
-          <a:p>
-            <a:pPr marL="0" indent="0" algn="ctr">
+            <a:r>
+              <a:rPr lang="fr-FR" sz="2400" b="1" dirty="0">
+                <a:solidFill>
+                  <a:srgbClr val="8B1A2B"/>
+                </a:solidFill>
+                <a:latin typeface="Poppins"/>
+              </a:rPr>
+              <a:t>Les Super-Propulseurs </a:t>
+            </a:r>
+            <a:r>
+              <a:rPr lang="fr-FR" sz="2400" b="0" dirty="0">
+                <a:solidFill>
+                  <a:srgbClr val="8B1A2B"/>
+                </a:solidFill>
+                <a:latin typeface="Poppins"/>
+              </a:rPr>
+              <a:t>(les béquilles ou le fauteuil)</a:t>
+            </a:r>
+          </a:p>
+        </p:txBody>
+      </p:sp>
+      <p:sp>
+        <p:nvSpPr>
+          <p:cNvPr id="79" name="Text 79"/>
+          <p:cNvSpPr/>
+          <p:nvPr/>
+        </p:nvSpPr>
+        <p:spPr>
+          <a:xfrm>
+            <a:off x="2079500" y="8209482"/>
+            <a:ext cx="4793534" cy="1200000"/>
+          </a:xfrm>
+          <a:prstGeom prst="rect">
+            <a:avLst/>
+          </a:prstGeom>
+          <a:noFill/>
+          <a:ln/>
+        </p:spPr>
+        <p:txBody>
+          <a:bodyPr wrap="square" lIns="0" tIns="0" rIns="0" bIns="0" rtlCol="0" anchor="t"/>
+          <a:lstStyle/>
+          <a:p>
+            <a:pPr marL="0" indent="0" algn="l">
               <a:buNone/>
             </a:pPr>
             <a:r>
-              <a:rPr lang="fr-FR" sz="2400" dirty="0">
+              <a:rPr lang="fr-FR" sz="2400" b="0" dirty="0">
                 <a:solidFill>
                   <a:srgbClr val="333333"/>
                 </a:solidFill>
                 <a:latin typeface="Poppins"/>
               </a:rPr>
-              <a:t>Les béquilles, les attelles, les vêtements de compression.</a:t>
-            </a:r>
-            <a:endParaRPr lang="fr-FR" sz="2400" dirty="0"/>
-          </a:p>
-          <a:p>
-            <a:pPr algn="ctr"/>
-            <a:r>
-              <a:rPr lang="fr-FR" sz="2400" b="1" dirty="0">
-                <a:solidFill>
-                  <a:srgbClr val="333333"/>
-                </a:solidFill>
-                <a:latin typeface="Poppins"/>
-              </a:rPr>
-              <a:t>Ce sont nos outils de super-héros pour aider notre colle spéciale !</a:t>
+              <a:t>Quand les jambes n'ont plus de batterie, ils nous aident à avancer et à nous reposer en même temps !</a:t>
             </a:r>
           </a:p>
         </p:txBody>
@@ -7846,7 +7159,7 @@
 </p:sld>
 </file>
 
-<file path=ppt/slides/slide7.xml><?xml version="1.0" encoding="utf-8"?>
+<file path=ppt/slides/slide8.xml><?xml version="1.0" encoding="utf-8"?>
 <p:sld xmlns:a="http://schemas.openxmlformats.org/drawingml/2006/main" xmlns:r="http://schemas.openxmlformats.org/officeDocument/2006/relationships" xmlns:p="http://schemas.openxmlformats.org/presentationml/2006/main">
   <p:cSld name="Slide 6">
     <p:bg>
@@ -7939,7 +7252,7 @@
         </p:nvSpPr>
         <p:spPr>
           <a:xfrm>
-            <a:off x="592319" y="3006060"/>
+            <a:off x="591510" y="3203260"/>
             <a:ext cx="5040000" cy="1345000"/>
           </a:xfrm>
           <a:prstGeom prst="rect">
@@ -8007,7 +7320,7 @@
         </p:blipFill>
         <p:spPr>
           <a:xfrm>
-            <a:off x="786951" y="5096550"/>
+            <a:off x="786951" y="5352128"/>
             <a:ext cx="5853112" cy="3211241"/>
           </a:xfrm>
           <a:prstGeom prst="roundRect">
@@ -8031,9 +7344,9 @@
           <p:nvPr/>
         </p:nvSpPr>
         <p:spPr>
-          <a:xfrm>
-            <a:off x="5553119" y="2644641"/>
-            <a:ext cx="79200" cy="79200"/>
+          <a:xfrm flipH="1" flipV="1">
+            <a:off x="5525519" y="2776444"/>
+            <a:ext cx="76200" cy="45719"/>
           </a:xfrm>
           <a:prstGeom prst="ellipse">
             <a:avLst/>
@@ -8067,7 +7380,7 @@
         </p:nvSpPr>
         <p:spPr>
           <a:xfrm>
-            <a:off x="5632612" y="2816701"/>
+            <a:off x="5627051" y="2934883"/>
             <a:ext cx="125999" cy="125999"/>
           </a:xfrm>
           <a:prstGeom prst="ellipse">
@@ -8102,7 +7415,7 @@
         </p:nvSpPr>
         <p:spPr>
           <a:xfrm>
-            <a:off x="5735767" y="2953759"/>
+            <a:off x="5772960" y="3148840"/>
             <a:ext cx="180000" cy="180000"/>
           </a:xfrm>
           <a:prstGeom prst="ellipse">
@@ -8137,7 +7450,7 @@
         </p:nvSpPr>
         <p:spPr>
           <a:xfrm>
-            <a:off x="5664960" y="3081589"/>
+            <a:off x="5747782" y="3311824"/>
             <a:ext cx="1295999" cy="1295999"/>
           </a:xfrm>
           <a:prstGeom prst="ellipse">
@@ -8187,7 +7500,7 @@
         </p:blipFill>
         <p:spPr>
           <a:xfrm>
-            <a:off x="5878967" y="3234964"/>
+            <a:off x="5952960" y="3371761"/>
             <a:ext cx="1007999" cy="1007999"/>
           </a:xfrm>
           <a:prstGeom prst="rect">
@@ -8276,8 +7589,8 @@
         </p:nvSpPr>
         <p:spPr>
           <a:xfrm>
-            <a:off x="578561" y="1152000"/>
-            <a:ext cx="6250864" cy="1569660"/>
+            <a:off x="500000" y="1108924"/>
+            <a:ext cx="6250864" cy="1938992"/>
           </a:xfrm>
           <a:prstGeom prst="rect">
             <a:avLst/>
@@ -8300,6 +7613,8 @@
               </a:rPr>
               <a:t>Sois un super copain !</a:t>
             </a:r>
+          </a:p>
+          <a:p>
             <a:endParaRPr lang="fr-FR" sz="2400" b="1" dirty="0"/>
           </a:p>
           <a:p>
@@ -8312,7 +7627,7 @@
                 <a:ea typeface="Calibri" pitchFamily="34" charset="-122"/>
                 <a:cs typeface="Calibri" pitchFamily="34" charset="-120"/>
               </a:rPr>
-              <a:t>Ton copain avec le SED a une colle spéciale qui le rend plus fragile. Ce n'est pas de sa faute, et il a besoin de ta gentillesse !</a:t>
+              <a:t>Un copain ou une copine avec le SED a une colle spéciale qui le rend plus fragile. Ce n'est pas de sa faute, et il a besoin de ta gentillesse !</a:t>
             </a:r>
             <a:endParaRPr lang="fr-FR" sz="2400" dirty="0"/>
           </a:p>
@@ -8361,454 +7676,6 @@
           </a:p>
         </p:txBody>
       </p:sp>
-    </p:spTree>
-  </p:cSld>
-  <p:clrMapOvr>
-    <a:masterClrMapping/>
-  </p:clrMapOvr>
-</p:sld>
-</file>
-
-<file path=ppt/slides/slide8.xml><?xml version="1.0" encoding="utf-8"?>
-<p:sld xmlns:a="http://schemas.openxmlformats.org/drawingml/2006/main" xmlns:r="http://schemas.openxmlformats.org/officeDocument/2006/relationships" xmlns:p="http://schemas.openxmlformats.org/presentationml/2006/main">
-  <p:cSld name="Slide 7">
-    <p:bg>
-      <p:bgPr>
-        <a:blipFill dpi="0" rotWithShape="1">
-          <a:blip r:embed="rId3">
-            <a:lum/>
-          </a:blip>
-          <a:srcRect/>
-          <a:stretch>
-            <a:fillRect/>
-          </a:stretch>
-        </a:blipFill>
-        <a:effectLst/>
-      </p:bgPr>
-    </p:bg>
-    <p:spTree>
-      <p:nvGrpSpPr>
-        <p:cNvPr id="1" name=""/>
-        <p:cNvGrpSpPr/>
-        <p:nvPr/>
-      </p:nvGrpSpPr>
-      <p:grpSpPr>
-        <a:xfrm>
-          <a:off x="0" y="0"/>
-          <a:ext cx="0" cy="0"/>
-          <a:chOff x="0" y="0"/>
-          <a:chExt cx="0" cy="0"/>
-        </a:xfrm>
-      </p:grpSpPr>
-      <p:sp>
-        <p:nvSpPr>
-          <p:cNvPr id="2" name="Text 0"/>
-          <p:cNvSpPr/>
-          <p:nvPr/>
-        </p:nvSpPr>
-        <p:spPr>
-          <a:xfrm>
-            <a:off x="457200" y="360000"/>
-            <a:ext cx="6647688" cy="648000"/>
-          </a:xfrm>
-          <a:prstGeom prst="rect">
-            <a:avLst/>
-          </a:prstGeom>
-          <a:noFill/>
-          <a:ln/>
-        </p:spPr>
-        <p:txBody>
-          <a:bodyPr wrap="square" lIns="0" tIns="0" rIns="0" bIns="0" rtlCol="0" anchor="ctr"/>
-          <a:lstStyle/>
-          <a:p>
-            <a:pPr marL="0" indent="0" algn="ctr">
-              <a:buNone/>
-            </a:pPr>
-            <a:r>
-              <a:rPr lang="en-US" sz="3000" b="1">
-                <a:solidFill>
-                  <a:srgbClr val="8B1A2B"/>
-                </a:solidFill>
-                <a:latin typeface="Poppins" pitchFamily="34" charset="0"/>
-                <a:ea typeface="Calibri" pitchFamily="34" charset="-122"/>
-                <a:cs typeface="Calibri" pitchFamily="34" charset="-120"/>
-              </a:rPr>
-              <a:t>Ensemble, on est plus forts !</a:t>
-            </a:r>
-            <a:endParaRPr lang="en-US" sz="3000"/>
-          </a:p>
-        </p:txBody>
-      </p:sp>
-      <p:pic>
-        <p:nvPicPr>
-          <p:cNvPr id="3" name="Image 0" descr="unpacked/ppt/media/image_3304ECD1.jpg"/>
-          <p:cNvPicPr>
-            <a:picLocks noChangeAspect="1"/>
-          </p:cNvPicPr>
-          <p:nvPr/>
-        </p:nvPicPr>
-        <p:blipFill>
-          <a:blip r:embed="rId4"/>
-          <a:srcRect l="4962" r="4962"/>
-          <a:stretch/>
-        </p:blipFill>
-        <p:spPr>
-          <a:xfrm>
-            <a:off x="914781" y="1490708"/>
-            <a:ext cx="5733288" cy="3657796"/>
-          </a:xfrm>
-          <a:prstGeom prst="roundRect">
-            <a:avLst>
-              <a:gd name="adj" fmla="val 3000"/>
-            </a:avLst>
-          </a:prstGeom>
-          <a:effectLst>
-            <a:outerShdw blurRad="76200" dist="38100" dir="5400000" algn="t" rotWithShape="0">
-              <a:srgbClr val="8B1A2B">
-                <a:alpha val="22000"/>
-              </a:srgbClr>
-            </a:outerShdw>
-          </a:effectLst>
-        </p:spPr>
-      </p:pic>
-      <p:sp>
-        <p:nvSpPr>
-          <p:cNvPr id="4" name="Text 1"/>
-          <p:cNvSpPr/>
-          <p:nvPr/>
-        </p:nvSpPr>
-        <p:spPr>
-          <a:xfrm>
-            <a:off x="914781" y="5771474"/>
-            <a:ext cx="5533644" cy="2620845"/>
-          </a:xfrm>
-          <a:prstGeom prst="rect">
-            <a:avLst/>
-          </a:prstGeom>
-          <a:noFill/>
-          <a:ln/>
-        </p:spPr>
-        <p:txBody>
-          <a:bodyPr/>
-          <a:lstStyle/>
-          <a:p>
-            <a:pPr algn="l"/>
-            <a:r>
-              <a:rPr lang="fr-FR" sz="2400" dirty="0">
-                <a:solidFill>
-                  <a:srgbClr val="333333"/>
-                </a:solidFill>
-                <a:latin typeface="Poppins"/>
-              </a:rPr>
-              <a:t>On peut parler, se comprendre et </a:t>
-            </a:r>
-          </a:p>
-          <a:p>
-            <a:pPr algn="l"/>
-            <a:r>
-              <a:rPr lang="fr-FR" sz="2400" dirty="0">
-                <a:solidFill>
-                  <a:srgbClr val="333333"/>
-                </a:solidFill>
-                <a:latin typeface="Poppins"/>
-              </a:rPr>
-              <a:t>Trouver des solutions ensemble.</a:t>
-            </a:r>
-          </a:p>
-          <a:p>
-            <a:pPr algn="l"/>
-            <a:endParaRPr lang="fr-FR" sz="2400" dirty="0">
-              <a:solidFill>
-                <a:srgbClr val="333333"/>
-              </a:solidFill>
-              <a:latin typeface="Poppins"/>
-            </a:endParaRPr>
-          </a:p>
-          <a:p>
-            <a:pPr algn="l">
-              <a:spcBef>
-                <a:spcPts val="400"/>
-              </a:spcBef>
-            </a:pPr>
-            <a:r>
-              <a:rPr lang="fr-FR" sz="2400" b="1" dirty="0">
-                <a:solidFill>
-                  <a:srgbClr val="333333"/>
-                </a:solidFill>
-                <a:latin typeface="Poppins"/>
-              </a:rPr>
-              <a:t>C'est important de se sentir entouré.</a:t>
-            </a:r>
-          </a:p>
-          <a:p>
-            <a:pPr algn="l">
-              <a:spcBef>
-                <a:spcPts val="400"/>
-              </a:spcBef>
-            </a:pPr>
-            <a:endParaRPr lang="fr-FR" sz="2400" b="1" dirty="0">
-              <a:solidFill>
-                <a:srgbClr val="333333"/>
-              </a:solidFill>
-              <a:latin typeface="Poppins"/>
-            </a:endParaRPr>
-          </a:p>
-          <a:p>
-            <a:pPr algn="l">
-              <a:spcBef>
-                <a:spcPts val="400"/>
-              </a:spcBef>
-            </a:pPr>
-            <a:r>
-              <a:rPr lang="fr-FR" sz="2400" b="1" dirty="0">
-                <a:solidFill>
-                  <a:srgbClr val="8B1A2B"/>
-                </a:solidFill>
-                <a:latin typeface="Poppins"/>
-              </a:rPr>
-              <a:t>Tu es un super-héros, n'oublie jamais !</a:t>
-            </a:r>
-          </a:p>
-        </p:txBody>
-      </p:sp>
-      <p:sp>
-        <p:nvSpPr>
-          <p:cNvPr id="372" name="Dot 8-2"/>
-          <p:cNvSpPr/>
-          <p:nvPr/>
-        </p:nvSpPr>
-        <p:spPr>
-          <a:xfrm>
-            <a:off x="5457825" y="6095920"/>
-            <a:ext cx="79200" cy="79200"/>
-          </a:xfrm>
-          <a:prstGeom prst="ellipse">
-            <a:avLst/>
-          </a:prstGeom>
-          <a:solidFill>
-            <a:srgbClr val="FFFFFF">
-              <a:alpha val="65000"/>
-            </a:srgbClr>
-          </a:solidFill>
-          <a:ln w="12700">
-            <a:solidFill>
-              <a:srgbClr val="8B1A2B">
-                <a:alpha val="30000"/>
-              </a:srgbClr>
-            </a:solidFill>
-          </a:ln>
-        </p:spPr>
-        <p:txBody>
-          <a:bodyPr/>
-          <a:lstStyle/>
-          <a:p>
-            <a:endParaRPr lang="fr-FR"/>
-          </a:p>
-        </p:txBody>
-      </p:sp>
-      <p:sp>
-        <p:nvSpPr>
-          <p:cNvPr id="371" name="Dot 8-1"/>
-          <p:cNvSpPr/>
-          <p:nvPr/>
-        </p:nvSpPr>
-        <p:spPr>
-          <a:xfrm>
-            <a:off x="5562001" y="6258719"/>
-            <a:ext cx="125999" cy="125999"/>
-          </a:xfrm>
-          <a:prstGeom prst="ellipse">
-            <a:avLst/>
-          </a:prstGeom>
-          <a:solidFill>
-            <a:srgbClr val="FFFFFF">
-              <a:alpha val="65000"/>
-            </a:srgbClr>
-          </a:solidFill>
-          <a:ln w="12700">
-            <a:solidFill>
-              <a:srgbClr val="8B1A2B">
-                <a:alpha val="30000"/>
-              </a:srgbClr>
-            </a:solidFill>
-          </a:ln>
-        </p:spPr>
-        <p:txBody>
-          <a:bodyPr/>
-          <a:lstStyle/>
-          <a:p>
-            <a:endParaRPr lang="fr-FR"/>
-          </a:p>
-        </p:txBody>
-      </p:sp>
-      <p:sp>
-        <p:nvSpPr>
-          <p:cNvPr id="370" name="Dot 8-0"/>
-          <p:cNvSpPr/>
-          <p:nvPr/>
-        </p:nvSpPr>
-        <p:spPr>
-          <a:xfrm>
-            <a:off x="5635158" y="6409198"/>
-            <a:ext cx="180000" cy="180000"/>
-          </a:xfrm>
-          <a:prstGeom prst="ellipse">
-            <a:avLst/>
-          </a:prstGeom>
-          <a:solidFill>
-            <a:srgbClr val="FFFFFF">
-              <a:alpha val="65000"/>
-            </a:srgbClr>
-          </a:solidFill>
-          <a:ln w="12700">
-            <a:solidFill>
-              <a:srgbClr val="8B1A2B">
-                <a:alpha val="30000"/>
-              </a:srgbClr>
-            </a:solidFill>
-          </a:ln>
-        </p:spPr>
-        <p:txBody>
-          <a:bodyPr/>
-          <a:lstStyle/>
-          <a:p>
-            <a:endParaRPr lang="fr-FR"/>
-          </a:p>
-        </p:txBody>
-      </p:sp>
-      <p:sp>
-        <p:nvSpPr>
-          <p:cNvPr id="207" name="HeroBubble 8"/>
-          <p:cNvSpPr/>
-          <p:nvPr/>
-        </p:nvSpPr>
-        <p:spPr>
-          <a:xfrm>
-            <a:off x="5835539" y="6258719"/>
-            <a:ext cx="1295999" cy="1295999"/>
-          </a:xfrm>
-          <a:prstGeom prst="ellipse">
-            <a:avLst/>
-          </a:prstGeom>
-          <a:solidFill>
-            <a:srgbClr val="FFFFFF">
-              <a:alpha val="70000"/>
-            </a:srgbClr>
-          </a:solidFill>
-          <a:ln w="15875">
-            <a:solidFill>
-              <a:srgbClr val="8B1A2B">
-                <a:alpha val="35000"/>
-              </a:srgbClr>
-            </a:solidFill>
-          </a:ln>
-          <a:effectLst>
-            <a:outerShdw blurRad="40000" dist="20000" dir="5400000" algn="t" rotWithShape="0">
-              <a:srgbClr val="8B1A2B">
-                <a:alpha val="12000"/>
-              </a:srgbClr>
-            </a:outerShdw>
-          </a:effectLst>
-        </p:spPr>
-        <p:txBody>
-          <a:bodyPr/>
-          <a:lstStyle/>
-          <a:p>
-            <a:endParaRPr lang="fr-FR"/>
-          </a:p>
-        </p:txBody>
-      </p:sp>
-      <p:pic>
-        <p:nvPicPr>
-          <p:cNvPr id="5" name="Image 1" descr="unpacked/ppt/media/image_E673173E.jpg"/>
-          <p:cNvPicPr>
-            <a:picLocks noChangeAspect="1"/>
-          </p:cNvPicPr>
-          <p:nvPr/>
-        </p:nvPicPr>
-        <p:blipFill>
-          <a:blip r:embed="rId5"/>
-          <a:stretch>
-            <a:fillRect/>
-          </a:stretch>
-        </p:blipFill>
-        <p:spPr>
-          <a:xfrm>
-            <a:off x="6054851" y="6384718"/>
-            <a:ext cx="1007999" cy="1007999"/>
-          </a:xfrm>
-          <a:prstGeom prst="rect">
-            <a:avLst/>
-          </a:prstGeom>
-        </p:spPr>
-      </p:pic>
-      <p:sp>
-        <p:nvSpPr>
-          <p:cNvPr id="99" name="Footer"/>
-          <p:cNvSpPr/>
-          <p:nvPr/>
-        </p:nvSpPr>
-        <p:spPr>
-          <a:xfrm>
-            <a:off x="500000" y="10300000"/>
-            <a:ext cx="6562850" cy="300000"/>
-          </a:xfrm>
-          <a:prstGeom prst="rect">
-            <a:avLst/>
-          </a:prstGeom>
-          <a:noFill/>
-          <a:ln/>
-        </p:spPr>
-        <p:txBody>
-          <a:bodyPr wrap="square" lIns="0" tIns="0" rIns="0" bIns="0" rtlCol="0" anchor="ctr"/>
-          <a:lstStyle/>
-          <a:p>
-            <a:pPr marL="0" indent="0" algn="ctr">
-              <a:buNone/>
-            </a:pPr>
-            <a:r>
-              <a:rPr lang="fr-FR" sz="1000" i="1">
-                <a:solidFill>
-                  <a:srgbClr val="666666"/>
-                </a:solidFill>
-                <a:latin typeface="Poppins" pitchFamily="34" charset="0"/>
-                <a:ea typeface="Calibri" pitchFamily="34" charset="0"/>
-                <a:cs typeface="Calibri" pitchFamily="34" charset="0"/>
-              </a:rPr>
-              <a:t>Fait par l’association Sed’Occ France 04/2026</a:t>
-            </a:r>
-          </a:p>
-        </p:txBody>
-      </p:sp>
-      <p:pic>
-        <p:nvPicPr>
-          <p:cNvPr id="8" name="Image 7">
-            <a:extLst>
-              <a:ext uri="{FF2B5EF4-FFF2-40B4-BE49-F238E27FC236}">
-                <a16:creationId xmlns:a16="http://schemas.microsoft.com/office/drawing/2014/main" id="{21E0B056-8D9F-8042-A02E-B988B66CF19F}"/>
-              </a:ext>
-            </a:extLst>
-          </p:cNvPr>
-          <p:cNvPicPr>
-            <a:picLocks noChangeAspect="1"/>
-          </p:cNvPicPr>
-          <p:nvPr/>
-        </p:nvPicPr>
-        <p:blipFill rotWithShape="1">
-          <a:blip r:embed="rId6"/>
-          <a:srcRect l="9802" t="10888" r="15836" b="19876"/>
-          <a:stretch/>
-        </p:blipFill>
-        <p:spPr>
-          <a:xfrm>
-            <a:off x="6300000" y="9540000"/>
-            <a:ext cx="1080000" cy="1007999"/>
-          </a:xfrm>
-          <a:prstGeom prst="rect">
-            <a:avLst/>
-          </a:prstGeom>
-        </p:spPr>
-      </p:pic>
     </p:spTree>
   </p:cSld>
   <p:clrMapOvr>
@@ -8881,12 +7748,315 @@
                 <a:ea typeface="Calibri" pitchFamily="34" charset="-122"/>
                 <a:cs typeface="Calibri" pitchFamily="34" charset="-120"/>
               </a:rPr>
-              <a:t>Pour tes parents</a:t>
+              <a:t>Ensemble, on est plus forts !</a:t>
             </a:r>
             <a:endParaRPr lang="en-US" sz="3000"/>
           </a:p>
         </p:txBody>
       </p:sp>
+      <p:pic>
+        <p:nvPicPr>
+          <p:cNvPr id="3" name="Image 0" descr="unpacked/ppt/media/image_3304ECD1.jpg"/>
+          <p:cNvPicPr>
+            <a:picLocks noChangeAspect="1"/>
+          </p:cNvPicPr>
+          <p:nvPr/>
+        </p:nvPicPr>
+        <p:blipFill>
+          <a:blip r:embed="rId4"/>
+          <a:srcRect l="4962" r="4962"/>
+          <a:stretch/>
+        </p:blipFill>
+        <p:spPr>
+          <a:xfrm>
+            <a:off x="914781" y="1490708"/>
+            <a:ext cx="5733288" cy="3657796"/>
+          </a:xfrm>
+          <a:prstGeom prst="roundRect">
+            <a:avLst>
+              <a:gd name="adj" fmla="val 3000"/>
+            </a:avLst>
+          </a:prstGeom>
+          <a:effectLst>
+            <a:outerShdw blurRad="76200" dist="38100" dir="5400000" algn="t" rotWithShape="0">
+              <a:srgbClr val="8B1A2B">
+                <a:alpha val="22000"/>
+              </a:srgbClr>
+            </a:outerShdw>
+          </a:effectLst>
+        </p:spPr>
+      </p:pic>
+      <p:sp>
+        <p:nvSpPr>
+          <p:cNvPr id="4" name="Text 1"/>
+          <p:cNvSpPr/>
+          <p:nvPr/>
+        </p:nvSpPr>
+        <p:spPr>
+          <a:xfrm>
+            <a:off x="914781" y="5771474"/>
+            <a:ext cx="5533644" cy="2620845"/>
+          </a:xfrm>
+          <a:prstGeom prst="rect">
+            <a:avLst/>
+          </a:prstGeom>
+          <a:noFill/>
+          <a:ln/>
+        </p:spPr>
+        <p:txBody>
+          <a:bodyPr/>
+          <a:lstStyle/>
+          <a:p>
+            <a:pPr algn="l"/>
+            <a:r>
+              <a:rPr lang="fr-FR" sz="2400" dirty="0">
+                <a:solidFill>
+                  <a:srgbClr val="333333"/>
+                </a:solidFill>
+                <a:latin typeface="Poppins"/>
+              </a:rPr>
+              <a:t>On peut parler, se comprendre et </a:t>
+            </a:r>
+          </a:p>
+          <a:p>
+            <a:pPr algn="l"/>
+            <a:r>
+              <a:rPr lang="fr-FR" sz="2400" dirty="0">
+                <a:solidFill>
+                  <a:srgbClr val="333333"/>
+                </a:solidFill>
+                <a:latin typeface="Poppins"/>
+              </a:rPr>
+              <a:t>Trouver des solutions ensemble.</a:t>
+            </a:r>
+          </a:p>
+          <a:p>
+            <a:pPr algn="l"/>
+            <a:endParaRPr lang="fr-FR" sz="2400" dirty="0">
+              <a:solidFill>
+                <a:srgbClr val="333333"/>
+              </a:solidFill>
+              <a:latin typeface="Poppins"/>
+            </a:endParaRPr>
+          </a:p>
+          <a:p>
+            <a:pPr algn="l">
+              <a:spcBef>
+                <a:spcPts val="400"/>
+              </a:spcBef>
+            </a:pPr>
+            <a:r>
+              <a:rPr lang="fr-FR" sz="2400" b="1" dirty="0">
+                <a:solidFill>
+                  <a:srgbClr val="333333"/>
+                </a:solidFill>
+                <a:latin typeface="Poppins"/>
+              </a:rPr>
+              <a:t>C'est important de se sentir entouré.</a:t>
+            </a:r>
+          </a:p>
+          <a:p>
+            <a:pPr algn="l">
+              <a:spcBef>
+                <a:spcPts val="400"/>
+              </a:spcBef>
+            </a:pPr>
+            <a:endParaRPr lang="fr-FR" sz="2400" b="1" dirty="0">
+              <a:solidFill>
+                <a:srgbClr val="333333"/>
+              </a:solidFill>
+              <a:latin typeface="Poppins"/>
+            </a:endParaRPr>
+          </a:p>
+          <a:p>
+            <a:pPr algn="l">
+              <a:spcBef>
+                <a:spcPts val="400"/>
+              </a:spcBef>
+            </a:pPr>
+            <a:r>
+              <a:rPr lang="fr-FR" sz="2400" b="1" dirty="0">
+                <a:solidFill>
+                  <a:srgbClr val="8B1A2B"/>
+                </a:solidFill>
+                <a:latin typeface="Poppins"/>
+              </a:rPr>
+              <a:t>Tu es un super-héros, n'oublie jamais !</a:t>
+            </a:r>
+          </a:p>
+        </p:txBody>
+      </p:sp>
+      <p:sp>
+        <p:nvSpPr>
+          <p:cNvPr id="372" name="Dot 8-2"/>
+          <p:cNvSpPr/>
+          <p:nvPr/>
+        </p:nvSpPr>
+        <p:spPr>
+          <a:xfrm>
+            <a:off x="5457825" y="6095920"/>
+            <a:ext cx="79200" cy="79200"/>
+          </a:xfrm>
+          <a:prstGeom prst="ellipse">
+            <a:avLst/>
+          </a:prstGeom>
+          <a:solidFill>
+            <a:srgbClr val="FFFFFF">
+              <a:alpha val="65000"/>
+            </a:srgbClr>
+          </a:solidFill>
+          <a:ln w="12700">
+            <a:solidFill>
+              <a:srgbClr val="8B1A2B">
+                <a:alpha val="30000"/>
+              </a:srgbClr>
+            </a:solidFill>
+          </a:ln>
+        </p:spPr>
+        <p:txBody>
+          <a:bodyPr/>
+          <a:lstStyle/>
+          <a:p>
+            <a:endParaRPr lang="fr-FR"/>
+          </a:p>
+        </p:txBody>
+      </p:sp>
+      <p:sp>
+        <p:nvSpPr>
+          <p:cNvPr id="371" name="Dot 8-1"/>
+          <p:cNvSpPr/>
+          <p:nvPr/>
+        </p:nvSpPr>
+        <p:spPr>
+          <a:xfrm>
+            <a:off x="5562001" y="6258719"/>
+            <a:ext cx="125999" cy="125999"/>
+          </a:xfrm>
+          <a:prstGeom prst="ellipse">
+            <a:avLst/>
+          </a:prstGeom>
+          <a:solidFill>
+            <a:srgbClr val="FFFFFF">
+              <a:alpha val="65000"/>
+            </a:srgbClr>
+          </a:solidFill>
+          <a:ln w="12700">
+            <a:solidFill>
+              <a:srgbClr val="8B1A2B">
+                <a:alpha val="30000"/>
+              </a:srgbClr>
+            </a:solidFill>
+          </a:ln>
+        </p:spPr>
+        <p:txBody>
+          <a:bodyPr/>
+          <a:lstStyle/>
+          <a:p>
+            <a:endParaRPr lang="fr-FR"/>
+          </a:p>
+        </p:txBody>
+      </p:sp>
+      <p:sp>
+        <p:nvSpPr>
+          <p:cNvPr id="370" name="Dot 8-0"/>
+          <p:cNvSpPr/>
+          <p:nvPr/>
+        </p:nvSpPr>
+        <p:spPr>
+          <a:xfrm>
+            <a:off x="5635158" y="6409198"/>
+            <a:ext cx="180000" cy="180000"/>
+          </a:xfrm>
+          <a:prstGeom prst="ellipse">
+            <a:avLst/>
+          </a:prstGeom>
+          <a:solidFill>
+            <a:srgbClr val="FFFFFF">
+              <a:alpha val="65000"/>
+            </a:srgbClr>
+          </a:solidFill>
+          <a:ln w="12700">
+            <a:solidFill>
+              <a:srgbClr val="8B1A2B">
+                <a:alpha val="30000"/>
+              </a:srgbClr>
+            </a:solidFill>
+          </a:ln>
+        </p:spPr>
+        <p:txBody>
+          <a:bodyPr/>
+          <a:lstStyle/>
+          <a:p>
+            <a:endParaRPr lang="fr-FR"/>
+          </a:p>
+        </p:txBody>
+      </p:sp>
+      <p:sp>
+        <p:nvSpPr>
+          <p:cNvPr id="207" name="HeroBubble 8"/>
+          <p:cNvSpPr/>
+          <p:nvPr/>
+        </p:nvSpPr>
+        <p:spPr>
+          <a:xfrm>
+            <a:off x="5835539" y="6258719"/>
+            <a:ext cx="1295999" cy="1295999"/>
+          </a:xfrm>
+          <a:prstGeom prst="ellipse">
+            <a:avLst/>
+          </a:prstGeom>
+          <a:solidFill>
+            <a:srgbClr val="FFFFFF">
+              <a:alpha val="70000"/>
+            </a:srgbClr>
+          </a:solidFill>
+          <a:ln w="15875">
+            <a:solidFill>
+              <a:srgbClr val="8B1A2B">
+                <a:alpha val="35000"/>
+              </a:srgbClr>
+            </a:solidFill>
+          </a:ln>
+          <a:effectLst>
+            <a:outerShdw blurRad="40000" dist="20000" dir="5400000" algn="t" rotWithShape="0">
+              <a:srgbClr val="8B1A2B">
+                <a:alpha val="12000"/>
+              </a:srgbClr>
+            </a:outerShdw>
+          </a:effectLst>
+        </p:spPr>
+        <p:txBody>
+          <a:bodyPr/>
+          <a:lstStyle/>
+          <a:p>
+            <a:endParaRPr lang="fr-FR"/>
+          </a:p>
+        </p:txBody>
+      </p:sp>
+      <p:pic>
+        <p:nvPicPr>
+          <p:cNvPr id="5" name="Image 1" descr="unpacked/ppt/media/image_E673173E.jpg"/>
+          <p:cNvPicPr>
+            <a:picLocks noChangeAspect="1"/>
+          </p:cNvPicPr>
+          <p:nvPr/>
+        </p:nvPicPr>
+        <p:blipFill>
+          <a:blip r:embed="rId5"/>
+          <a:stretch>
+            <a:fillRect/>
+          </a:stretch>
+        </p:blipFill>
+        <p:spPr>
+          <a:xfrm>
+            <a:off x="6054851" y="6384718"/>
+            <a:ext cx="1007999" cy="1007999"/>
+          </a:xfrm>
+          <a:prstGeom prst="rect">
+            <a:avLst/>
+          </a:prstGeom>
+        </p:spPr>
+      </p:pic>
       <p:sp>
         <p:nvSpPr>
           <p:cNvPr id="99" name="Footer"/>
@@ -8954,98 +8124,6 @@
           </a:prstGeom>
         </p:spPr>
       </p:pic>
-      <p:sp>
-        <p:nvSpPr>
-          <p:cNvPr id="6" name="Rectangle 5"/>
-          <p:cNvSpPr/>
-          <p:nvPr/>
-        </p:nvSpPr>
-        <p:spPr>
-          <a:xfrm>
-            <a:off x="1281425" y="4200000"/>
-            <a:ext cx="5000000" cy="2400000"/>
-          </a:xfrm>
-          <a:prstGeom prst="rect">
-            <a:avLst/>
-          </a:prstGeom>
-        </p:spPr>
-        <p:txBody>
-          <a:bodyPr>
-            <a:spAutoFit/>
-          </a:bodyPr>
-          <a:lstStyle/>
-          <a:p>
-            <a:pPr algn="ctr">
-              <a:spcBef>
-                <a:spcPts val="300"/>
-              </a:spcBef>
-            </a:pPr>
-            <a:r>
-              <a:rPr lang="fr-FR" sz="2400" dirty="0">
-                <a:solidFill>
-                  <a:srgbClr val="666666"/>
-                </a:solidFill>
-                <a:latin typeface="Poppins"/>
-              </a:rPr>
-              <a:t>Site internet : </a:t>
-            </a:r>
-            <a:r>
-              <a:rPr lang="fr-FR" sz="2400" dirty="0" err="1">
-                <a:solidFill>
-                  <a:srgbClr val="666666"/>
-                </a:solidFill>
-                <a:latin typeface="Poppins"/>
-              </a:rPr>
-              <a:t>www.sedocc.fr</a:t>
-            </a:r>
-            <a:endParaRPr lang="fr-FR" sz="2400" dirty="0">
-              <a:solidFill>
-                <a:srgbClr val="666666"/>
-              </a:solidFill>
-              <a:latin typeface="Poppins"/>
-            </a:endParaRPr>
-          </a:p>
-          <a:p>
-            <a:pPr algn="ctr"/>
-            <a:r>
-              <a:rPr lang="fr-FR" sz="2400" dirty="0">
-                <a:solidFill>
-                  <a:srgbClr val="666666"/>
-                </a:solidFill>
-                <a:latin typeface="Poppins"/>
-              </a:rPr>
-              <a:t>Email : Sedocc31@gmail.com</a:t>
-            </a:r>
-          </a:p>
-          <a:p>
-            <a:pPr algn="ctr"/>
-            <a:r>
-              <a:rPr lang="fr-FR" sz="2400" dirty="0">
-                <a:solidFill>
-                  <a:srgbClr val="666666"/>
-                </a:solidFill>
-                <a:latin typeface="Poppins"/>
-              </a:rPr>
-              <a:t>Facebook : </a:t>
-            </a:r>
-            <a:r>
-              <a:rPr lang="fr-FR" sz="2400" dirty="0" err="1">
-                <a:solidFill>
-                  <a:srgbClr val="666666"/>
-                </a:solidFill>
-                <a:latin typeface="Poppins"/>
-              </a:rPr>
-              <a:t>SedOcc</a:t>
-            </a:r>
-            <a:endParaRPr lang="fr-FR" dirty="0">
-              <a:solidFill>
-                <a:srgbClr val="666666"/>
-              </a:solidFill>
-              <a:latin typeface="Poppins"/>
-            </a:endParaRPr>
-          </a:p>
-        </p:txBody>
-      </p:sp>
     </p:spTree>
   </p:cSld>
   <p:clrMapOvr>

--- a/documents/Livret-SED-enfant-SedOcc.pptx
+++ b/documents/Livret-SED-enfant-SedOcc.pptx
@@ -6810,7 +6810,7 @@
         </p:blipFill>
         <p:spPr>
           <a:xfrm>
-            <a:off x="408928" y="3221469"/>
+            <a:off x="408928" y="3384109"/>
             <a:ext cx="1456640" cy="1196253"/>
           </a:xfrm>
           <a:prstGeom prst="ellipse">
@@ -6840,7 +6840,7 @@
         </p:nvSpPr>
         <p:spPr>
           <a:xfrm>
-            <a:off x="1437639" y="2622902"/>
+            <a:off x="1983275" y="2904085"/>
             <a:ext cx="5317688" cy="1750000"/>
           </a:xfrm>
           <a:prstGeom prst="rect">
@@ -6865,8 +6865,13 @@
               </a:rPr>
               <a:t>Les Boucliers Magiques </a:t>
             </a:r>
-            <a:r>
-              <a:rPr lang="fr-FR" sz="2400" b="0" dirty="0">
+          </a:p>
+          <a:p>
+            <a:pPr marL="0" indent="0" algn="l">
+              <a:buNone/>
+            </a:pPr>
+            <a:r>
+              <a:rPr lang="fr-FR" sz="2000" b="0" dirty="0">
                 <a:solidFill>
                   <a:srgbClr val="8B1A2B"/>
                 </a:solidFill>
@@ -6874,6 +6879,12 @@
               </a:rPr>
               <a:t>(les attelles)</a:t>
             </a:r>
+            <a:endParaRPr lang="fr-FR" sz="2400" b="0" dirty="0">
+              <a:solidFill>
+                <a:srgbClr val="8B1A2B"/>
+              </a:solidFill>
+              <a:latin typeface="Poppins"/>
+            </a:endParaRPr>
           </a:p>
         </p:txBody>
       </p:sp>
@@ -6885,7 +6896,7 @@
         </p:nvSpPr>
         <p:spPr>
           <a:xfrm>
-            <a:off x="1983275" y="3235469"/>
+            <a:off x="1983275" y="3651115"/>
             <a:ext cx="4889759" cy="610719"/>
           </a:xfrm>
           <a:prstGeom prst="rect">
@@ -6929,7 +6940,7 @@
         </p:blipFill>
         <p:spPr>
           <a:xfrm>
-            <a:off x="457200" y="5586739"/>
+            <a:off x="433082" y="5619383"/>
             <a:ext cx="1432486" cy="1186358"/>
           </a:xfrm>
           <a:prstGeom prst="ellipse">
@@ -6959,8 +6970,8 @@
         </p:nvSpPr>
         <p:spPr>
           <a:xfrm>
-            <a:off x="1555345" y="4771859"/>
-            <a:ext cx="5507503" cy="1750000"/>
+            <a:off x="2079500" y="5170641"/>
+            <a:ext cx="5549543" cy="1750000"/>
           </a:xfrm>
           <a:prstGeom prst="rect">
             <a:avLst/>
@@ -6982,10 +6993,15 @@
                 </a:solidFill>
                 <a:latin typeface="Poppins"/>
               </a:rPr>
-              <a:t>L'Armure Secrète </a:t>
-            </a:r>
-            <a:r>
-              <a:rPr lang="fr-FR" sz="2400" b="0" dirty="0">
+              <a:t>L'Armure Secrète</a:t>
+            </a:r>
+          </a:p>
+          <a:p>
+            <a:pPr marL="0" indent="0" algn="l">
+              <a:buNone/>
+            </a:pPr>
+            <a:r>
+              <a:rPr lang="fr-FR" sz="2000" b="0" dirty="0">
                 <a:solidFill>
                   <a:srgbClr val="8B1A2B"/>
                 </a:solidFill>
@@ -6993,6 +7009,12 @@
               </a:rPr>
               <a:t>(les vêtements de compression)</a:t>
             </a:r>
+            <a:endParaRPr lang="fr-FR" sz="2400" b="0" dirty="0">
+              <a:solidFill>
+                <a:srgbClr val="8B1A2B"/>
+              </a:solidFill>
+              <a:latin typeface="Poppins"/>
+            </a:endParaRPr>
           </a:p>
         </p:txBody>
       </p:sp>
@@ -7004,7 +7026,7 @@
         </p:nvSpPr>
         <p:spPr>
           <a:xfrm>
-            <a:off x="2079500" y="5675996"/>
+            <a:off x="2079500" y="5949602"/>
             <a:ext cx="4793534" cy="1200000"/>
           </a:xfrm>
           <a:prstGeom prst="rect">
@@ -7048,8 +7070,8 @@
         </p:blipFill>
         <p:spPr>
           <a:xfrm>
-            <a:off x="520569" y="8168217"/>
-            <a:ext cx="1462706" cy="1175742"/>
+            <a:off x="459698" y="8083651"/>
+            <a:ext cx="1405870" cy="1175742"/>
           </a:xfrm>
           <a:prstGeom prst="ellipse">
             <a:avLst/>
@@ -7078,8 +7100,8 @@
         </p:nvSpPr>
         <p:spPr>
           <a:xfrm>
-            <a:off x="1702300" y="7318044"/>
-            <a:ext cx="5317688" cy="1750000"/>
+            <a:off x="2079500" y="7620840"/>
+            <a:ext cx="5402588" cy="1750000"/>
           </a:xfrm>
           <a:prstGeom prst="rect">
             <a:avLst/>
@@ -7101,10 +7123,15 @@
                 </a:solidFill>
                 <a:latin typeface="Poppins"/>
               </a:rPr>
-              <a:t>Les Super-Propulseurs </a:t>
-            </a:r>
-            <a:r>
-              <a:rPr lang="fr-FR" sz="2400" b="0" dirty="0">
+              <a:t>Les Super-Propulseurs</a:t>
+            </a:r>
+          </a:p>
+          <a:p>
+            <a:pPr marL="0" indent="0" algn="l">
+              <a:buNone/>
+            </a:pPr>
+            <a:r>
+              <a:rPr lang="fr-FR" sz="2000" b="0" dirty="0">
                 <a:solidFill>
                   <a:srgbClr val="8B1A2B"/>
                 </a:solidFill>
@@ -7112,6 +7139,12 @@
               </a:rPr>
               <a:t>(les béquilles ou le fauteuil)</a:t>
             </a:r>
+            <a:endParaRPr lang="fr-FR" sz="2400" b="0" dirty="0">
+              <a:solidFill>
+                <a:srgbClr val="8B1A2B"/>
+              </a:solidFill>
+              <a:latin typeface="Poppins"/>
+            </a:endParaRPr>
           </a:p>
         </p:txBody>
       </p:sp>
@@ -7123,7 +7156,7 @@
         </p:nvSpPr>
         <p:spPr>
           <a:xfrm>
-            <a:off x="2079500" y="8209482"/>
+            <a:off x="2079500" y="8355156"/>
             <a:ext cx="4793534" cy="1200000"/>
           </a:xfrm>
           <a:prstGeom prst="rect">
